--- a/presentation/Saab_internal_briefing.pptx
+++ b/presentation/Saab_internal_briefing.pptx
@@ -16,10 +16,6 @@
     <p:sldId id="264" r:id="rId16"/>
     <p:sldId id="265" r:id="rId17"/>
     <p:sldId id="266" r:id="rId18"/>
-    <p:sldId id="267" r:id="rId19"/>
-    <p:sldId id="268" r:id="rId20"/>
-    <p:sldId id="269" r:id="rId21"/>
-    <p:sldId id="270" r:id="rId22"/>
   </p:sldIdLst>
   <p:sldSz cx="12191695" cy="6858000" type="screen4x3"/>
   <p:notesSz cx="6858000" cy="9144000"/>
@@ -586,7 +582,7 @@
           <a:lstStyle/>
           <a:p>
             <a:r>
-              <a:t>Vanilla already has ToA as a channel. RoPE puts Δt into every query-key product.</a:t>
+              <a:t>RQ2 is no for deinterleaving alone. RQ3 is yes for time, no for stacking. Do not recommend Bias for production.</a:t>
             </a:r>
           </a:p>
         </p:txBody>
@@ -656,286 +652,6 @@
           <a:lstStyle/>
           <a:p>
             <a:r>
-              <a:t>A cache skips rebuild, not the quadratic subtract. RoPE is the cheap twin.</a:t>
-            </a:r>
-          </a:p>
-        </p:txBody>
-      </p:sp>
-      <p:sp>
-        <p:nvSpPr>
-          <p:cNvPr id="4" name="Slide Number Placeholder 3"/>
-          <p:cNvSpPr>
-            <a:spLocks noGrp="1"/>
-          </p:cNvSpPr>
-          <p:nvPr>
-            <p:ph type="sldNum" idx="5" sz="quarter"/>
-          </p:nvPr>
-        </p:nvSpPr>
-        <p:spPr/>
-      </p:sp>
-    </p:spTree>
-  </p:cSld>
-  <p:clrMapOvr>
-    <a:masterClrMapping/>
-  </p:clrMapOvr>
-</p:notes>
-</file>
-
-<file path=ppt/notesSlides/notesSlide12.xml><?xml version="1.0" encoding="utf-8"?>
-<p:notes xmlns:a="http://schemas.openxmlformats.org/drawingml/2006/main" xmlns:p="http://schemas.openxmlformats.org/presentationml/2006/main" xmlns:r="http://schemas.openxmlformats.org/officeDocument/2006/relationships">
-  <p:cSld>
-    <p:spTree>
-      <p:nvGrpSpPr>
-        <p:cNvPr id="1" name=""/>
-        <p:cNvGrpSpPr/>
-        <p:nvPr/>
-      </p:nvGrpSpPr>
-      <p:grpSpPr>
-        <a:xfrm>
-          <a:off x="0" y="0"/>
-          <a:ext cx="0" cy="0"/>
-          <a:chOff x="0" y="0"/>
-          <a:chExt cx="0" cy="0"/>
-        </a:xfrm>
-      </p:grpSpPr>
-      <p:sp>
-        <p:nvSpPr>
-          <p:cNvPr id="2" name="Slide Image Placeholder 1"/>
-          <p:cNvSpPr>
-            <a:spLocks noGrp="1"/>
-          </p:cNvSpPr>
-          <p:nvPr>
-            <p:ph type="sldImg" idx="2"/>
-          </p:nvPr>
-        </p:nvSpPr>
-        <p:spPr/>
-      </p:sp>
-      <p:sp>
-        <p:nvSpPr>
-          <p:cNvPr id="3" name="Notes Placeholder 2"/>
-          <p:cNvSpPr>
-            <a:spLocks noGrp="1"/>
-          </p:cNvSpPr>
-          <p:nvPr>
-            <p:ph type="body" idx="3" sz="quarter"/>
-          </p:nvPr>
-        </p:nvSpPr>
-        <p:spPr/>
-        <p:txBody>
-          <a:bodyPr/>
-          <a:lstStyle/>
-          <a:p>
-            <a:r>
-              <a:t>RQ1 is yes, with a leftover deinterleaving tail. Mode is already easier in the raw PDWs.</a:t>
-            </a:r>
-          </a:p>
-        </p:txBody>
-      </p:sp>
-      <p:sp>
-        <p:nvSpPr>
-          <p:cNvPr id="4" name="Slide Number Placeholder 3"/>
-          <p:cNvSpPr>
-            <a:spLocks noGrp="1"/>
-          </p:cNvSpPr>
-          <p:nvPr>
-            <p:ph type="sldNum" idx="5" sz="quarter"/>
-          </p:nvPr>
-        </p:nvSpPr>
-        <p:spPr/>
-      </p:sp>
-    </p:spTree>
-  </p:cSld>
-  <p:clrMapOvr>
-    <a:masterClrMapping/>
-  </p:clrMapOvr>
-</p:notes>
-</file>
-
-<file path=ppt/notesSlides/notesSlide13.xml><?xml version="1.0" encoding="utf-8"?>
-<p:notes xmlns:a="http://schemas.openxmlformats.org/drawingml/2006/main" xmlns:p="http://schemas.openxmlformats.org/presentationml/2006/main" xmlns:r="http://schemas.openxmlformats.org/officeDocument/2006/relationships">
-  <p:cSld>
-    <p:spTree>
-      <p:nvGrpSpPr>
-        <p:cNvPr id="1" name=""/>
-        <p:cNvGrpSpPr/>
-        <p:nvPr/>
-      </p:nvGrpSpPr>
-      <p:grpSpPr>
-        <a:xfrm>
-          <a:off x="0" y="0"/>
-          <a:ext cx="0" cy="0"/>
-          <a:chOff x="0" y="0"/>
-          <a:chExt cx="0" cy="0"/>
-        </a:xfrm>
-      </p:grpSpPr>
-      <p:sp>
-        <p:nvSpPr>
-          <p:cNvPr id="2" name="Slide Image Placeholder 1"/>
-          <p:cNvSpPr>
-            <a:spLocks noGrp="1"/>
-          </p:cNvSpPr>
-          <p:nvPr>
-            <p:ph type="sldImg" idx="2"/>
-          </p:nvPr>
-        </p:nvSpPr>
-        <p:spPr/>
-      </p:sp>
-      <p:sp>
-        <p:nvSpPr>
-          <p:cNvPr id="3" name="Notes Placeholder 2"/>
-          <p:cNvSpPr>
-            <a:spLocks noGrp="1"/>
-          </p:cNvSpPr>
-          <p:nvPr>
-            <p:ph type="body" idx="3" sz="quarter"/>
-          </p:nvPr>
-        </p:nvSpPr>
-        <p:spPr/>
-        <p:txBody>
-          <a:bodyPr/>
-          <a:lstStyle/>
-          <a:p>
-            <a:r>
-              <a:t>RQ2 is no for deinterleaving alone. RQ3 is yes for time, no for stacking.</a:t>
-            </a:r>
-          </a:p>
-        </p:txBody>
-      </p:sp>
-      <p:sp>
-        <p:nvSpPr>
-          <p:cNvPr id="4" name="Slide Number Placeholder 3"/>
-          <p:cNvSpPr>
-            <a:spLocks noGrp="1"/>
-          </p:cNvSpPr>
-          <p:nvPr>
-            <p:ph type="sldNum" idx="5" sz="quarter"/>
-          </p:nvPr>
-        </p:nvSpPr>
-        <p:spPr/>
-      </p:sp>
-    </p:spTree>
-  </p:cSld>
-  <p:clrMapOvr>
-    <a:masterClrMapping/>
-  </p:clrMapOvr>
-</p:notes>
-</file>
-
-<file path=ppt/notesSlides/notesSlide14.xml><?xml version="1.0" encoding="utf-8"?>
-<p:notes xmlns:a="http://schemas.openxmlformats.org/drawingml/2006/main" xmlns:p="http://schemas.openxmlformats.org/presentationml/2006/main" xmlns:r="http://schemas.openxmlformats.org/officeDocument/2006/relationships">
-  <p:cSld>
-    <p:spTree>
-      <p:nvGrpSpPr>
-        <p:cNvPr id="1" name=""/>
-        <p:cNvGrpSpPr/>
-        <p:nvPr/>
-      </p:nvGrpSpPr>
-      <p:grpSpPr>
-        <a:xfrm>
-          <a:off x="0" y="0"/>
-          <a:ext cx="0" cy="0"/>
-          <a:chOff x="0" y="0"/>
-          <a:chExt cx="0" cy="0"/>
-        </a:xfrm>
-      </p:grpSpPr>
-      <p:sp>
-        <p:nvSpPr>
-          <p:cNvPr id="2" name="Slide Image Placeholder 1"/>
-          <p:cNvSpPr>
-            <a:spLocks noGrp="1"/>
-          </p:cNvSpPr>
-          <p:nvPr>
-            <p:ph type="sldImg" idx="2"/>
-          </p:nvPr>
-        </p:nvSpPr>
-        <p:spPr/>
-      </p:sp>
-      <p:sp>
-        <p:nvSpPr>
-          <p:cNvPr id="3" name="Notes Placeholder 2"/>
-          <p:cNvSpPr>
-            <a:spLocks noGrp="1"/>
-          </p:cNvSpPr>
-          <p:nvPr>
-            <p:ph type="body" idx="3" sz="quarter"/>
-          </p:nvPr>
-        </p:nvSpPr>
-        <p:spPr/>
-        <p:txBody>
-          <a:bodyPr/>
-          <a:lstStyle/>
-          <a:p>
-            <a:r>
-              <a:t>Do not recommend Bias for production on this evidence.</a:t>
-            </a:r>
-          </a:p>
-        </p:txBody>
-      </p:sp>
-      <p:sp>
-        <p:nvSpPr>
-          <p:cNvPr id="4" name="Slide Number Placeholder 3"/>
-          <p:cNvSpPr>
-            <a:spLocks noGrp="1"/>
-          </p:cNvSpPr>
-          <p:nvPr>
-            <p:ph type="sldNum" idx="5" sz="quarter"/>
-          </p:nvPr>
-        </p:nvSpPr>
-        <p:spPr/>
-      </p:sp>
-    </p:spTree>
-  </p:cSld>
-  <p:clrMapOvr>
-    <a:masterClrMapping/>
-  </p:clrMapOvr>
-</p:notes>
-</file>
-
-<file path=ppt/notesSlides/notesSlide15.xml><?xml version="1.0" encoding="utf-8"?>
-<p:notes xmlns:a="http://schemas.openxmlformats.org/drawingml/2006/main" xmlns:p="http://schemas.openxmlformats.org/presentationml/2006/main" xmlns:r="http://schemas.openxmlformats.org/officeDocument/2006/relationships">
-  <p:cSld>
-    <p:spTree>
-      <p:nvGrpSpPr>
-        <p:cNvPr id="1" name=""/>
-        <p:cNvGrpSpPr/>
-        <p:nvPr/>
-      </p:nvGrpSpPr>
-      <p:grpSpPr>
-        <a:xfrm>
-          <a:off x="0" y="0"/>
-          <a:ext cx="0" cy="0"/>
-          <a:chOff x="0" y="0"/>
-          <a:chExt cx="0" cy="0"/>
-        </a:xfrm>
-      </p:grpSpPr>
-      <p:sp>
-        <p:nvSpPr>
-          <p:cNvPr id="2" name="Slide Image Placeholder 1"/>
-          <p:cNvSpPr>
-            <a:spLocks noGrp="1"/>
-          </p:cNvSpPr>
-          <p:nvPr>
-            <p:ph type="sldImg" idx="2"/>
-          </p:nvPr>
-        </p:nvSpPr>
-        <p:spPr/>
-      </p:sp>
-      <p:sp>
-        <p:nvSpPr>
-          <p:cNvPr id="3" name="Notes Placeholder 2"/>
-          <p:cNvSpPr>
-            <a:spLocks noGrp="1"/>
-          </p:cNvSpPr>
-          <p:nvPr>
-            <p:ph type="body" idx="3" sz="quarter"/>
-          </p:nvPr>
-        </p:nvSpPr>
-        <p:spPr/>
-        <p:txBody>
-          <a:bodyPr/>
-          <a:lstStyle/>
-          <a:p>
-            <a:r>
               <a:t>Stop. Questions. Mamba: not compared. Real data: not scored. Tracks: future work.</a:t>
             </a:r>
           </a:p>
@@ -1006,7 +722,7 @@
           <a:lstStyle/>
           <a:p>
             <a:r>
-              <a:t>Classical chain deinterleaves first. We want both partitions from the mixed list.</a:t>
+              <a:t>Classical chain deinterleaves first. We want both partitions from the mixed list. Answers at the end.</a:t>
             </a:r>
           </a:p>
         </p:txBody>
@@ -1076,7 +792,7 @@
           <a:lstStyle/>
           <a:p>
             <a:r>
-              <a:t>Answers at the end. First the data.</a:t>
+              <a:t>Walk the amplitude panel. Gaps between purple lobes are the rotation.</a:t>
             </a:r>
           </a:p>
         </p:txBody>
@@ -1146,7 +862,7 @@
           <a:lstStyle/>
           <a:p>
             <a:r>
-              <a:t>Walk the amplitude panel. Gaps between purple lobes are the rotation.</a:t>
+              <a:t>Why attention rather than an O(L) state. Feature DBSCAN completeness 0.52 on emitters.</a:t>
             </a:r>
           </a:p>
         </p:txBody>
@@ -1216,7 +932,7 @@
           <a:lstStyle/>
           <a:p>
             <a:r>
-              <a:t>Feature DBSCAN completeness 0.52 on emitters: extra clusters that are internally pure.</a:t>
+              <a:t>The two similarities can fight in the trunk. Do not claim a Mamba bake-off.</a:t>
             </a:r>
           </a:p>
         </p:txBody>
@@ -1286,7 +1002,7 @@
           <a:lstStyle/>
           <a:p>
             <a:r>
-              <a:t>Why attention rather than an O(L) state.</a:t>
+              <a:t>Next two slides are the animations. Let them play once.</a:t>
             </a:r>
           </a:p>
         </p:txBody>
@@ -1356,7 +1072,7 @@
           <a:lstStyle/>
           <a:p>
             <a:r>
-              <a:t>Do not claim a Mamba bake-off. Claim the inductive bias.</a:t>
+              <a:t>Vanilla already has ToA as a channel. RoPE puts Δt into every query-key product.</a:t>
             </a:r>
           </a:p>
         </p:txBody>
@@ -1426,7 +1142,7 @@
           <a:lstStyle/>
           <a:p>
             <a:r>
-              <a:t>The two similarities can fight in the trunk.</a:t>
+              <a:t>A cache skips rebuild, not the quadratic subtract. RoPE is the cheap twin.</a:t>
             </a:r>
           </a:p>
         </p:txBody>
@@ -1496,7 +1212,7 @@
           <a:lstStyle/>
           <a:p>
             <a:r>
-              <a:t>Next two slides are the animations. Let them play once.</a:t>
+              <a:t>RQ1 is yes, with a leftover deinterleaving tail. Mode is already easier in the raw PDWs.</a:t>
             </a:r>
           </a:p>
         </p:txBody>
@@ -4861,7 +4577,7 @@
                 </a:solidFill>
                 <a:latin typeface="Calibri"/>
               </a:rPr>
-              <a:t>1 / 15</a:t>
+              <a:t>1 / 11</a:t>
             </a:r>
           </a:p>
         </p:txBody>
@@ -4992,20 +4708,67 @@
           <a:p>
             <a:pPr algn="l"/>
             <a:r>
-              <a:rPr sz="2200" b="1" i="0">
+              <a:rPr sz="2000" b="1" i="0">
                 <a:solidFill>
                   <a:srgbClr val="142034"/>
                 </a:solidFill>
                 <a:latin typeface="Calibri"/>
               </a:rPr>
-              <a:t>RoPE-TOA  ·  the score is the rotated dot product</a:t>
-            </a:r>
+              <a:t>Joint is a tax on Vanilla. Time in attention removes it.</a:t>
+            </a:r>
+          </a:p>
+        </p:txBody>
+      </p:sp>
+      <p:sp>
+        <p:nvSpPr>
+          <p:cNvPr id="5" name="Rounded Rectangle 4"/>
+          <p:cNvSpPr/>
+          <p:nvPr/>
+        </p:nvSpPr>
+        <p:spPr>
+          <a:xfrm>
+            <a:off x="246888" y="457200"/>
+            <a:ext cx="3986784" cy="2364045"/>
+          </a:xfrm>
+          <a:prstGeom prst="roundRect">
+            <a:avLst>
+              <a:gd name="adj" fmla="val 4000"/>
+            </a:avLst>
+          </a:prstGeom>
+          <a:solidFill>
+            <a:srgbClr val="F3F6F8"/>
+          </a:solidFill>
+          <a:ln w="12700">
+            <a:solidFill>
+              <a:srgbClr val="D2DAE2"/>
+            </a:solidFill>
+          </a:ln>
+        </p:spPr>
+        <p:style>
+          <a:lnRef idx="1">
+            <a:schemeClr val="accent1"/>
+          </a:lnRef>
+          <a:fillRef idx="3">
+            <a:schemeClr val="accent1"/>
+          </a:fillRef>
+          <a:effectRef idx="2">
+            <a:schemeClr val="accent1"/>
+          </a:effectRef>
+          <a:fontRef idx="minor">
+            <a:schemeClr val="lt1"/>
+          </a:fontRef>
+        </p:style>
+        <p:txBody>
+          <a:bodyPr rtlCol="0" anchor="ctr"/>
+          <a:lstStyle/>
+          <a:p>
+            <a:pPr algn="ctr"/>
           </a:p>
         </p:txBody>
       </p:sp>
       <p:pic>
         <p:nvPicPr>
-          <p:cNvPr id="5" name="Picture 4" descr="RoPEToA.gif"/>
+          <p:cNvPr id="6" name="Picture 5" descr="joint_tax.png"/>
           <p:cNvPicPr>
             <a:picLocks noChangeAspect="1"/>
           </p:cNvPicPr>
@@ -5019,8 +4782,8 @@
         </p:blipFill>
         <p:spPr>
           <a:xfrm>
-            <a:off x="411480" y="530352"/>
-            <a:ext cx="7955279" cy="4480560"/>
+            <a:off x="320040" y="530352"/>
+            <a:ext cx="3840480" cy="2217741"/>
           </a:xfrm>
           <a:prstGeom prst="rect">
             <a:avLst/>
@@ -5029,13 +4792,188 @@
       </p:pic>
       <p:sp>
         <p:nvSpPr>
-          <p:cNvPr id="6" name="Oval 5"/>
+          <p:cNvPr id="7" name="Rounded Rectangle 6"/>
           <p:cNvSpPr/>
           <p:nvPr/>
         </p:nvSpPr>
         <p:spPr>
           <a:xfrm>
-            <a:off x="8549640" y="777240"/>
+            <a:off x="4133088" y="457200"/>
+            <a:ext cx="4078224" cy="2135392"/>
+          </a:xfrm>
+          <a:prstGeom prst="roundRect">
+            <a:avLst>
+              <a:gd name="adj" fmla="val 4000"/>
+            </a:avLst>
+          </a:prstGeom>
+          <a:solidFill>
+            <a:srgbClr val="F3F6F8"/>
+          </a:solidFill>
+          <a:ln w="12700">
+            <a:solidFill>
+              <a:srgbClr val="D2DAE2"/>
+            </a:solidFill>
+          </a:ln>
+        </p:spPr>
+        <p:style>
+          <a:lnRef idx="1">
+            <a:schemeClr val="accent1"/>
+          </a:lnRef>
+          <a:fillRef idx="3">
+            <a:schemeClr val="accent1"/>
+          </a:fillRef>
+          <a:effectRef idx="2">
+            <a:schemeClr val="accent1"/>
+          </a:effectRef>
+          <a:fontRef idx="minor">
+            <a:schemeClr val="lt1"/>
+          </a:fontRef>
+        </p:style>
+        <p:txBody>
+          <a:bodyPr rtlCol="0" anchor="ctr"/>
+          <a:lstStyle/>
+          <a:p>
+            <a:pPr algn="ctr"/>
+          </a:p>
+        </p:txBody>
+      </p:sp>
+      <p:pic>
+        <p:nvPicPr>
+          <p:cNvPr id="8" name="Picture 7" descr="emitter_ari.png"/>
+          <p:cNvPicPr>
+            <a:picLocks noChangeAspect="1"/>
+          </p:cNvPicPr>
+          <p:nvPr/>
+        </p:nvPicPr>
+        <p:blipFill>
+          <a:blip r:embed="rId3"/>
+          <a:stretch>
+            <a:fillRect/>
+          </a:stretch>
+        </p:blipFill>
+        <p:spPr>
+          <a:xfrm>
+            <a:off x="4206240" y="530352"/>
+            <a:ext cx="3931920" cy="1989088"/>
+          </a:xfrm>
+          <a:prstGeom prst="rect">
+            <a:avLst/>
+          </a:prstGeom>
+        </p:spPr>
+      </p:pic>
+      <p:sp>
+        <p:nvSpPr>
+          <p:cNvPr id="9" name="Rounded Rectangle 8"/>
+          <p:cNvSpPr/>
+          <p:nvPr/>
+        </p:nvSpPr>
+        <p:spPr>
+          <a:xfrm>
+            <a:off x="8156448" y="457200"/>
+            <a:ext cx="3758184" cy="2172145"/>
+          </a:xfrm>
+          <a:prstGeom prst="roundRect">
+            <a:avLst>
+              <a:gd name="adj" fmla="val 4000"/>
+            </a:avLst>
+          </a:prstGeom>
+          <a:solidFill>
+            <a:srgbClr val="F3F6F8"/>
+          </a:solidFill>
+          <a:ln w="12700">
+            <a:solidFill>
+              <a:srgbClr val="D2DAE2"/>
+            </a:solidFill>
+          </a:ln>
+        </p:spPr>
+        <p:style>
+          <a:lnRef idx="1">
+            <a:schemeClr val="accent1"/>
+          </a:lnRef>
+          <a:fillRef idx="3">
+            <a:schemeClr val="accent1"/>
+          </a:fillRef>
+          <a:effectRef idx="2">
+            <a:schemeClr val="accent1"/>
+          </a:effectRef>
+          <a:fontRef idx="minor">
+            <a:schemeClr val="lt1"/>
+          </a:fontRef>
+        </p:style>
+        <p:txBody>
+          <a:bodyPr rtlCol="0" anchor="ctr"/>
+          <a:lstStyle/>
+          <a:p>
+            <a:pPr algn="ctr"/>
+          </a:p>
+        </p:txBody>
+      </p:sp>
+      <p:pic>
+        <p:nvPicPr>
+          <p:cNvPr id="10" name="Picture 9" descr="encoder_time.png"/>
+          <p:cNvPicPr>
+            <a:picLocks noChangeAspect="1"/>
+          </p:cNvPicPr>
+          <p:nvPr/>
+        </p:nvPicPr>
+        <p:blipFill>
+          <a:blip r:embed="rId4"/>
+          <a:stretch>
+            <a:fillRect/>
+          </a:stretch>
+        </p:blipFill>
+        <p:spPr>
+          <a:xfrm>
+            <a:off x="8229600" y="530352"/>
+            <a:ext cx="3611880" cy="2025841"/>
+          </a:xfrm>
+          <a:prstGeom prst="rect">
+            <a:avLst/>
+          </a:prstGeom>
+        </p:spPr>
+      </p:pic>
+      <p:sp>
+        <p:nvSpPr>
+          <p:cNvPr id="11" name="TextBox 10"/>
+          <p:cNvSpPr txBox="1"/>
+          <p:nvPr/>
+        </p:nvSpPr>
+        <p:spPr>
+          <a:xfrm>
+            <a:off x="457200" y="3657600"/>
+            <a:ext cx="11247120" cy="777240"/>
+          </a:xfrm>
+          <a:prstGeom prst="rect">
+            <a:avLst/>
+          </a:prstGeom>
+          <a:noFill/>
+        </p:spPr>
+        <p:txBody>
+          <a:bodyPr wrap="square" anchor="t"/>
+          <a:lstStyle/>
+          <a:p>
+            <a:pPr algn="l"/>
+            <a:r>
+              <a:rPr sz="1400" b="0" i="0">
+                <a:solidFill>
+                  <a:srgbClr val="142034"/>
+                </a:solidFill>
+                <a:latin typeface="Calibri"/>
+              </a:rPr>
+              <a:t>Emitter-only Vanilla hits 0.999; joint drops to 0.948. RoPE-TOA and Bias close the tail (ARI 1.000) without that tax. RoPE-az 0.973. Stacking the two time devices scores below Vanilla. RoPE-TOA is +0.9 ms; Bias is ~32 ms encoder.</a:t>
+            </a:r>
+          </a:p>
+        </p:txBody>
+      </p:sp>
+      <p:sp>
+        <p:nvSpPr>
+          <p:cNvPr id="12" name="Oval 11"/>
+          <p:cNvSpPr/>
+          <p:nvPr/>
+        </p:nvSpPr>
+        <p:spPr>
+          <a:xfrm>
+            <a:off x="502920" y="4526280"/>
             <a:ext cx="109728" cy="109728"/>
           </a:xfrm>
           <a:prstGeom prst="ellipse">
@@ -5072,14 +5010,14 @@
       </p:sp>
       <p:sp>
         <p:nvSpPr>
-          <p:cNvPr id="7" name="TextBox 6"/>
+          <p:cNvPr id="13" name="TextBox 12"/>
           <p:cNvSpPr txBox="1"/>
           <p:nvPr/>
         </p:nvSpPr>
         <p:spPr>
           <a:xfrm>
-            <a:off x="8805672" y="685800"/>
-            <a:ext cx="3035808" cy="694944"/>
+            <a:off x="758952" y="4434840"/>
+            <a:ext cx="10899648" cy="512063"/>
           </a:xfrm>
           <a:prstGeom prst="rect">
             <a:avLst/>
@@ -5092,26 +5030,26 @@
           <a:p>
             <a:pPr algn="l"/>
             <a:r>
-              <a:rPr sz="1300" b="0" i="0">
+              <a:rPr sz="1400" b="0" i="0">
                 <a:solidFill>
                   <a:srgbClr val="142034"/>
                 </a:solidFill>
                 <a:latin typeface="Calibri"/>
               </a:rPr>
-              <a:t>q · k = cos φ.</a:t>
-            </a:r>
-          </a:p>
-        </p:txBody>
-      </p:sp>
-      <p:sp>
-        <p:nvSpPr>
-          <p:cNvPr id="8" name="Oval 7"/>
+              <a:t>Both partitions from the mixed window → joint RoPE-TOA. Do not stack the bias.</a:t>
+            </a:r>
+          </a:p>
+        </p:txBody>
+      </p:sp>
+      <p:sp>
+        <p:nvSpPr>
+          <p:cNvPr id="14" name="Oval 13"/>
           <p:cNvSpPr/>
           <p:nvPr/>
         </p:nvSpPr>
         <p:spPr>
           <a:xfrm>
-            <a:off x="8549640" y="1399032"/>
+            <a:off x="502920" y="4965192"/>
             <a:ext cx="109728" cy="109728"/>
           </a:xfrm>
           <a:prstGeom prst="ellipse">
@@ -5148,14 +5086,14 @@
       </p:sp>
       <p:sp>
         <p:nvSpPr>
-          <p:cNvPr id="9" name="TextBox 8"/>
+          <p:cNvPr id="15" name="TextBox 14"/>
           <p:cNvSpPr txBox="1"/>
           <p:nvPr/>
         </p:nvSpPr>
         <p:spPr>
           <a:xfrm>
-            <a:off x="8805672" y="1307592"/>
-            <a:ext cx="3035808" cy="694944"/>
+            <a:off x="758952" y="4873752"/>
+            <a:ext cx="10899648" cy="512063"/>
           </a:xfrm>
           <a:prstGeom prst="rect">
             <a:avLst/>
@@ -5168,26 +5106,26 @@
           <a:p>
             <a:pPr algn="l"/>
             <a:r>
-              <a:rPr sz="1300" b="0" i="0">
+              <a:rPr sz="1400" b="0" i="0">
                 <a:solidFill>
                   <a:srgbClr val="142034"/>
                 </a:solidFill>
                 <a:latin typeface="Calibri"/>
               </a:rPr>
-              <a:t>Rotate each by its own ToA.</a:t>
-            </a:r>
-          </a:p>
-        </p:txBody>
-      </p:sp>
-      <p:sp>
-        <p:nvSpPr>
-          <p:cNvPr id="10" name="Oval 9"/>
+              <a:t>Deinterleaving only → emitter-only Vanilla is already at the ceiling. Cluster IDs die at the window edge.</a:t>
+            </a:r>
+          </a:p>
+        </p:txBody>
+      </p:sp>
+      <p:sp>
+        <p:nvSpPr>
+          <p:cNvPr id="16" name="Oval 15"/>
           <p:cNvSpPr/>
           <p:nvPr/>
         </p:nvSpPr>
         <p:spPr>
           <a:xfrm>
-            <a:off x="8549640" y="2020824"/>
+            <a:off x="502920" y="5404104"/>
             <a:ext cx="109728" cy="109728"/>
           </a:xfrm>
           <a:prstGeom prst="ellipse">
@@ -5224,14 +5162,14 @@
       </p:sp>
       <p:sp>
         <p:nvSpPr>
-          <p:cNvPr id="11" name="TextBox 10"/>
+          <p:cNvPr id="17" name="TextBox 16"/>
           <p:cNvSpPr txBox="1"/>
           <p:nvPr/>
         </p:nvSpPr>
         <p:spPr>
           <a:xfrm>
-            <a:off x="8805672" y="1929384"/>
-            <a:ext cx="3035808" cy="694944"/>
+            <a:off x="758952" y="5312664"/>
+            <a:ext cx="10899648" cy="512063"/>
           </a:xfrm>
           <a:prstGeom prst="rect">
             <a:avLst/>
@@ -5244,241 +5182,13 @@
           <a:p>
             <a:pPr algn="l"/>
             <a:r>
-              <a:rPr sz="1300" b="0" i="0">
+              <a:rPr sz="1400" b="0" i="0">
                 <a:solidFill>
                   <a:srgbClr val="142034"/>
                 </a:solidFill>
                 <a:latin typeface="Calibri"/>
               </a:rPr>
-              <a:t>New angle: φ + Δt · ω.</a:t>
-            </a:r>
-          </a:p>
-        </p:txBody>
-      </p:sp>
-      <p:sp>
-        <p:nvSpPr>
-          <p:cNvPr id="12" name="Oval 11"/>
-          <p:cNvSpPr/>
-          <p:nvPr/>
-        </p:nvSpPr>
-        <p:spPr>
-          <a:xfrm>
-            <a:off x="8549640" y="2642616"/>
-            <a:ext cx="109728" cy="109728"/>
-          </a:xfrm>
-          <a:prstGeom prst="ellipse">
-            <a:avLst/>
-          </a:prstGeom>
-          <a:solidFill>
-            <a:srgbClr val="0A7A96"/>
-          </a:solidFill>
-          <a:ln>
-            <a:noFill/>
-          </a:ln>
-        </p:spPr>
-        <p:style>
-          <a:lnRef idx="1">
-            <a:schemeClr val="accent1"/>
-          </a:lnRef>
-          <a:fillRef idx="3">
-            <a:schemeClr val="accent1"/>
-          </a:fillRef>
-          <a:effectRef idx="2">
-            <a:schemeClr val="accent1"/>
-          </a:effectRef>
-          <a:fontRef idx="minor">
-            <a:schemeClr val="lt1"/>
-          </a:fontRef>
-        </p:style>
-        <p:txBody>
-          <a:bodyPr rtlCol="0" anchor="ctr"/>
-          <a:lstStyle/>
-          <a:p>
-            <a:pPr algn="ctr"/>
-          </a:p>
-        </p:txBody>
-      </p:sp>
-      <p:sp>
-        <p:nvSpPr>
-          <p:cNvPr id="13" name="TextBox 12"/>
-          <p:cNvSpPr txBox="1"/>
-          <p:nvPr/>
-        </p:nvSpPr>
-        <p:spPr>
-          <a:xfrm>
-            <a:off x="8805672" y="2551176"/>
-            <a:ext cx="3035808" cy="694944"/>
-          </a:xfrm>
-          <a:prstGeom prst="rect">
-            <a:avLst/>
-          </a:prstGeom>
-          <a:noFill/>
-        </p:spPr>
-        <p:txBody>
-          <a:bodyPr wrap="square" anchor="t"/>
-          <a:lstStyle/>
-          <a:p>
-            <a:pPr algn="l"/>
-            <a:r>
-              <a:rPr sz="1300" b="0" i="0">
-                <a:solidFill>
-                  <a:srgbClr val="142034"/>
-                </a:solidFill>
-                <a:latin typeface="Calibri"/>
-              </a:rPr>
-              <a:t>Close in time → small extra twist, high score.</a:t>
-            </a:r>
-          </a:p>
-        </p:txBody>
-      </p:sp>
-      <p:sp>
-        <p:nvSpPr>
-          <p:cNvPr id="14" name="Oval 13"/>
-          <p:cNvSpPr/>
-          <p:nvPr/>
-        </p:nvSpPr>
-        <p:spPr>
-          <a:xfrm>
-            <a:off x="8549640" y="3264408"/>
-            <a:ext cx="109728" cy="109728"/>
-          </a:xfrm>
-          <a:prstGeom prst="ellipse">
-            <a:avLst/>
-          </a:prstGeom>
-          <a:solidFill>
-            <a:srgbClr val="0A7A96"/>
-          </a:solidFill>
-          <a:ln>
-            <a:noFill/>
-          </a:ln>
-        </p:spPr>
-        <p:style>
-          <a:lnRef idx="1">
-            <a:schemeClr val="accent1"/>
-          </a:lnRef>
-          <a:fillRef idx="3">
-            <a:schemeClr val="accent1"/>
-          </a:fillRef>
-          <a:effectRef idx="2">
-            <a:schemeClr val="accent1"/>
-          </a:effectRef>
-          <a:fontRef idx="minor">
-            <a:schemeClr val="lt1"/>
-          </a:fontRef>
-        </p:style>
-        <p:txBody>
-          <a:bodyPr rtlCol="0" anchor="ctr"/>
-          <a:lstStyle/>
-          <a:p>
-            <a:pPr algn="ctr"/>
-          </a:p>
-        </p:txBody>
-      </p:sp>
-      <p:sp>
-        <p:nvSpPr>
-          <p:cNvPr id="15" name="TextBox 14"/>
-          <p:cNvSpPr txBox="1"/>
-          <p:nvPr/>
-        </p:nvSpPr>
-        <p:spPr>
-          <a:xfrm>
-            <a:off x="8805672" y="3172968"/>
-            <a:ext cx="3035808" cy="694944"/>
-          </a:xfrm>
-          <a:prstGeom prst="rect">
-            <a:avLst/>
-          </a:prstGeom>
-          <a:noFill/>
-        </p:spPr>
-        <p:txBody>
-          <a:bodyPr wrap="square" anchor="t"/>
-          <a:lstStyle/>
-          <a:p>
-            <a:pPr algn="l"/>
-            <a:r>
-              <a:rPr sz="1300" b="0" i="0">
-                <a:solidFill>
-                  <a:srgbClr val="142034"/>
-                </a:solidFill>
-                <a:latin typeface="Calibri"/>
-              </a:rPr>
-              <a:t>Far in time → larger twist, lower score.</a:t>
-            </a:r>
-          </a:p>
-        </p:txBody>
-      </p:sp>
-      <p:sp>
-        <p:nvSpPr>
-          <p:cNvPr id="16" name="Oval 15"/>
-          <p:cNvSpPr/>
-          <p:nvPr/>
-        </p:nvSpPr>
-        <p:spPr>
-          <a:xfrm>
-            <a:off x="8549640" y="3886200"/>
-            <a:ext cx="109728" cy="109728"/>
-          </a:xfrm>
-          <a:prstGeom prst="ellipse">
-            <a:avLst/>
-          </a:prstGeom>
-          <a:solidFill>
-            <a:srgbClr val="0A7A96"/>
-          </a:solidFill>
-          <a:ln>
-            <a:noFill/>
-          </a:ln>
-        </p:spPr>
-        <p:style>
-          <a:lnRef idx="1">
-            <a:schemeClr val="accent1"/>
-          </a:lnRef>
-          <a:fillRef idx="3">
-            <a:schemeClr val="accent1"/>
-          </a:fillRef>
-          <a:effectRef idx="2">
-            <a:schemeClr val="accent1"/>
-          </a:effectRef>
-          <a:fontRef idx="minor">
-            <a:schemeClr val="lt1"/>
-          </a:fontRef>
-        </p:style>
-        <p:txBody>
-          <a:bodyPr rtlCol="0" anchor="ctr"/>
-          <a:lstStyle/>
-          <a:p>
-            <a:pPr algn="ctr"/>
-          </a:p>
-        </p:txBody>
-      </p:sp>
-      <p:sp>
-        <p:nvSpPr>
-          <p:cNvPr id="17" name="TextBox 16"/>
-          <p:cNvSpPr txBox="1"/>
-          <p:nvPr/>
-        </p:nvSpPr>
-        <p:spPr>
-          <a:xfrm>
-            <a:off x="8805672" y="3794760"/>
-            <a:ext cx="3035808" cy="694944"/>
-          </a:xfrm>
-          <a:prstGeom prst="rect">
-            <a:avLst/>
-          </a:prstGeom>
-          <a:noFill/>
-        </p:spPr>
-        <p:txBody>
-          <a:bodyPr wrap="square" anchor="t"/>
-          <a:lstStyle/>
-          <a:p>
-            <a:pPr algn="l"/>
-            <a:r>
-              <a:rPr sz="1300" b="0" i="0">
-                <a:solidFill>
-                  <a:srgbClr val="142034"/>
-                </a:solidFill>
-                <a:latin typeface="Calibri"/>
-              </a:rPr>
-              <a:t>GIF loops. Prefer the MP4, play once.</a:t>
+              <a:t>Synthetic. Held-out modulations and operational data are not scored.</a:t>
             </a:r>
           </a:p>
         </p:txBody>
@@ -5589,7 +5299,7 @@
                 </a:solidFill>
                 <a:latin typeface="Calibri"/>
               </a:rPr>
-              <a:t>10 / 15</a:t>
+              <a:t>10 / 11</a:t>
             </a:r>
           </a:p>
         </p:txBody>
@@ -5706,8 +5416,8 @@
         </p:nvSpPr>
         <p:spPr>
           <a:xfrm>
-            <a:off x="502920" y="164592"/>
-            <a:ext cx="10972800" cy="320040"/>
+            <a:off x="502920" y="228600"/>
+            <a:ext cx="10972800" cy="411480"/>
           </a:xfrm>
           <a:prstGeom prst="rect">
             <a:avLst/>
@@ -5720,54 +5430,79 @@
           <a:p>
             <a:pPr algn="l"/>
             <a:r>
-              <a:rPr sz="2200" b="1" i="0">
+              <a:rPr sz="2600" b="1" i="0">
                 <a:solidFill>
                   <a:srgbClr val="142034"/>
                 </a:solidFill>
                 <a:latin typeface="Calibri"/>
               </a:rPr>
-              <a:t>Physical bias  ·  learned λ on delta maps, subtracted from A</a:t>
-            </a:r>
-          </a:p>
-        </p:txBody>
-      </p:sp>
-      <p:pic>
-        <p:nvPicPr>
-          <p:cNvPr id="5" name="Picture 4" descr="PhysicalBias.gif"/>
-          <p:cNvPicPr>
-            <a:picLocks noChangeAspect="1"/>
-          </p:cNvPicPr>
-          <p:nvPr/>
-        </p:nvPicPr>
-        <p:blipFill>
-          <a:blip r:embed="rId2"/>
-          <a:stretch>
-            <a:fillRect/>
-          </a:stretch>
-        </p:blipFill>
-        <p:spPr>
-          <a:xfrm>
-            <a:off x="411480" y="530352"/>
-            <a:ext cx="7955279" cy="4480560"/>
-          </a:xfrm>
-          <a:prstGeom prst="rect">
-            <a:avLst/>
-          </a:prstGeom>
-        </p:spPr>
-      </p:pic>
-      <p:sp>
-        <p:nvSpPr>
-          <p:cNvPr id="6" name="Oval 5"/>
+              <a:t>In one breath</a:t>
+            </a:r>
+          </a:p>
+        </p:txBody>
+      </p:sp>
+      <p:sp>
+        <p:nvSpPr>
+          <p:cNvPr id="5" name="Rounded Rectangle 4"/>
           <p:cNvSpPr/>
           <p:nvPr/>
         </p:nvSpPr>
         <p:spPr>
           <a:xfrm>
-            <a:off x="8549640" y="777240"/>
-            <a:ext cx="109728" cy="109728"/>
-          </a:xfrm>
-          <a:prstGeom prst="ellipse">
-            <a:avLst/>
+            <a:off x="502920" y="914400"/>
+            <a:ext cx="11155680" cy="1188720"/>
+          </a:xfrm>
+          <a:prstGeom prst="roundRect">
+            <a:avLst>
+              <a:gd name="adj" fmla="val 8000"/>
+            </a:avLst>
+          </a:prstGeom>
+          <a:solidFill>
+            <a:srgbClr val="F3F6F8"/>
+          </a:solidFill>
+          <a:ln w="12700">
+            <a:solidFill>
+              <a:srgbClr val="D2DAE2"/>
+            </a:solidFill>
+          </a:ln>
+        </p:spPr>
+        <p:style>
+          <a:lnRef idx="1">
+            <a:schemeClr val="accent1"/>
+          </a:lnRef>
+          <a:fillRef idx="3">
+            <a:schemeClr val="accent1"/>
+          </a:fillRef>
+          <a:effectRef idx="2">
+            <a:schemeClr val="accent1"/>
+          </a:effectRef>
+          <a:fontRef idx="minor">
+            <a:schemeClr val="lt1"/>
+          </a:fontRef>
+        </p:style>
+        <p:txBody>
+          <a:bodyPr rtlCol="0" anchor="ctr"/>
+          <a:lstStyle/>
+          <a:p>
+            <a:pPr algn="ctr"/>
+          </a:p>
+        </p:txBody>
+      </p:sp>
+      <p:sp>
+        <p:nvSpPr>
+          <p:cNvPr id="6" name="Rounded Rectangle 5"/>
+          <p:cNvSpPr/>
+          <p:nvPr/>
+        </p:nvSpPr>
+        <p:spPr>
+          <a:xfrm>
+            <a:off x="731520" y="1280160"/>
+            <a:ext cx="1097280" cy="438912"/>
+          </a:xfrm>
+          <a:prstGeom prst="roundRect">
+            <a:avLst>
+              <a:gd name="adj" fmla="val 20000"/>
+            </a:avLst>
           </a:prstGeom>
           <a:solidFill>
             <a:srgbClr val="0A7A96"/>
@@ -5806,8 +5541,8 @@
         </p:nvSpPr>
         <p:spPr>
           <a:xfrm>
-            <a:off x="8805672" y="685800"/>
-            <a:ext cx="3035808" cy="731519"/>
+            <a:off x="731520" y="1316736"/>
+            <a:ext cx="1097280" cy="384048"/>
           </a:xfrm>
           <a:prstGeom prst="rect">
             <a:avLst/>
@@ -5818,32 +5553,114 @@
           <a:bodyPr wrap="square" anchor="t"/>
           <a:lstStyle/>
           <a:p>
+            <a:pPr algn="ctr"/>
+            <a:r>
+              <a:rPr sz="1600" b="1" i="0">
+                <a:solidFill>
+                  <a:srgbClr val="FFFFFF"/>
+                </a:solidFill>
+                <a:latin typeface="Calibri"/>
+              </a:rPr>
+              <a:t>RQ1</a:t>
+            </a:r>
+          </a:p>
+        </p:txBody>
+      </p:sp>
+      <p:sp>
+        <p:nvSpPr>
+          <p:cNvPr id="8" name="TextBox 7"/>
+          <p:cNvSpPr txBox="1"/>
+          <p:nvPr/>
+        </p:nvSpPr>
+        <p:spPr>
+          <a:xfrm>
+            <a:off x="2057400" y="1207008"/>
+            <a:ext cx="9281160" cy="640080"/>
+          </a:xfrm>
+          <a:prstGeom prst="rect">
+            <a:avLst/>
+          </a:prstGeom>
+          <a:noFill/>
+        </p:spPr>
+        <p:txBody>
+          <a:bodyPr wrap="square" anchor="t"/>
+          <a:lstStyle/>
+          <a:p>
             <a:pPr algn="l"/>
             <a:r>
-              <a:rPr sz="1300" b="0" i="0">
+              <a:rPr sz="1600" b="0" i="0">
                 <a:solidFill>
                   <a:srgbClr val="142034"/>
                 </a:solidFill>
                 <a:latin typeface="Calibri"/>
               </a:rPr>
-              <a:t>|ΔToA| and |Δ incidence| from the inputs.</a:t>
-            </a:r>
-          </a:p>
-        </p:txBody>
-      </p:sp>
-      <p:sp>
-        <p:nvSpPr>
-          <p:cNvPr id="8" name="Oval 7"/>
+              <a:t>Yes. Vanilla recovers both partitions on most windows. Feature DBSCAN does not.</a:t>
+            </a:r>
+          </a:p>
+        </p:txBody>
+      </p:sp>
+      <p:sp>
+        <p:nvSpPr>
+          <p:cNvPr id="9" name="Rounded Rectangle 8"/>
           <p:cNvSpPr/>
           <p:nvPr/>
         </p:nvSpPr>
         <p:spPr>
           <a:xfrm>
-            <a:off x="8549640" y="1435608"/>
-            <a:ext cx="109728" cy="109728"/>
-          </a:xfrm>
-          <a:prstGeom prst="ellipse">
-            <a:avLst/>
+            <a:off x="502920" y="2240280"/>
+            <a:ext cx="11155680" cy="1188720"/>
+          </a:xfrm>
+          <a:prstGeom prst="roundRect">
+            <a:avLst>
+              <a:gd name="adj" fmla="val 8000"/>
+            </a:avLst>
+          </a:prstGeom>
+          <a:solidFill>
+            <a:srgbClr val="F3F6F8"/>
+          </a:solidFill>
+          <a:ln w="12700">
+            <a:solidFill>
+              <a:srgbClr val="D2DAE2"/>
+            </a:solidFill>
+          </a:ln>
+        </p:spPr>
+        <p:style>
+          <a:lnRef idx="1">
+            <a:schemeClr val="accent1"/>
+          </a:lnRef>
+          <a:fillRef idx="3">
+            <a:schemeClr val="accent1"/>
+          </a:fillRef>
+          <a:effectRef idx="2">
+            <a:schemeClr val="accent1"/>
+          </a:effectRef>
+          <a:fontRef idx="minor">
+            <a:schemeClr val="lt1"/>
+          </a:fontRef>
+        </p:style>
+        <p:txBody>
+          <a:bodyPr rtlCol="0" anchor="ctr"/>
+          <a:lstStyle/>
+          <a:p>
+            <a:pPr algn="ctr"/>
+          </a:p>
+        </p:txBody>
+      </p:sp>
+      <p:sp>
+        <p:nvSpPr>
+          <p:cNvPr id="10" name="Rounded Rectangle 9"/>
+          <p:cNvSpPr/>
+          <p:nvPr/>
+        </p:nvSpPr>
+        <p:spPr>
+          <a:xfrm>
+            <a:off x="731520" y="2606040"/>
+            <a:ext cx="1097280" cy="438912"/>
+          </a:xfrm>
+          <a:prstGeom prst="roundRect">
+            <a:avLst>
+              <a:gd name="adj" fmla="val 20000"/>
+            </a:avLst>
           </a:prstGeom>
           <a:solidFill>
             <a:srgbClr val="0A7A96"/>
@@ -5876,14 +5693,14 @@
       </p:sp>
       <p:sp>
         <p:nvSpPr>
-          <p:cNvPr id="9" name="TextBox 8"/>
+          <p:cNvPr id="11" name="TextBox 10"/>
           <p:cNvSpPr txBox="1"/>
           <p:nvPr/>
         </p:nvSpPr>
         <p:spPr>
           <a:xfrm>
-            <a:off x="8805672" y="1344168"/>
-            <a:ext cx="3035808" cy="731519"/>
+            <a:off x="731520" y="2642616"/>
+            <a:ext cx="1097280" cy="384048"/>
           </a:xfrm>
           <a:prstGeom prst="rect">
             <a:avLst/>
@@ -5894,32 +5711,114 @@
           <a:bodyPr wrap="square" anchor="t"/>
           <a:lstStyle/>
           <a:p>
+            <a:pPr algn="ctr"/>
+            <a:r>
+              <a:rPr sz="1600" b="1" i="0">
+                <a:solidFill>
+                  <a:srgbClr val="FFFFFF"/>
+                </a:solidFill>
+                <a:latin typeface="Calibri"/>
+              </a:rPr>
+              <a:t>RQ2</a:t>
+            </a:r>
+          </a:p>
+        </p:txBody>
+      </p:sp>
+      <p:sp>
+        <p:nvSpPr>
+          <p:cNvPr id="12" name="TextBox 11"/>
+          <p:cNvSpPr txBox="1"/>
+          <p:nvPr/>
+        </p:nvSpPr>
+        <p:spPr>
+          <a:xfrm>
+            <a:off x="2057400" y="2532888"/>
+            <a:ext cx="9281160" cy="640080"/>
+          </a:xfrm>
+          <a:prstGeom prst="rect">
+            <a:avLst/>
+          </a:prstGeom>
+          <a:noFill/>
+        </p:spPr>
+        <p:txBody>
+          <a:bodyPr wrap="square" anchor="t"/>
+          <a:lstStyle/>
+          <a:p>
             <a:pPr algn="l"/>
             <a:r>
-              <a:rPr sz="1300" b="0" i="0">
+              <a:rPr sz="1600" b="0" i="0">
                 <a:solidFill>
                   <a:srgbClr val="142034"/>
                 </a:solidFill>
                 <a:latin typeface="Calibri"/>
               </a:rPr>
-              <a:t>λ_t, λ_x: one scalar per head.</a:t>
-            </a:r>
-          </a:p>
-        </p:txBody>
-      </p:sp>
-      <p:sp>
-        <p:nvSpPr>
-          <p:cNvPr id="10" name="Oval 9"/>
+              <a:t>No, if you only need deinterleaving. Joint taxes emitters on Vanilla. RoPE-TOA does not pay that tax.</a:t>
+            </a:r>
+          </a:p>
+        </p:txBody>
+      </p:sp>
+      <p:sp>
+        <p:nvSpPr>
+          <p:cNvPr id="13" name="Rounded Rectangle 12"/>
           <p:cNvSpPr/>
           <p:nvPr/>
         </p:nvSpPr>
         <p:spPr>
           <a:xfrm>
-            <a:off x="8549640" y="2093976"/>
-            <a:ext cx="109728" cy="109728"/>
-          </a:xfrm>
-          <a:prstGeom prst="ellipse">
-            <a:avLst/>
+            <a:off x="502920" y="3566160"/>
+            <a:ext cx="11155680" cy="1188720"/>
+          </a:xfrm>
+          <a:prstGeom prst="roundRect">
+            <a:avLst>
+              <a:gd name="adj" fmla="val 8000"/>
+            </a:avLst>
+          </a:prstGeom>
+          <a:solidFill>
+            <a:srgbClr val="F3F6F8"/>
+          </a:solidFill>
+          <a:ln w="12700">
+            <a:solidFill>
+              <a:srgbClr val="D2DAE2"/>
+            </a:solidFill>
+          </a:ln>
+        </p:spPr>
+        <p:style>
+          <a:lnRef idx="1">
+            <a:schemeClr val="accent1"/>
+          </a:lnRef>
+          <a:fillRef idx="3">
+            <a:schemeClr val="accent1"/>
+          </a:fillRef>
+          <a:effectRef idx="2">
+            <a:schemeClr val="accent1"/>
+          </a:effectRef>
+          <a:fontRef idx="minor">
+            <a:schemeClr val="lt1"/>
+          </a:fontRef>
+        </p:style>
+        <p:txBody>
+          <a:bodyPr rtlCol="0" anchor="ctr"/>
+          <a:lstStyle/>
+          <a:p>
+            <a:pPr algn="ctr"/>
+          </a:p>
+        </p:txBody>
+      </p:sp>
+      <p:sp>
+        <p:nvSpPr>
+          <p:cNvPr id="14" name="Rounded Rectangle 13"/>
+          <p:cNvSpPr/>
+          <p:nvPr/>
+        </p:nvSpPr>
+        <p:spPr>
+          <a:xfrm>
+            <a:off x="731520" y="3931920"/>
+            <a:ext cx="1097280" cy="438912"/>
+          </a:xfrm>
+          <a:prstGeom prst="roundRect">
+            <a:avLst>
+              <a:gd name="adj" fmla="val 20000"/>
+            </a:avLst>
           </a:prstGeom>
           <a:solidFill>
             <a:srgbClr val="0A7A96"/>
@@ -5952,14 +5851,14 @@
       </p:sp>
       <p:sp>
         <p:nvSpPr>
-          <p:cNvPr id="11" name="TextBox 10"/>
+          <p:cNvPr id="15" name="TextBox 14"/>
           <p:cNvSpPr txBox="1"/>
           <p:nvPr/>
         </p:nvSpPr>
         <p:spPr>
           <a:xfrm>
-            <a:off x="8805672" y="2002536"/>
-            <a:ext cx="3035808" cy="731519"/>
+            <a:off x="731520" y="3968496"/>
+            <a:ext cx="1097280" cy="384048"/>
           </a:xfrm>
           <a:prstGeom prst="rect">
             <a:avLst/>
@@ -5970,72 +5869,62 @@
           <a:bodyPr wrap="square" anchor="t"/>
           <a:lstStyle/>
           <a:p>
+            <a:pPr algn="ctr"/>
+            <a:r>
+              <a:rPr sz="1600" b="1" i="0">
+                <a:solidFill>
+                  <a:srgbClr val="FFFFFF"/>
+                </a:solidFill>
+                <a:latin typeface="Calibri"/>
+              </a:rPr>
+              <a:t>RQ3</a:t>
+            </a:r>
+          </a:p>
+        </p:txBody>
+      </p:sp>
+      <p:sp>
+        <p:nvSpPr>
+          <p:cNvPr id="16" name="TextBox 15"/>
+          <p:cNvSpPr txBox="1"/>
+          <p:nvPr/>
+        </p:nvSpPr>
+        <p:spPr>
+          <a:xfrm>
+            <a:off x="2057400" y="3858768"/>
+            <a:ext cx="9281160" cy="640080"/>
+          </a:xfrm>
+          <a:prstGeom prst="rect">
+            <a:avLst/>
+          </a:prstGeom>
+          <a:noFill/>
+        </p:spPr>
+        <p:txBody>
+          <a:bodyPr wrap="square" anchor="t"/>
+          <a:lstStyle/>
+          <a:p>
             <a:pPr algn="l"/>
             <a:r>
-              <a:rPr sz="1300" b="0" i="0">
+              <a:rPr sz="1600" b="0" i="0">
                 <a:solidFill>
                   <a:srgbClr val="142034"/>
                 </a:solidFill>
                 <a:latin typeface="Calibri"/>
               </a:rPr>
-              <a:t>Bias λB is subtracted from vanilla A.</a:t>
-            </a:r>
-          </a:p>
-        </p:txBody>
-      </p:sp>
-      <p:sp>
-        <p:nvSpPr>
-          <p:cNvPr id="12" name="Oval 11"/>
-          <p:cNvSpPr/>
-          <p:nvPr/>
-        </p:nvSpPr>
-        <p:spPr>
-          <a:xfrm>
-            <a:off x="8549640" y="2752344"/>
-            <a:ext cx="109728" cy="109728"/>
-          </a:xfrm>
-          <a:prstGeom prst="ellipse">
-            <a:avLst/>
-          </a:prstGeom>
-          <a:solidFill>
-            <a:srgbClr val="0A7A96"/>
-          </a:solidFill>
-          <a:ln>
-            <a:noFill/>
-          </a:ln>
-        </p:spPr>
-        <p:style>
-          <a:lnRef idx="1">
-            <a:schemeClr val="accent1"/>
-          </a:lnRef>
-          <a:fillRef idx="3">
-            <a:schemeClr val="accent1"/>
-          </a:fillRef>
-          <a:effectRef idx="2">
-            <a:schemeClr val="accent1"/>
-          </a:effectRef>
-          <a:fontRef idx="minor">
-            <a:schemeClr val="lt1"/>
-          </a:fontRef>
-        </p:style>
-        <p:txBody>
-          <a:bodyPr rtlCol="0" anchor="ctr"/>
-          <a:lstStyle/>
-          <a:p>
-            <a:pPr algn="ctr"/>
-          </a:p>
-        </p:txBody>
-      </p:sp>
-      <p:sp>
-        <p:nvSpPr>
-          <p:cNvPr id="13" name="TextBox 12"/>
+              <a:t>Yes for time. RoPE-TOA or the pairwise bias close the emitter tail. Stacking them does not. RoPE is the one you want.</a:t>
+            </a:r>
+          </a:p>
+        </p:txBody>
+      </p:sp>
+      <p:sp>
+        <p:nvSpPr>
+          <p:cNvPr id="17" name="TextBox 16"/>
           <p:cNvSpPr txBox="1"/>
           <p:nvPr/>
         </p:nvSpPr>
         <p:spPr>
           <a:xfrm>
-            <a:off x="8805672" y="2660904"/>
-            <a:ext cx="3035808" cy="731519"/>
+            <a:off x="548640" y="5029200"/>
+            <a:ext cx="11064240" cy="1051560"/>
           </a:xfrm>
           <a:prstGeom prst="rect">
             <a:avLst/>
@@ -6048,96 +5937,20 @@
           <a:p>
             <a:pPr algn="l"/>
             <a:r>
-              <a:rPr sz="1300" b="0" i="0">
+              <a:rPr sz="1400" b="0" i="0">
                 <a:solidFill>
-                  <a:srgbClr val="142034"/>
+                  <a:srgbClr val="5A687A"/>
                 </a:solidFill>
                 <a:latin typeface="Calibri"/>
               </a:rPr>
-              <a:t>Same-direction, nearby pulses stay bright.</a:t>
-            </a:r>
-          </a:p>
-        </p:txBody>
-      </p:sp>
-      <p:sp>
-        <p:nvSpPr>
-          <p:cNvPr id="14" name="Oval 13"/>
-          <p:cNvSpPr/>
-          <p:nvPr/>
-        </p:nvSpPr>
-        <p:spPr>
-          <a:xfrm>
-            <a:off x="8549640" y="3410712"/>
-            <a:ext cx="109728" cy="109728"/>
-          </a:xfrm>
-          <a:prstGeom prst="ellipse">
-            <a:avLst/>
-          </a:prstGeom>
-          <a:solidFill>
-            <a:srgbClr val="0A7A96"/>
-          </a:solidFill>
-          <a:ln>
-            <a:noFill/>
-          </a:ln>
-        </p:spPr>
-        <p:style>
-          <a:lnRef idx="1">
-            <a:schemeClr val="accent1"/>
-          </a:lnRef>
-          <a:fillRef idx="3">
-            <a:schemeClr val="accent1"/>
-          </a:fillRef>
-          <a:effectRef idx="2">
-            <a:schemeClr val="accent1"/>
-          </a:effectRef>
-          <a:fontRef idx="minor">
-            <a:schemeClr val="lt1"/>
-          </a:fontRef>
-        </p:style>
-        <p:txBody>
-          <a:bodyPr rtlCol="0" anchor="ctr"/>
-          <a:lstStyle/>
-          <a:p>
-            <a:pPr algn="ctr"/>
-          </a:p>
-        </p:txBody>
-      </p:sp>
-      <p:sp>
-        <p:nvSpPr>
-          <p:cNvPr id="15" name="TextBox 14"/>
-          <p:cNvSpPr txBox="1"/>
-          <p:nvPr/>
-        </p:nvSpPr>
-        <p:spPr>
-          <a:xfrm>
-            <a:off x="8805672" y="3319272"/>
-            <a:ext cx="3035808" cy="731519"/>
-          </a:xfrm>
-          <a:prstGeom prst="rect">
-            <a:avLst/>
-          </a:prstGeom>
-          <a:noFill/>
-        </p:spPr>
-        <p:txBody>
-          <a:bodyPr wrap="square" anchor="t"/>
-          <a:lstStyle/>
-          <a:p>
-            <a:pPr algn="l"/>
-            <a:r>
-              <a:rPr sz="1300" b="0" i="0">
-                <a:solidFill>
-                  <a:srgbClr val="142034"/>
-                </a:solidFill>
-                <a:latin typeface="Calibri"/>
-              </a:rPr>
-              <a:t>Maps are L×L. That is the bill.</a:t>
-            </a:r>
-          </a:p>
-        </p:txBody>
-      </p:sp>
-      <p:sp>
-        <p:nvSpPr>
-          <p:cNvPr id="16" name="Rectangle 15"/>
+              <a:t>The data is unbalanced because physics is: lock-on versus a 2–5 s scan, low PRI versus high PRI. Attention is expensive because associating non-adjacent pulses is an all-pairs question. Putting time into that product closed the last errors.</a:t>
+            </a:r>
+          </a:p>
+        </p:txBody>
+      </p:sp>
+      <p:sp>
+        <p:nvSpPr>
+          <p:cNvPr id="18" name="Rectangle 17"/>
           <p:cNvSpPr/>
           <p:nvPr/>
         </p:nvSpPr>
@@ -6182,7 +5995,7 @@
       </p:sp>
       <p:sp>
         <p:nvSpPr>
-          <p:cNvPr id="17" name="TextBox 16"/>
+          <p:cNvPr id="19" name="TextBox 18"/>
           <p:cNvSpPr txBox="1"/>
           <p:nvPr/>
         </p:nvSpPr>
@@ -6215,7 +6028,7 @@
       </p:sp>
       <p:sp>
         <p:nvSpPr>
-          <p:cNvPr id="18" name="TextBox 17"/>
+          <p:cNvPr id="20" name="TextBox 19"/>
           <p:cNvSpPr txBox="1"/>
           <p:nvPr/>
         </p:nvSpPr>
@@ -6241,2659 +6054,7 @@
                 </a:solidFill>
                 <a:latin typeface="Calibri"/>
               </a:rPr>
-              <a:t>11 / 15</a:t>
-            </a:r>
-          </a:p>
-        </p:txBody>
-      </p:sp>
-    </p:spTree>
-  </p:cSld>
-  <p:clrMapOvr>
-    <a:masterClrMapping/>
-  </p:clrMapOvr>
-</p:sld>
-</file>
-
-<file path=ppt/slides/slide12.xml><?xml version="1.0" encoding="utf-8"?>
-<p:sld xmlns:a="http://schemas.openxmlformats.org/drawingml/2006/main" xmlns:p="http://schemas.openxmlformats.org/presentationml/2006/main" xmlns:r="http://schemas.openxmlformats.org/officeDocument/2006/relationships">
-  <p:cSld>
-    <p:spTree>
-      <p:nvGrpSpPr>
-        <p:cNvPr id="1" name=""/>
-        <p:cNvGrpSpPr/>
-        <p:nvPr/>
-      </p:nvGrpSpPr>
-      <p:grpSpPr/>
-      <p:sp>
-        <p:nvSpPr>
-          <p:cNvPr id="2" name="Rectangle 1"/>
-          <p:cNvSpPr/>
-          <p:nvPr/>
-        </p:nvSpPr>
-        <p:spPr>
-          <a:xfrm>
-            <a:off x="0" y="0"/>
-            <a:ext cx="12191695" cy="6858000"/>
-          </a:xfrm>
-          <a:prstGeom prst="rect">
-            <a:avLst/>
-          </a:prstGeom>
-          <a:solidFill>
-            <a:srgbClr val="FFFFFF"/>
-          </a:solidFill>
-          <a:ln>
-            <a:noFill/>
-          </a:ln>
-        </p:spPr>
-        <p:style>
-          <a:lnRef idx="1">
-            <a:schemeClr val="accent1"/>
-          </a:lnRef>
-          <a:fillRef idx="3">
-            <a:schemeClr val="accent1"/>
-          </a:fillRef>
-          <a:effectRef idx="2">
-            <a:schemeClr val="accent1"/>
-          </a:effectRef>
-          <a:fontRef idx="minor">
-            <a:schemeClr val="lt1"/>
-          </a:fontRef>
-        </p:style>
-        <p:txBody>
-          <a:bodyPr rtlCol="0" anchor="ctr"/>
-          <a:lstStyle/>
-          <a:p>
-            <a:pPr algn="ctr"/>
-          </a:p>
-        </p:txBody>
-      </p:sp>
-      <p:sp>
-        <p:nvSpPr>
-          <p:cNvPr id="3" name="Rectangle 2"/>
-          <p:cNvSpPr/>
-          <p:nvPr/>
-        </p:nvSpPr>
-        <p:spPr>
-          <a:xfrm>
-            <a:off x="0" y="0"/>
-            <a:ext cx="12191695" cy="64008"/>
-          </a:xfrm>
-          <a:prstGeom prst="rect">
-            <a:avLst/>
-          </a:prstGeom>
-          <a:solidFill>
-            <a:srgbClr val="0A7A96"/>
-          </a:solidFill>
-          <a:ln>
-            <a:noFill/>
-          </a:ln>
-        </p:spPr>
-        <p:style>
-          <a:lnRef idx="1">
-            <a:schemeClr val="accent1"/>
-          </a:lnRef>
-          <a:fillRef idx="3">
-            <a:schemeClr val="accent1"/>
-          </a:fillRef>
-          <a:effectRef idx="2">
-            <a:schemeClr val="accent1"/>
-          </a:effectRef>
-          <a:fontRef idx="minor">
-            <a:schemeClr val="lt1"/>
-          </a:fontRef>
-        </p:style>
-        <p:txBody>
-          <a:bodyPr rtlCol="0" anchor="ctr"/>
-          <a:lstStyle/>
-          <a:p>
-            <a:pPr algn="ctr"/>
-          </a:p>
-        </p:txBody>
-      </p:sp>
-      <p:sp>
-        <p:nvSpPr>
-          <p:cNvPr id="4" name="TextBox 3"/>
-          <p:cNvSpPr txBox="1"/>
-          <p:nvPr/>
-        </p:nvSpPr>
-        <p:spPr>
-          <a:xfrm>
-            <a:off x="502920" y="182880"/>
-            <a:ext cx="10972800" cy="365760"/>
-          </a:xfrm>
-          <a:prstGeom prst="rect">
-            <a:avLst/>
-          </a:prstGeom>
-          <a:noFill/>
-        </p:spPr>
-        <p:txBody>
-          <a:bodyPr wrap="square" anchor="t"/>
-          <a:lstStyle/>
-          <a:p>
-            <a:pPr algn="l"/>
-            <a:r>
-              <a:rPr sz="2400" b="1" i="0">
-                <a:solidFill>
-                  <a:srgbClr val="142034"/>
-                </a:solidFill>
-                <a:latin typeface="Calibri"/>
-              </a:rPr>
-              <a:t>Vanilla already works on most windows</a:t>
-            </a:r>
-          </a:p>
-        </p:txBody>
-      </p:sp>
-      <p:sp>
-        <p:nvSpPr>
-          <p:cNvPr id="5" name="Rounded Rectangle 4"/>
-          <p:cNvSpPr/>
-          <p:nvPr/>
-        </p:nvSpPr>
-        <p:spPr>
-          <a:xfrm>
-            <a:off x="292608" y="566928"/>
-            <a:ext cx="6867144" cy="3704706"/>
-          </a:xfrm>
-          <a:prstGeom prst="roundRect">
-            <a:avLst>
-              <a:gd name="adj" fmla="val 4000"/>
-            </a:avLst>
-          </a:prstGeom>
-          <a:solidFill>
-            <a:srgbClr val="F3F6F8"/>
-          </a:solidFill>
-          <a:ln w="12700">
-            <a:solidFill>
-              <a:srgbClr val="D2DAE2"/>
-            </a:solidFill>
-          </a:ln>
-        </p:spPr>
-        <p:style>
-          <a:lnRef idx="1">
-            <a:schemeClr val="accent1"/>
-          </a:lnRef>
-          <a:fillRef idx="3">
-            <a:schemeClr val="accent1"/>
-          </a:fillRef>
-          <a:effectRef idx="2">
-            <a:schemeClr val="accent1"/>
-          </a:effectRef>
-          <a:fontRef idx="minor">
-            <a:schemeClr val="lt1"/>
-          </a:fontRef>
-        </p:style>
-        <p:txBody>
-          <a:bodyPr rtlCol="0" anchor="ctr"/>
-          <a:lstStyle/>
-          <a:p>
-            <a:pPr algn="ctr"/>
-          </a:p>
-        </p:txBody>
-      </p:sp>
-      <p:pic>
-        <p:nvPicPr>
-          <p:cNvPr id="6" name="Picture 5" descr="hist_em.png"/>
-          <p:cNvPicPr>
-            <a:picLocks noChangeAspect="1"/>
-          </p:cNvPicPr>
-          <p:nvPr/>
-        </p:nvPicPr>
-        <p:blipFill>
-          <a:blip r:embed="rId2"/>
-          <a:stretch>
-            <a:fillRect/>
-          </a:stretch>
-        </p:blipFill>
-        <p:spPr>
-          <a:xfrm>
-            <a:off x="365760" y="640080"/>
-            <a:ext cx="6720840" cy="3558402"/>
-          </a:xfrm>
-          <a:prstGeom prst="rect">
-            <a:avLst/>
-          </a:prstGeom>
-        </p:spPr>
-      </p:pic>
-      <p:sp>
-        <p:nvSpPr>
-          <p:cNvPr id="7" name="Oval 6"/>
-          <p:cNvSpPr/>
-          <p:nvPr/>
-        </p:nvSpPr>
-        <p:spPr>
-          <a:xfrm>
-            <a:off x="7315200" y="868680"/>
-            <a:ext cx="109728" cy="109728"/>
-          </a:xfrm>
-          <a:prstGeom prst="ellipse">
-            <a:avLst/>
-          </a:prstGeom>
-          <a:solidFill>
-            <a:srgbClr val="0A7A96"/>
-          </a:solidFill>
-          <a:ln>
-            <a:noFill/>
-          </a:ln>
-        </p:spPr>
-        <p:style>
-          <a:lnRef idx="1">
-            <a:schemeClr val="accent1"/>
-          </a:lnRef>
-          <a:fillRef idx="3">
-            <a:schemeClr val="accent1"/>
-          </a:fillRef>
-          <a:effectRef idx="2">
-            <a:schemeClr val="accent1"/>
-          </a:effectRef>
-          <a:fontRef idx="minor">
-            <a:schemeClr val="lt1"/>
-          </a:fontRef>
-        </p:style>
-        <p:txBody>
-          <a:bodyPr rtlCol="0" anchor="ctr"/>
-          <a:lstStyle/>
-          <a:p>
-            <a:pPr algn="ctr"/>
-          </a:p>
-        </p:txBody>
-      </p:sp>
-      <p:sp>
-        <p:nvSpPr>
-          <p:cNvPr id="8" name="TextBox 7"/>
-          <p:cNvSpPr txBox="1"/>
-          <p:nvPr/>
-        </p:nvSpPr>
-        <p:spPr>
-          <a:xfrm>
-            <a:off x="7571232" y="777240"/>
-            <a:ext cx="4224528" cy="786384"/>
-          </a:xfrm>
-          <a:prstGeom prst="rect">
-            <a:avLst/>
-          </a:prstGeom>
-          <a:noFill/>
-        </p:spPr>
-        <p:txBody>
-          <a:bodyPr wrap="square" anchor="t"/>
-          <a:lstStyle/>
-          <a:p>
-            <a:pPr algn="l"/>
-            <a:r>
-              <a:rPr sz="1400" b="0" i="0">
-                <a:solidFill>
-                  <a:srgbClr val="142034"/>
-                </a:solidFill>
-                <a:latin typeface="Calibri"/>
-              </a:rPr>
-              <a:t>Feature DBSCAN emitter ARI 0.58, ~7 extra clusters. Completeness 0.52.</a:t>
-            </a:r>
-          </a:p>
-        </p:txBody>
-      </p:sp>
-      <p:sp>
-        <p:nvSpPr>
-          <p:cNvPr id="9" name="Oval 8"/>
-          <p:cNvSpPr/>
-          <p:nvPr/>
-        </p:nvSpPr>
-        <p:spPr>
-          <a:xfrm>
-            <a:off x="7315200" y="1581912"/>
-            <a:ext cx="109728" cy="109728"/>
-          </a:xfrm>
-          <a:prstGeom prst="ellipse">
-            <a:avLst/>
-          </a:prstGeom>
-          <a:solidFill>
-            <a:srgbClr val="0A7A96"/>
-          </a:solidFill>
-          <a:ln>
-            <a:noFill/>
-          </a:ln>
-        </p:spPr>
-        <p:style>
-          <a:lnRef idx="1">
-            <a:schemeClr val="accent1"/>
-          </a:lnRef>
-          <a:fillRef idx="3">
-            <a:schemeClr val="accent1"/>
-          </a:fillRef>
-          <a:effectRef idx="2">
-            <a:schemeClr val="accent1"/>
-          </a:effectRef>
-          <a:fontRef idx="minor">
-            <a:schemeClr val="lt1"/>
-          </a:fontRef>
-        </p:style>
-        <p:txBody>
-          <a:bodyPr rtlCol="0" anchor="ctr"/>
-          <a:lstStyle/>
-          <a:p>
-            <a:pPr algn="ctr"/>
-          </a:p>
-        </p:txBody>
-      </p:sp>
-      <p:sp>
-        <p:nvSpPr>
-          <p:cNvPr id="10" name="TextBox 9"/>
-          <p:cNvSpPr txBox="1"/>
-          <p:nvPr/>
-        </p:nvSpPr>
-        <p:spPr>
-          <a:xfrm>
-            <a:off x="7571232" y="1490472"/>
-            <a:ext cx="4224528" cy="786384"/>
-          </a:xfrm>
-          <a:prstGeom prst="rect">
-            <a:avLst/>
-          </a:prstGeom>
-          <a:noFill/>
-        </p:spPr>
-        <p:txBody>
-          <a:bodyPr wrap="square" anchor="t"/>
-          <a:lstStyle/>
-          <a:p>
-            <a:pPr algn="l"/>
-            <a:r>
-              <a:rPr sz="1400" b="0" i="0">
-                <a:solidFill>
-                  <a:srgbClr val="142034"/>
-                </a:solidFill>
-                <a:latin typeface="Calibri"/>
-              </a:rPr>
-              <a:t>Vanilla joint: 0.95 emitter, 0.99 mode.</a:t>
-            </a:r>
-          </a:p>
-        </p:txBody>
-      </p:sp>
-      <p:sp>
-        <p:nvSpPr>
-          <p:cNvPr id="11" name="Oval 10"/>
-          <p:cNvSpPr/>
-          <p:nvPr/>
-        </p:nvSpPr>
-        <p:spPr>
-          <a:xfrm>
-            <a:off x="7315200" y="2295144"/>
-            <a:ext cx="109728" cy="109728"/>
-          </a:xfrm>
-          <a:prstGeom prst="ellipse">
-            <a:avLst/>
-          </a:prstGeom>
-          <a:solidFill>
-            <a:srgbClr val="0A7A96"/>
-          </a:solidFill>
-          <a:ln>
-            <a:noFill/>
-          </a:ln>
-        </p:spPr>
-        <p:style>
-          <a:lnRef idx="1">
-            <a:schemeClr val="accent1"/>
-          </a:lnRef>
-          <a:fillRef idx="3">
-            <a:schemeClr val="accent1"/>
-          </a:fillRef>
-          <a:effectRef idx="2">
-            <a:schemeClr val="accent1"/>
-          </a:effectRef>
-          <a:fontRef idx="minor">
-            <a:schemeClr val="lt1"/>
-          </a:fontRef>
-        </p:style>
-        <p:txBody>
-          <a:bodyPr rtlCol="0" anchor="ctr"/>
-          <a:lstStyle/>
-          <a:p>
-            <a:pPr algn="ctr"/>
-          </a:p>
-        </p:txBody>
-      </p:sp>
-      <p:sp>
-        <p:nvSpPr>
-          <p:cNvPr id="12" name="TextBox 11"/>
-          <p:cNvSpPr txBox="1"/>
-          <p:nvPr/>
-        </p:nvSpPr>
-        <p:spPr>
-          <a:xfrm>
-            <a:off x="7571232" y="2203704"/>
-            <a:ext cx="4224528" cy="786384"/>
-          </a:xfrm>
-          <a:prstGeom prst="rect">
-            <a:avLst/>
-          </a:prstGeom>
-          <a:noFill/>
-        </p:spPr>
-        <p:txBody>
-          <a:bodyPr wrap="square" anchor="t"/>
-          <a:lstStyle/>
-          <a:p>
-            <a:pPr algn="l"/>
-            <a:r>
-              <a:rPr sz="1400" b="0" i="0">
-                <a:solidFill>
-                  <a:srgbClr val="142034"/>
-                </a:solidFill>
-                <a:latin typeface="Calibri"/>
-              </a:rPr>
-              <a:t>88% of windows ≥ 0.99. About 1 in 10 below 0.90. That tail is the story.</a:t>
-            </a:r>
-          </a:p>
-        </p:txBody>
-      </p:sp>
-      <p:sp>
-        <p:nvSpPr>
-          <p:cNvPr id="13" name="Oval 12"/>
-          <p:cNvSpPr/>
-          <p:nvPr/>
-        </p:nvSpPr>
-        <p:spPr>
-          <a:xfrm>
-            <a:off x="7315200" y="3008376"/>
-            <a:ext cx="109728" cy="109728"/>
-          </a:xfrm>
-          <a:prstGeom prst="ellipse">
-            <a:avLst/>
-          </a:prstGeom>
-          <a:solidFill>
-            <a:srgbClr val="0A7A96"/>
-          </a:solidFill>
-          <a:ln>
-            <a:noFill/>
-          </a:ln>
-        </p:spPr>
-        <p:style>
-          <a:lnRef idx="1">
-            <a:schemeClr val="accent1"/>
-          </a:lnRef>
-          <a:fillRef idx="3">
-            <a:schemeClr val="accent1"/>
-          </a:fillRef>
-          <a:effectRef idx="2">
-            <a:schemeClr val="accent1"/>
-          </a:effectRef>
-          <a:fontRef idx="minor">
-            <a:schemeClr val="lt1"/>
-          </a:fontRef>
-        </p:style>
-        <p:txBody>
-          <a:bodyPr rtlCol="0" anchor="ctr"/>
-          <a:lstStyle/>
-          <a:p>
-            <a:pPr algn="ctr"/>
-          </a:p>
-        </p:txBody>
-      </p:sp>
-      <p:sp>
-        <p:nvSpPr>
-          <p:cNvPr id="14" name="TextBox 13"/>
-          <p:cNvSpPr txBox="1"/>
-          <p:nvPr/>
-        </p:nvSpPr>
-        <p:spPr>
-          <a:xfrm>
-            <a:off x="7571232" y="2916936"/>
-            <a:ext cx="4224528" cy="786384"/>
-          </a:xfrm>
-          <a:prstGeom prst="rect">
-            <a:avLst/>
-          </a:prstGeom>
-          <a:noFill/>
-        </p:spPr>
-        <p:txBody>
-          <a:bodyPr wrap="square" anchor="t"/>
-          <a:lstStyle/>
-          <a:p>
-            <a:pPr algn="l"/>
-            <a:r>
-              <a:rPr sz="1400" b="0" i="0">
-                <a:solidFill>
-                  <a:srgbClr val="142034"/>
-                </a:solidFill>
-                <a:latin typeface="Calibri"/>
-              </a:rPr>
-              <a:t>RoPE-TOA and Bias stay down until just below 1. None below 0.90.</a:t>
-            </a:r>
-          </a:p>
-        </p:txBody>
-      </p:sp>
-      <p:sp>
-        <p:nvSpPr>
-          <p:cNvPr id="15" name="Oval 14"/>
-          <p:cNvSpPr/>
-          <p:nvPr/>
-        </p:nvSpPr>
-        <p:spPr>
-          <a:xfrm>
-            <a:off x="7315200" y="3721608"/>
-            <a:ext cx="109728" cy="109728"/>
-          </a:xfrm>
-          <a:prstGeom prst="ellipse">
-            <a:avLst/>
-          </a:prstGeom>
-          <a:solidFill>
-            <a:srgbClr val="0A7A96"/>
-          </a:solidFill>
-          <a:ln>
-            <a:noFill/>
-          </a:ln>
-        </p:spPr>
-        <p:style>
-          <a:lnRef idx="1">
-            <a:schemeClr val="accent1"/>
-          </a:lnRef>
-          <a:fillRef idx="3">
-            <a:schemeClr val="accent1"/>
-          </a:fillRef>
-          <a:effectRef idx="2">
-            <a:schemeClr val="accent1"/>
-          </a:effectRef>
-          <a:fontRef idx="minor">
-            <a:schemeClr val="lt1"/>
-          </a:fontRef>
-        </p:style>
-        <p:txBody>
-          <a:bodyPr rtlCol="0" anchor="ctr"/>
-          <a:lstStyle/>
-          <a:p>
-            <a:pPr algn="ctr"/>
-          </a:p>
-        </p:txBody>
-      </p:sp>
-      <p:sp>
-        <p:nvSpPr>
-          <p:cNvPr id="16" name="TextBox 15"/>
-          <p:cNvSpPr txBox="1"/>
-          <p:nvPr/>
-        </p:nvSpPr>
-        <p:spPr>
-          <a:xfrm>
-            <a:off x="7571232" y="3630168"/>
-            <a:ext cx="4224528" cy="786384"/>
-          </a:xfrm>
-          <a:prstGeom prst="rect">
-            <a:avLst/>
-          </a:prstGeom>
-          <a:noFill/>
-        </p:spPr>
-        <p:txBody>
-          <a:bodyPr wrap="square" anchor="t"/>
-          <a:lstStyle/>
-          <a:p>
-            <a:pPr algn="l"/>
-            <a:r>
-              <a:rPr sz="1400" b="0" i="0">
-                <a:solidFill>
-                  <a:srgbClr val="142034"/>
-                </a:solidFill>
-                <a:latin typeface="Calibri"/>
-              </a:rPr>
-              <a:t>Stacking them is worse than Vanilla (57% vs 88% at ≥ 0.99).</a:t>
-            </a:r>
-          </a:p>
-        </p:txBody>
-      </p:sp>
-      <p:sp>
-        <p:nvSpPr>
-          <p:cNvPr id="17" name="Rectangle 16"/>
-          <p:cNvSpPr/>
-          <p:nvPr/>
-        </p:nvSpPr>
-        <p:spPr>
-          <a:xfrm>
-            <a:off x="0" y="6510528"/>
-            <a:ext cx="12191695" cy="347472"/>
-          </a:xfrm>
-          <a:prstGeom prst="rect">
-            <a:avLst/>
-          </a:prstGeom>
-          <a:solidFill>
-            <a:srgbClr val="F5F7F9"/>
-          </a:solidFill>
-          <a:ln w="12700">
-            <a:solidFill>
-              <a:srgbClr val="D2DAE2"/>
-            </a:solidFill>
-          </a:ln>
-        </p:spPr>
-        <p:style>
-          <a:lnRef idx="1">
-            <a:schemeClr val="accent1"/>
-          </a:lnRef>
-          <a:fillRef idx="3">
-            <a:schemeClr val="accent1"/>
-          </a:fillRef>
-          <a:effectRef idx="2">
-            <a:schemeClr val="accent1"/>
-          </a:effectRef>
-          <a:fontRef idx="minor">
-            <a:schemeClr val="lt1"/>
-          </a:fontRef>
-        </p:style>
-        <p:txBody>
-          <a:bodyPr rtlCol="0" anchor="ctr"/>
-          <a:lstStyle/>
-          <a:p>
-            <a:pPr algn="ctr"/>
-          </a:p>
-        </p:txBody>
-      </p:sp>
-      <p:sp>
-        <p:nvSpPr>
-          <p:cNvPr id="18" name="TextBox 17"/>
-          <p:cNvSpPr txBox="1"/>
-          <p:nvPr/>
-        </p:nvSpPr>
-        <p:spPr>
-          <a:xfrm>
-            <a:off x="411480" y="6528816"/>
-            <a:ext cx="9326880" cy="292608"/>
-          </a:xfrm>
-          <a:prstGeom prst="rect">
-            <a:avLst/>
-          </a:prstGeom>
-          <a:noFill/>
-        </p:spPr>
-        <p:txBody>
-          <a:bodyPr wrap="square" anchor="ctr"/>
-          <a:lstStyle/>
-          <a:p>
-            <a:pPr algn="l"/>
-            <a:r>
-              <a:rPr sz="1100" b="0" i="0">
-                <a:solidFill>
-                  <a:srgbClr val="5A687A"/>
-                </a:solidFill>
-                <a:latin typeface="Calibri"/>
-              </a:rPr>
-              <a:t>Internal briefing  ·  Saab  ·  KTH master's thesis  ·  Markus Johnson Swegmark</a:t>
-            </a:r>
-          </a:p>
-        </p:txBody>
-      </p:sp>
-      <p:sp>
-        <p:nvSpPr>
-          <p:cNvPr id="19" name="TextBox 18"/>
-          <p:cNvSpPr txBox="1"/>
-          <p:nvPr/>
-        </p:nvSpPr>
-        <p:spPr>
-          <a:xfrm>
-            <a:off x="10911535" y="6528816"/>
-            <a:ext cx="960120" cy="292608"/>
-          </a:xfrm>
-          <a:prstGeom prst="rect">
-            <a:avLst/>
-          </a:prstGeom>
-          <a:noFill/>
-        </p:spPr>
-        <p:txBody>
-          <a:bodyPr wrap="square" anchor="ctr"/>
-          <a:lstStyle/>
-          <a:p>
-            <a:pPr algn="r"/>
-            <a:r>
-              <a:rPr sz="1100" b="0" i="0">
-                <a:solidFill>
-                  <a:srgbClr val="5A687A"/>
-                </a:solidFill>
-                <a:latin typeface="Calibri"/>
-              </a:rPr>
-              <a:t>12 / 15</a:t>
-            </a:r>
-          </a:p>
-        </p:txBody>
-      </p:sp>
-    </p:spTree>
-  </p:cSld>
-  <p:clrMapOvr>
-    <a:masterClrMapping/>
-  </p:clrMapOvr>
-</p:sld>
-</file>
-
-<file path=ppt/slides/slide13.xml><?xml version="1.0" encoding="utf-8"?>
-<p:sld xmlns:a="http://schemas.openxmlformats.org/drawingml/2006/main" xmlns:p="http://schemas.openxmlformats.org/presentationml/2006/main" xmlns:r="http://schemas.openxmlformats.org/officeDocument/2006/relationships">
-  <p:cSld>
-    <p:spTree>
-      <p:nvGrpSpPr>
-        <p:cNvPr id="1" name=""/>
-        <p:cNvGrpSpPr/>
-        <p:nvPr/>
-      </p:nvGrpSpPr>
-      <p:grpSpPr/>
-      <p:sp>
-        <p:nvSpPr>
-          <p:cNvPr id="2" name="Rectangle 1"/>
-          <p:cNvSpPr/>
-          <p:nvPr/>
-        </p:nvSpPr>
-        <p:spPr>
-          <a:xfrm>
-            <a:off x="0" y="0"/>
-            <a:ext cx="12191695" cy="6858000"/>
-          </a:xfrm>
-          <a:prstGeom prst="rect">
-            <a:avLst/>
-          </a:prstGeom>
-          <a:solidFill>
-            <a:srgbClr val="FFFFFF"/>
-          </a:solidFill>
-          <a:ln>
-            <a:noFill/>
-          </a:ln>
-        </p:spPr>
-        <p:style>
-          <a:lnRef idx="1">
-            <a:schemeClr val="accent1"/>
-          </a:lnRef>
-          <a:fillRef idx="3">
-            <a:schemeClr val="accent1"/>
-          </a:fillRef>
-          <a:effectRef idx="2">
-            <a:schemeClr val="accent1"/>
-          </a:effectRef>
-          <a:fontRef idx="minor">
-            <a:schemeClr val="lt1"/>
-          </a:fontRef>
-        </p:style>
-        <p:txBody>
-          <a:bodyPr rtlCol="0" anchor="ctr"/>
-          <a:lstStyle/>
-          <a:p>
-            <a:pPr algn="ctr"/>
-          </a:p>
-        </p:txBody>
-      </p:sp>
-      <p:sp>
-        <p:nvSpPr>
-          <p:cNvPr id="3" name="Rectangle 2"/>
-          <p:cNvSpPr/>
-          <p:nvPr/>
-        </p:nvSpPr>
-        <p:spPr>
-          <a:xfrm>
-            <a:off x="0" y="0"/>
-            <a:ext cx="12191695" cy="64008"/>
-          </a:xfrm>
-          <a:prstGeom prst="rect">
-            <a:avLst/>
-          </a:prstGeom>
-          <a:solidFill>
-            <a:srgbClr val="0A7A96"/>
-          </a:solidFill>
-          <a:ln>
-            <a:noFill/>
-          </a:ln>
-        </p:spPr>
-        <p:style>
-          <a:lnRef idx="1">
-            <a:schemeClr val="accent1"/>
-          </a:lnRef>
-          <a:fillRef idx="3">
-            <a:schemeClr val="accent1"/>
-          </a:fillRef>
-          <a:effectRef idx="2">
-            <a:schemeClr val="accent1"/>
-          </a:effectRef>
-          <a:fontRef idx="minor">
-            <a:schemeClr val="lt1"/>
-          </a:fontRef>
-        </p:style>
-        <p:txBody>
-          <a:bodyPr rtlCol="0" anchor="ctr"/>
-          <a:lstStyle/>
-          <a:p>
-            <a:pPr algn="ctr"/>
-          </a:p>
-        </p:txBody>
-      </p:sp>
-      <p:sp>
-        <p:nvSpPr>
-          <p:cNvPr id="4" name="TextBox 3"/>
-          <p:cNvSpPr txBox="1"/>
-          <p:nvPr/>
-        </p:nvSpPr>
-        <p:spPr>
-          <a:xfrm>
-            <a:off x="502920" y="182880"/>
-            <a:ext cx="10972800" cy="365760"/>
-          </a:xfrm>
-          <a:prstGeom prst="rect">
-            <a:avLst/>
-          </a:prstGeom>
-          <a:noFill/>
-        </p:spPr>
-        <p:txBody>
-          <a:bodyPr wrap="square" anchor="t"/>
-          <a:lstStyle/>
-          <a:p>
-            <a:pPr algn="l"/>
-            <a:r>
-              <a:rPr sz="2200" b="1" i="0">
-                <a:solidFill>
-                  <a:srgbClr val="142034"/>
-                </a:solidFill>
-                <a:latin typeface="Calibri"/>
-              </a:rPr>
-              <a:t>Joint is a tax on Vanilla. Time in attention removes it.</a:t>
-            </a:r>
-          </a:p>
-        </p:txBody>
-      </p:sp>
-      <p:sp>
-        <p:nvSpPr>
-          <p:cNvPr id="5" name="Rounded Rectangle 4"/>
-          <p:cNvSpPr/>
-          <p:nvPr/>
-        </p:nvSpPr>
-        <p:spPr>
-          <a:xfrm>
-            <a:off x="292608" y="566928"/>
-            <a:ext cx="5815584" cy="3420113"/>
-          </a:xfrm>
-          <a:prstGeom prst="roundRect">
-            <a:avLst>
-              <a:gd name="adj" fmla="val 4000"/>
-            </a:avLst>
-          </a:prstGeom>
-          <a:solidFill>
-            <a:srgbClr val="F3F6F8"/>
-          </a:solidFill>
-          <a:ln w="12700">
-            <a:solidFill>
-              <a:srgbClr val="D2DAE2"/>
-            </a:solidFill>
-          </a:ln>
-        </p:spPr>
-        <p:style>
-          <a:lnRef idx="1">
-            <a:schemeClr val="accent1"/>
-          </a:lnRef>
-          <a:fillRef idx="3">
-            <a:schemeClr val="accent1"/>
-          </a:fillRef>
-          <a:effectRef idx="2">
-            <a:schemeClr val="accent1"/>
-          </a:effectRef>
-          <a:fontRef idx="minor">
-            <a:schemeClr val="lt1"/>
-          </a:fontRef>
-        </p:style>
-        <p:txBody>
-          <a:bodyPr rtlCol="0" anchor="ctr"/>
-          <a:lstStyle/>
-          <a:p>
-            <a:pPr algn="ctr"/>
-          </a:p>
-        </p:txBody>
-      </p:sp>
-      <p:pic>
-        <p:nvPicPr>
-          <p:cNvPr id="6" name="Picture 5" descr="joint_tax.png"/>
-          <p:cNvPicPr>
-            <a:picLocks noChangeAspect="1"/>
-          </p:cNvPicPr>
-          <p:nvPr/>
-        </p:nvPicPr>
-        <p:blipFill>
-          <a:blip r:embed="rId2"/>
-          <a:stretch>
-            <a:fillRect/>
-          </a:stretch>
-        </p:blipFill>
-        <p:spPr>
-          <a:xfrm>
-            <a:off x="365760" y="640080"/>
-            <a:ext cx="5669280" cy="3273809"/>
-          </a:xfrm>
-          <a:prstGeom prst="rect">
-            <a:avLst/>
-          </a:prstGeom>
-        </p:spPr>
-      </p:pic>
-      <p:sp>
-        <p:nvSpPr>
-          <p:cNvPr id="7" name="Rounded Rectangle 6"/>
-          <p:cNvSpPr/>
-          <p:nvPr/>
-        </p:nvSpPr>
-        <p:spPr>
-          <a:xfrm>
-            <a:off x="6144768" y="566928"/>
-            <a:ext cx="5724144" cy="2968034"/>
-          </a:xfrm>
-          <a:prstGeom prst="roundRect">
-            <a:avLst>
-              <a:gd name="adj" fmla="val 4000"/>
-            </a:avLst>
-          </a:prstGeom>
-          <a:solidFill>
-            <a:srgbClr val="F3F6F8"/>
-          </a:solidFill>
-          <a:ln w="12700">
-            <a:solidFill>
-              <a:srgbClr val="D2DAE2"/>
-            </a:solidFill>
-          </a:ln>
-        </p:spPr>
-        <p:style>
-          <a:lnRef idx="1">
-            <a:schemeClr val="accent1"/>
-          </a:lnRef>
-          <a:fillRef idx="3">
-            <a:schemeClr val="accent1"/>
-          </a:fillRef>
-          <a:effectRef idx="2">
-            <a:schemeClr val="accent1"/>
-          </a:effectRef>
-          <a:fontRef idx="minor">
-            <a:schemeClr val="lt1"/>
-          </a:fontRef>
-        </p:style>
-        <p:txBody>
-          <a:bodyPr rtlCol="0" anchor="ctr"/>
-          <a:lstStyle/>
-          <a:p>
-            <a:pPr algn="ctr"/>
-          </a:p>
-        </p:txBody>
-      </p:sp>
-      <p:pic>
-        <p:nvPicPr>
-          <p:cNvPr id="8" name="Picture 7" descr="emitter_ari.png"/>
-          <p:cNvPicPr>
-            <a:picLocks noChangeAspect="1"/>
-          </p:cNvPicPr>
-          <p:nvPr/>
-        </p:nvPicPr>
-        <p:blipFill>
-          <a:blip r:embed="rId3"/>
-          <a:stretch>
-            <a:fillRect/>
-          </a:stretch>
-        </p:blipFill>
-        <p:spPr>
-          <a:xfrm>
-            <a:off x="6217920" y="640080"/>
-            <a:ext cx="5577840" cy="2821730"/>
-          </a:xfrm>
-          <a:prstGeom prst="rect">
-            <a:avLst/>
-          </a:prstGeom>
-        </p:spPr>
-      </p:pic>
-      <p:sp>
-        <p:nvSpPr>
-          <p:cNvPr id="9" name="TextBox 8"/>
-          <p:cNvSpPr txBox="1"/>
-          <p:nvPr/>
-        </p:nvSpPr>
-        <p:spPr>
-          <a:xfrm>
-            <a:off x="457200" y="4937760"/>
-            <a:ext cx="11247120" cy="1188720"/>
-          </a:xfrm>
-          <a:prstGeom prst="rect">
-            <a:avLst/>
-          </a:prstGeom>
-          <a:noFill/>
-        </p:spPr>
-        <p:txBody>
-          <a:bodyPr wrap="square" anchor="t"/>
-          <a:lstStyle/>
-          <a:p>
-            <a:pPr algn="l"/>
-            <a:r>
-              <a:rPr sz="1400" b="0" i="0">
-                <a:solidFill>
-                  <a:srgbClr val="142034"/>
-                </a:solidFill>
-                <a:latin typeface="Calibri"/>
-              </a:rPr>
-              <a:t>Left: emitter-only Vanilla hits 0.999; joint drops to 0.948. Modes do not pay. Right: RoPE-TOA and Bias close the tail (ARI 1.000). An emitter-only RoPE-TOA copy matches joint RoPE-TOA — the tax is a Vanilla problem. RoPE-az 0.973. Stacking the two time devices scores below Vanilla.</a:t>
-            </a:r>
-          </a:p>
-        </p:txBody>
-      </p:sp>
-      <p:sp>
-        <p:nvSpPr>
-          <p:cNvPr id="10" name="Rectangle 9"/>
-          <p:cNvSpPr/>
-          <p:nvPr/>
-        </p:nvSpPr>
-        <p:spPr>
-          <a:xfrm>
-            <a:off x="0" y="6510528"/>
-            <a:ext cx="12191695" cy="347472"/>
-          </a:xfrm>
-          <a:prstGeom prst="rect">
-            <a:avLst/>
-          </a:prstGeom>
-          <a:solidFill>
-            <a:srgbClr val="F5F7F9"/>
-          </a:solidFill>
-          <a:ln w="12700">
-            <a:solidFill>
-              <a:srgbClr val="D2DAE2"/>
-            </a:solidFill>
-          </a:ln>
-        </p:spPr>
-        <p:style>
-          <a:lnRef idx="1">
-            <a:schemeClr val="accent1"/>
-          </a:lnRef>
-          <a:fillRef idx="3">
-            <a:schemeClr val="accent1"/>
-          </a:fillRef>
-          <a:effectRef idx="2">
-            <a:schemeClr val="accent1"/>
-          </a:effectRef>
-          <a:fontRef idx="minor">
-            <a:schemeClr val="lt1"/>
-          </a:fontRef>
-        </p:style>
-        <p:txBody>
-          <a:bodyPr rtlCol="0" anchor="ctr"/>
-          <a:lstStyle/>
-          <a:p>
-            <a:pPr algn="ctr"/>
-          </a:p>
-        </p:txBody>
-      </p:sp>
-      <p:sp>
-        <p:nvSpPr>
-          <p:cNvPr id="11" name="TextBox 10"/>
-          <p:cNvSpPr txBox="1"/>
-          <p:nvPr/>
-        </p:nvSpPr>
-        <p:spPr>
-          <a:xfrm>
-            <a:off x="411480" y="6528816"/>
-            <a:ext cx="9326880" cy="292608"/>
-          </a:xfrm>
-          <a:prstGeom prst="rect">
-            <a:avLst/>
-          </a:prstGeom>
-          <a:noFill/>
-        </p:spPr>
-        <p:txBody>
-          <a:bodyPr wrap="square" anchor="ctr"/>
-          <a:lstStyle/>
-          <a:p>
-            <a:pPr algn="l"/>
-            <a:r>
-              <a:rPr sz="1100" b="0" i="0">
-                <a:solidFill>
-                  <a:srgbClr val="5A687A"/>
-                </a:solidFill>
-                <a:latin typeface="Calibri"/>
-              </a:rPr>
-              <a:t>Internal briefing  ·  Saab  ·  KTH master's thesis  ·  Markus Johnson Swegmark</a:t>
-            </a:r>
-          </a:p>
-        </p:txBody>
-      </p:sp>
-      <p:sp>
-        <p:nvSpPr>
-          <p:cNvPr id="12" name="TextBox 11"/>
-          <p:cNvSpPr txBox="1"/>
-          <p:nvPr/>
-        </p:nvSpPr>
-        <p:spPr>
-          <a:xfrm>
-            <a:off x="10911535" y="6528816"/>
-            <a:ext cx="960120" cy="292608"/>
-          </a:xfrm>
-          <a:prstGeom prst="rect">
-            <a:avLst/>
-          </a:prstGeom>
-          <a:noFill/>
-        </p:spPr>
-        <p:txBody>
-          <a:bodyPr wrap="square" anchor="ctr"/>
-          <a:lstStyle/>
-          <a:p>
-            <a:pPr algn="r"/>
-            <a:r>
-              <a:rPr sz="1100" b="0" i="0">
-                <a:solidFill>
-                  <a:srgbClr val="5A687A"/>
-                </a:solidFill>
-                <a:latin typeface="Calibri"/>
-              </a:rPr>
-              <a:t>13 / 15</a:t>
-            </a:r>
-          </a:p>
-        </p:txBody>
-      </p:sp>
-    </p:spTree>
-  </p:cSld>
-  <p:clrMapOvr>
-    <a:masterClrMapping/>
-  </p:clrMapOvr>
-</p:sld>
-</file>
-
-<file path=ppt/slides/slide14.xml><?xml version="1.0" encoding="utf-8"?>
-<p:sld xmlns:a="http://schemas.openxmlformats.org/drawingml/2006/main" xmlns:p="http://schemas.openxmlformats.org/presentationml/2006/main" xmlns:r="http://schemas.openxmlformats.org/officeDocument/2006/relationships">
-  <p:cSld>
-    <p:spTree>
-      <p:nvGrpSpPr>
-        <p:cNvPr id="1" name=""/>
-        <p:cNvGrpSpPr/>
-        <p:nvPr/>
-      </p:nvGrpSpPr>
-      <p:grpSpPr/>
-      <p:sp>
-        <p:nvSpPr>
-          <p:cNvPr id="2" name="Rectangle 1"/>
-          <p:cNvSpPr/>
-          <p:nvPr/>
-        </p:nvSpPr>
-        <p:spPr>
-          <a:xfrm>
-            <a:off x="0" y="0"/>
-            <a:ext cx="12191695" cy="6858000"/>
-          </a:xfrm>
-          <a:prstGeom prst="rect">
-            <a:avLst/>
-          </a:prstGeom>
-          <a:solidFill>
-            <a:srgbClr val="FFFFFF"/>
-          </a:solidFill>
-          <a:ln>
-            <a:noFill/>
-          </a:ln>
-        </p:spPr>
-        <p:style>
-          <a:lnRef idx="1">
-            <a:schemeClr val="accent1"/>
-          </a:lnRef>
-          <a:fillRef idx="3">
-            <a:schemeClr val="accent1"/>
-          </a:fillRef>
-          <a:effectRef idx="2">
-            <a:schemeClr val="accent1"/>
-          </a:effectRef>
-          <a:fontRef idx="minor">
-            <a:schemeClr val="lt1"/>
-          </a:fontRef>
-        </p:style>
-        <p:txBody>
-          <a:bodyPr rtlCol="0" anchor="ctr"/>
-          <a:lstStyle/>
-          <a:p>
-            <a:pPr algn="ctr"/>
-          </a:p>
-        </p:txBody>
-      </p:sp>
-      <p:sp>
-        <p:nvSpPr>
-          <p:cNvPr id="3" name="Rectangle 2"/>
-          <p:cNvSpPr/>
-          <p:nvPr/>
-        </p:nvSpPr>
-        <p:spPr>
-          <a:xfrm>
-            <a:off x="0" y="0"/>
-            <a:ext cx="12191695" cy="64008"/>
-          </a:xfrm>
-          <a:prstGeom prst="rect">
-            <a:avLst/>
-          </a:prstGeom>
-          <a:solidFill>
-            <a:srgbClr val="0A7A96"/>
-          </a:solidFill>
-          <a:ln>
-            <a:noFill/>
-          </a:ln>
-        </p:spPr>
-        <p:style>
-          <a:lnRef idx="1">
-            <a:schemeClr val="accent1"/>
-          </a:lnRef>
-          <a:fillRef idx="3">
-            <a:schemeClr val="accent1"/>
-          </a:fillRef>
-          <a:effectRef idx="2">
-            <a:schemeClr val="accent1"/>
-          </a:effectRef>
-          <a:fontRef idx="minor">
-            <a:schemeClr val="lt1"/>
-          </a:fontRef>
-        </p:style>
-        <p:txBody>
-          <a:bodyPr rtlCol="0" anchor="ctr"/>
-          <a:lstStyle/>
-          <a:p>
-            <a:pPr algn="ctr"/>
-          </a:p>
-        </p:txBody>
-      </p:sp>
-      <p:sp>
-        <p:nvSpPr>
-          <p:cNvPr id="4" name="TextBox 3"/>
-          <p:cNvSpPr txBox="1"/>
-          <p:nvPr/>
-        </p:nvSpPr>
-        <p:spPr>
-          <a:xfrm>
-            <a:off x="502920" y="182880"/>
-            <a:ext cx="10972800" cy="365760"/>
-          </a:xfrm>
-          <a:prstGeom prst="rect">
-            <a:avLst/>
-          </a:prstGeom>
-          <a:noFill/>
-        </p:spPr>
-        <p:txBody>
-          <a:bodyPr wrap="square" anchor="t"/>
-          <a:lstStyle/>
-          <a:p>
-            <a:pPr algn="l"/>
-            <a:r>
-              <a:rPr sz="2200" b="1" i="0">
-                <a:solidFill>
-                  <a:srgbClr val="142034"/>
-                </a:solidFill>
-                <a:latin typeface="Calibri"/>
-              </a:rPr>
-              <a:t>Same scores, different bills — and what to do with that</a:t>
-            </a:r>
-          </a:p>
-        </p:txBody>
-      </p:sp>
-      <p:sp>
-        <p:nvSpPr>
-          <p:cNvPr id="5" name="Rounded Rectangle 4"/>
-          <p:cNvSpPr/>
-          <p:nvPr/>
-        </p:nvSpPr>
-        <p:spPr>
-          <a:xfrm>
-            <a:off x="292608" y="566928"/>
-            <a:ext cx="6089904" cy="3479967"/>
-          </a:xfrm>
-          <a:prstGeom prst="roundRect">
-            <a:avLst>
-              <a:gd name="adj" fmla="val 4000"/>
-            </a:avLst>
-          </a:prstGeom>
-          <a:solidFill>
-            <a:srgbClr val="F3F6F8"/>
-          </a:solidFill>
-          <a:ln w="12700">
-            <a:solidFill>
-              <a:srgbClr val="D2DAE2"/>
-            </a:solidFill>
-          </a:ln>
-        </p:spPr>
-        <p:style>
-          <a:lnRef idx="1">
-            <a:schemeClr val="accent1"/>
-          </a:lnRef>
-          <a:fillRef idx="3">
-            <a:schemeClr val="accent1"/>
-          </a:fillRef>
-          <a:effectRef idx="2">
-            <a:schemeClr val="accent1"/>
-          </a:effectRef>
-          <a:fontRef idx="minor">
-            <a:schemeClr val="lt1"/>
-          </a:fontRef>
-        </p:style>
-        <p:txBody>
-          <a:bodyPr rtlCol="0" anchor="ctr"/>
-          <a:lstStyle/>
-          <a:p>
-            <a:pPr algn="ctr"/>
-          </a:p>
-        </p:txBody>
-      </p:sp>
-      <p:pic>
-        <p:nvPicPr>
-          <p:cNvPr id="6" name="Picture 5" descr="encoder_time.png"/>
-          <p:cNvPicPr>
-            <a:picLocks noChangeAspect="1"/>
-          </p:cNvPicPr>
-          <p:nvPr/>
-        </p:nvPicPr>
-        <p:blipFill>
-          <a:blip r:embed="rId2"/>
-          <a:stretch>
-            <a:fillRect/>
-          </a:stretch>
-        </p:blipFill>
-        <p:spPr>
-          <a:xfrm>
-            <a:off x="365760" y="640080"/>
-            <a:ext cx="5943600" cy="3333663"/>
-          </a:xfrm>
-          <a:prstGeom prst="rect">
-            <a:avLst/>
-          </a:prstGeom>
-        </p:spPr>
-      </p:pic>
-      <p:sp>
-        <p:nvSpPr>
-          <p:cNvPr id="7" name="Oval 6"/>
-          <p:cNvSpPr/>
-          <p:nvPr/>
-        </p:nvSpPr>
-        <p:spPr>
-          <a:xfrm>
-            <a:off x="6537960" y="777240"/>
-            <a:ext cx="109728" cy="109728"/>
-          </a:xfrm>
-          <a:prstGeom prst="ellipse">
-            <a:avLst/>
-          </a:prstGeom>
-          <a:solidFill>
-            <a:srgbClr val="0A7A96"/>
-          </a:solidFill>
-          <a:ln>
-            <a:noFill/>
-          </a:ln>
-        </p:spPr>
-        <p:style>
-          <a:lnRef idx="1">
-            <a:schemeClr val="accent1"/>
-          </a:lnRef>
-          <a:fillRef idx="3">
-            <a:schemeClr val="accent1"/>
-          </a:fillRef>
-          <a:effectRef idx="2">
-            <a:schemeClr val="accent1"/>
-          </a:effectRef>
-          <a:fontRef idx="minor">
-            <a:schemeClr val="lt1"/>
-          </a:fontRef>
-        </p:style>
-        <p:txBody>
-          <a:bodyPr rtlCol="0" anchor="ctr"/>
-          <a:lstStyle/>
-          <a:p>
-            <a:pPr algn="ctr"/>
-          </a:p>
-        </p:txBody>
-      </p:sp>
-      <p:sp>
-        <p:nvSpPr>
-          <p:cNvPr id="8" name="TextBox 7"/>
-          <p:cNvSpPr txBox="1"/>
-          <p:nvPr/>
-        </p:nvSpPr>
-        <p:spPr>
-          <a:xfrm>
-            <a:off x="6793992" y="685800"/>
-            <a:ext cx="4956048" cy="640080"/>
-          </a:xfrm>
-          <a:prstGeom prst="rect">
-            <a:avLst/>
-          </a:prstGeom>
-          <a:noFill/>
-        </p:spPr>
-        <p:txBody>
-          <a:bodyPr wrap="square" anchor="t"/>
-          <a:lstStyle/>
-          <a:p>
-            <a:pPr algn="l"/>
-            <a:r>
-              <a:rPr sz="1400" b="0" i="0">
-                <a:solidFill>
-                  <a:srgbClr val="142034"/>
-                </a:solidFill>
-                <a:latin typeface="Calibri"/>
-              </a:rPr>
-              <a:t>RoPE-TOA: +0.9 ms vs Vanilla. Same parameter count.</a:t>
-            </a:r>
-          </a:p>
-        </p:txBody>
-      </p:sp>
-      <p:sp>
-        <p:nvSpPr>
-          <p:cNvPr id="9" name="Oval 8"/>
-          <p:cNvSpPr/>
-          <p:nvPr/>
-        </p:nvSpPr>
-        <p:spPr>
-          <a:xfrm>
-            <a:off x="6537960" y="1344168"/>
-            <a:ext cx="109728" cy="109728"/>
-          </a:xfrm>
-          <a:prstGeom prst="ellipse">
-            <a:avLst/>
-          </a:prstGeom>
-          <a:solidFill>
-            <a:srgbClr val="0A7A96"/>
-          </a:solidFill>
-          <a:ln>
-            <a:noFill/>
-          </a:ln>
-        </p:spPr>
-        <p:style>
-          <a:lnRef idx="1">
-            <a:schemeClr val="accent1"/>
-          </a:lnRef>
-          <a:fillRef idx="3">
-            <a:schemeClr val="accent1"/>
-          </a:fillRef>
-          <a:effectRef idx="2">
-            <a:schemeClr val="accent1"/>
-          </a:effectRef>
-          <a:fontRef idx="minor">
-            <a:schemeClr val="lt1"/>
-          </a:fontRef>
-        </p:style>
-        <p:txBody>
-          <a:bodyPr rtlCol="0" anchor="ctr"/>
-          <a:lstStyle/>
-          <a:p>
-            <a:pPr algn="ctr"/>
-          </a:p>
-        </p:txBody>
-      </p:sp>
-      <p:sp>
-        <p:nvSpPr>
-          <p:cNvPr id="10" name="TextBox 9"/>
-          <p:cNvSpPr txBox="1"/>
-          <p:nvPr/>
-        </p:nvSpPr>
-        <p:spPr>
-          <a:xfrm>
-            <a:off x="6793992" y="1252728"/>
-            <a:ext cx="4956048" cy="640080"/>
-          </a:xfrm>
-          <a:prstGeom prst="rect">
-            <a:avLst/>
-          </a:prstGeom>
-          <a:noFill/>
-        </p:spPr>
-        <p:txBody>
-          <a:bodyPr wrap="square" anchor="t"/>
-          <a:lstStyle/>
-          <a:p>
-            <a:pPr algn="l"/>
-            <a:r>
-              <a:rPr sz="1400" b="0" i="0">
-                <a:solidFill>
-                  <a:srgbClr val="142034"/>
-                </a:solidFill>
-                <a:latin typeface="Calibri"/>
-              </a:rPr>
-              <a:t>Bias: ~32 ms encoder. DBSCAN ~55 ms dominates Vanilla and RoPE.</a:t>
-            </a:r>
-          </a:p>
-        </p:txBody>
-      </p:sp>
-      <p:sp>
-        <p:nvSpPr>
-          <p:cNvPr id="11" name="Oval 10"/>
-          <p:cNvSpPr/>
-          <p:nvPr/>
-        </p:nvSpPr>
-        <p:spPr>
-          <a:xfrm>
-            <a:off x="6537960" y="1911096"/>
-            <a:ext cx="109728" cy="109728"/>
-          </a:xfrm>
-          <a:prstGeom prst="ellipse">
-            <a:avLst/>
-          </a:prstGeom>
-          <a:solidFill>
-            <a:srgbClr val="0A7A96"/>
-          </a:solidFill>
-          <a:ln>
-            <a:noFill/>
-          </a:ln>
-        </p:spPr>
-        <p:style>
-          <a:lnRef idx="1">
-            <a:schemeClr val="accent1"/>
-          </a:lnRef>
-          <a:fillRef idx="3">
-            <a:schemeClr val="accent1"/>
-          </a:fillRef>
-          <a:effectRef idx="2">
-            <a:schemeClr val="accent1"/>
-          </a:effectRef>
-          <a:fontRef idx="minor">
-            <a:schemeClr val="lt1"/>
-          </a:fontRef>
-        </p:style>
-        <p:txBody>
-          <a:bodyPr rtlCol="0" anchor="ctr"/>
-          <a:lstStyle/>
-          <a:p>
-            <a:pPr algn="ctr"/>
-          </a:p>
-        </p:txBody>
-      </p:sp>
-      <p:sp>
-        <p:nvSpPr>
-          <p:cNvPr id="12" name="TextBox 11"/>
-          <p:cNvSpPr txBox="1"/>
-          <p:nvPr/>
-        </p:nvSpPr>
-        <p:spPr>
-          <a:xfrm>
-            <a:off x="6793992" y="1819656"/>
-            <a:ext cx="4956048" cy="640080"/>
-          </a:xfrm>
-          <a:prstGeom prst="rect">
-            <a:avLst/>
-          </a:prstGeom>
-          <a:noFill/>
-        </p:spPr>
-        <p:txBody>
-          <a:bodyPr wrap="square" anchor="t"/>
-          <a:lstStyle/>
-          <a:p>
-            <a:pPr algn="l"/>
-            <a:r>
-              <a:rPr sz="1400" b="0" i="0">
-                <a:solidFill>
-                  <a:srgbClr val="142034"/>
-                </a:solidFill>
-                <a:latin typeface="Calibri"/>
-              </a:rPr>
-              <a:t>Both partitions from the mixed window → joint RoPE-TOA. Do not stack the bias.</a:t>
-            </a:r>
-          </a:p>
-        </p:txBody>
-      </p:sp>
-      <p:sp>
-        <p:nvSpPr>
-          <p:cNvPr id="13" name="Oval 12"/>
-          <p:cNvSpPr/>
-          <p:nvPr/>
-        </p:nvSpPr>
-        <p:spPr>
-          <a:xfrm>
-            <a:off x="6537960" y="2478024"/>
-            <a:ext cx="109728" cy="109728"/>
-          </a:xfrm>
-          <a:prstGeom prst="ellipse">
-            <a:avLst/>
-          </a:prstGeom>
-          <a:solidFill>
-            <a:srgbClr val="0A7A96"/>
-          </a:solidFill>
-          <a:ln>
-            <a:noFill/>
-          </a:ln>
-        </p:spPr>
-        <p:style>
-          <a:lnRef idx="1">
-            <a:schemeClr val="accent1"/>
-          </a:lnRef>
-          <a:fillRef idx="3">
-            <a:schemeClr val="accent1"/>
-          </a:fillRef>
-          <a:effectRef idx="2">
-            <a:schemeClr val="accent1"/>
-          </a:effectRef>
-          <a:fontRef idx="minor">
-            <a:schemeClr val="lt1"/>
-          </a:fontRef>
-        </p:style>
-        <p:txBody>
-          <a:bodyPr rtlCol="0" anchor="ctr"/>
-          <a:lstStyle/>
-          <a:p>
-            <a:pPr algn="ctr"/>
-          </a:p>
-        </p:txBody>
-      </p:sp>
-      <p:sp>
-        <p:nvSpPr>
-          <p:cNvPr id="14" name="TextBox 13"/>
-          <p:cNvSpPr txBox="1"/>
-          <p:nvPr/>
-        </p:nvSpPr>
-        <p:spPr>
-          <a:xfrm>
-            <a:off x="6793992" y="2386584"/>
-            <a:ext cx="4956048" cy="640080"/>
-          </a:xfrm>
-          <a:prstGeom prst="rect">
-            <a:avLst/>
-          </a:prstGeom>
-          <a:noFill/>
-        </p:spPr>
-        <p:txBody>
-          <a:bodyPr wrap="square" anchor="t"/>
-          <a:lstStyle/>
-          <a:p>
-            <a:pPr algn="l"/>
-            <a:r>
-              <a:rPr sz="1400" b="0" i="0">
-                <a:solidFill>
-                  <a:srgbClr val="142034"/>
-                </a:solidFill>
-                <a:latin typeface="Calibri"/>
-              </a:rPr>
-              <a:t>Deinterleaving only → emitter-only Vanilla is already at the ceiling.</a:t>
-            </a:r>
-          </a:p>
-        </p:txBody>
-      </p:sp>
-      <p:sp>
-        <p:nvSpPr>
-          <p:cNvPr id="15" name="Oval 14"/>
-          <p:cNvSpPr/>
-          <p:nvPr/>
-        </p:nvSpPr>
-        <p:spPr>
-          <a:xfrm>
-            <a:off x="6537960" y="3044952"/>
-            <a:ext cx="109728" cy="109728"/>
-          </a:xfrm>
-          <a:prstGeom prst="ellipse">
-            <a:avLst/>
-          </a:prstGeom>
-          <a:solidFill>
-            <a:srgbClr val="0A7A96"/>
-          </a:solidFill>
-          <a:ln>
-            <a:noFill/>
-          </a:ln>
-        </p:spPr>
-        <p:style>
-          <a:lnRef idx="1">
-            <a:schemeClr val="accent1"/>
-          </a:lnRef>
-          <a:fillRef idx="3">
-            <a:schemeClr val="accent1"/>
-          </a:fillRef>
-          <a:effectRef idx="2">
-            <a:schemeClr val="accent1"/>
-          </a:effectRef>
-          <a:fontRef idx="minor">
-            <a:schemeClr val="lt1"/>
-          </a:fontRef>
-        </p:style>
-        <p:txBody>
-          <a:bodyPr rtlCol="0" anchor="ctr"/>
-          <a:lstStyle/>
-          <a:p>
-            <a:pPr algn="ctr"/>
-          </a:p>
-        </p:txBody>
-      </p:sp>
-      <p:sp>
-        <p:nvSpPr>
-          <p:cNvPr id="16" name="TextBox 15"/>
-          <p:cNvSpPr txBox="1"/>
-          <p:nvPr/>
-        </p:nvSpPr>
-        <p:spPr>
-          <a:xfrm>
-            <a:off x="6793992" y="2953512"/>
-            <a:ext cx="4956048" cy="640080"/>
-          </a:xfrm>
-          <a:prstGeom prst="rect">
-            <a:avLst/>
-          </a:prstGeom>
-          <a:noFill/>
-        </p:spPr>
-        <p:txBody>
-          <a:bodyPr wrap="square" anchor="t"/>
-          <a:lstStyle/>
-          <a:p>
-            <a:pPr algn="l"/>
-            <a:r>
-              <a:rPr sz="1400" b="0" i="0">
-                <a:solidFill>
-                  <a:srgbClr val="142034"/>
-                </a:solidFill>
-                <a:latin typeface="Calibri"/>
-              </a:rPr>
-              <a:t>Cluster IDs die at the window edge. Tracks need a later association.</a:t>
-            </a:r>
-          </a:p>
-        </p:txBody>
-      </p:sp>
-      <p:sp>
-        <p:nvSpPr>
-          <p:cNvPr id="17" name="Oval 16"/>
-          <p:cNvSpPr/>
-          <p:nvPr/>
-        </p:nvSpPr>
-        <p:spPr>
-          <a:xfrm>
-            <a:off x="6537960" y="3611880"/>
-            <a:ext cx="109728" cy="109728"/>
-          </a:xfrm>
-          <a:prstGeom prst="ellipse">
-            <a:avLst/>
-          </a:prstGeom>
-          <a:solidFill>
-            <a:srgbClr val="0A7A96"/>
-          </a:solidFill>
-          <a:ln>
-            <a:noFill/>
-          </a:ln>
-        </p:spPr>
-        <p:style>
-          <a:lnRef idx="1">
-            <a:schemeClr val="accent1"/>
-          </a:lnRef>
-          <a:fillRef idx="3">
-            <a:schemeClr val="accent1"/>
-          </a:fillRef>
-          <a:effectRef idx="2">
-            <a:schemeClr val="accent1"/>
-          </a:effectRef>
-          <a:fontRef idx="minor">
-            <a:schemeClr val="lt1"/>
-          </a:fontRef>
-        </p:style>
-        <p:txBody>
-          <a:bodyPr rtlCol="0" anchor="ctr"/>
-          <a:lstStyle/>
-          <a:p>
-            <a:pPr algn="ctr"/>
-          </a:p>
-        </p:txBody>
-      </p:sp>
-      <p:sp>
-        <p:nvSpPr>
-          <p:cNvPr id="18" name="TextBox 17"/>
-          <p:cNvSpPr txBox="1"/>
-          <p:nvPr/>
-        </p:nvSpPr>
-        <p:spPr>
-          <a:xfrm>
-            <a:off x="6793992" y="3520440"/>
-            <a:ext cx="4956048" cy="640080"/>
-          </a:xfrm>
-          <a:prstGeom prst="rect">
-            <a:avLst/>
-          </a:prstGeom>
-          <a:noFill/>
-        </p:spPr>
-        <p:txBody>
-          <a:bodyPr wrap="square" anchor="t"/>
-          <a:lstStyle/>
-          <a:p>
-            <a:pPr algn="l"/>
-            <a:r>
-              <a:rPr sz="1400" b="0" i="0">
-                <a:solidFill>
-                  <a:srgbClr val="142034"/>
-                </a:solidFill>
-                <a:latin typeface="Calibri"/>
-              </a:rPr>
-              <a:t>Synthetic. Held-out modulations and operational data are not scored.</a:t>
-            </a:r>
-          </a:p>
-        </p:txBody>
-      </p:sp>
-      <p:sp>
-        <p:nvSpPr>
-          <p:cNvPr id="19" name="Rectangle 18"/>
-          <p:cNvSpPr/>
-          <p:nvPr/>
-        </p:nvSpPr>
-        <p:spPr>
-          <a:xfrm>
-            <a:off x="0" y="6510528"/>
-            <a:ext cx="12191695" cy="347472"/>
-          </a:xfrm>
-          <a:prstGeom prst="rect">
-            <a:avLst/>
-          </a:prstGeom>
-          <a:solidFill>
-            <a:srgbClr val="F5F7F9"/>
-          </a:solidFill>
-          <a:ln w="12700">
-            <a:solidFill>
-              <a:srgbClr val="D2DAE2"/>
-            </a:solidFill>
-          </a:ln>
-        </p:spPr>
-        <p:style>
-          <a:lnRef idx="1">
-            <a:schemeClr val="accent1"/>
-          </a:lnRef>
-          <a:fillRef idx="3">
-            <a:schemeClr val="accent1"/>
-          </a:fillRef>
-          <a:effectRef idx="2">
-            <a:schemeClr val="accent1"/>
-          </a:effectRef>
-          <a:fontRef idx="minor">
-            <a:schemeClr val="lt1"/>
-          </a:fontRef>
-        </p:style>
-        <p:txBody>
-          <a:bodyPr rtlCol="0" anchor="ctr"/>
-          <a:lstStyle/>
-          <a:p>
-            <a:pPr algn="ctr"/>
-          </a:p>
-        </p:txBody>
-      </p:sp>
-      <p:sp>
-        <p:nvSpPr>
-          <p:cNvPr id="20" name="TextBox 19"/>
-          <p:cNvSpPr txBox="1"/>
-          <p:nvPr/>
-        </p:nvSpPr>
-        <p:spPr>
-          <a:xfrm>
-            <a:off x="411480" y="6528816"/>
-            <a:ext cx="9326880" cy="292608"/>
-          </a:xfrm>
-          <a:prstGeom prst="rect">
-            <a:avLst/>
-          </a:prstGeom>
-          <a:noFill/>
-        </p:spPr>
-        <p:txBody>
-          <a:bodyPr wrap="square" anchor="ctr"/>
-          <a:lstStyle/>
-          <a:p>
-            <a:pPr algn="l"/>
-            <a:r>
-              <a:rPr sz="1100" b="0" i="0">
-                <a:solidFill>
-                  <a:srgbClr val="5A687A"/>
-                </a:solidFill>
-                <a:latin typeface="Calibri"/>
-              </a:rPr>
-              <a:t>Internal briefing  ·  Saab  ·  KTH master's thesis  ·  Markus Johnson Swegmark</a:t>
-            </a:r>
-          </a:p>
-        </p:txBody>
-      </p:sp>
-      <p:sp>
-        <p:nvSpPr>
-          <p:cNvPr id="21" name="TextBox 20"/>
-          <p:cNvSpPr txBox="1"/>
-          <p:nvPr/>
-        </p:nvSpPr>
-        <p:spPr>
-          <a:xfrm>
-            <a:off x="10911535" y="6528816"/>
-            <a:ext cx="960120" cy="292608"/>
-          </a:xfrm>
-          <a:prstGeom prst="rect">
-            <a:avLst/>
-          </a:prstGeom>
-          <a:noFill/>
-        </p:spPr>
-        <p:txBody>
-          <a:bodyPr wrap="square" anchor="ctr"/>
-          <a:lstStyle/>
-          <a:p>
-            <a:pPr algn="r"/>
-            <a:r>
-              <a:rPr sz="1100" b="0" i="0">
-                <a:solidFill>
-                  <a:srgbClr val="5A687A"/>
-                </a:solidFill>
-                <a:latin typeface="Calibri"/>
-              </a:rPr>
-              <a:t>14 / 15</a:t>
-            </a:r>
-          </a:p>
-        </p:txBody>
-      </p:sp>
-    </p:spTree>
-  </p:cSld>
-  <p:clrMapOvr>
-    <a:masterClrMapping/>
-  </p:clrMapOvr>
-</p:sld>
-</file>
-
-<file path=ppt/slides/slide15.xml><?xml version="1.0" encoding="utf-8"?>
-<p:sld xmlns:a="http://schemas.openxmlformats.org/drawingml/2006/main" xmlns:p="http://schemas.openxmlformats.org/presentationml/2006/main" xmlns:r="http://schemas.openxmlformats.org/officeDocument/2006/relationships">
-  <p:cSld>
-    <p:spTree>
-      <p:nvGrpSpPr>
-        <p:cNvPr id="1" name=""/>
-        <p:cNvGrpSpPr/>
-        <p:nvPr/>
-      </p:nvGrpSpPr>
-      <p:grpSpPr/>
-      <p:sp>
-        <p:nvSpPr>
-          <p:cNvPr id="2" name="Rectangle 1"/>
-          <p:cNvSpPr/>
-          <p:nvPr/>
-        </p:nvSpPr>
-        <p:spPr>
-          <a:xfrm>
-            <a:off x="0" y="0"/>
-            <a:ext cx="12191695" cy="6858000"/>
-          </a:xfrm>
-          <a:prstGeom prst="rect">
-            <a:avLst/>
-          </a:prstGeom>
-          <a:solidFill>
-            <a:srgbClr val="FFFFFF"/>
-          </a:solidFill>
-          <a:ln>
-            <a:noFill/>
-          </a:ln>
-        </p:spPr>
-        <p:style>
-          <a:lnRef idx="1">
-            <a:schemeClr val="accent1"/>
-          </a:lnRef>
-          <a:fillRef idx="3">
-            <a:schemeClr val="accent1"/>
-          </a:fillRef>
-          <a:effectRef idx="2">
-            <a:schemeClr val="accent1"/>
-          </a:effectRef>
-          <a:fontRef idx="minor">
-            <a:schemeClr val="lt1"/>
-          </a:fontRef>
-        </p:style>
-        <p:txBody>
-          <a:bodyPr rtlCol="0" anchor="ctr"/>
-          <a:lstStyle/>
-          <a:p>
-            <a:pPr algn="ctr"/>
-          </a:p>
-        </p:txBody>
-      </p:sp>
-      <p:sp>
-        <p:nvSpPr>
-          <p:cNvPr id="3" name="Rectangle 2"/>
-          <p:cNvSpPr/>
-          <p:nvPr/>
-        </p:nvSpPr>
-        <p:spPr>
-          <a:xfrm>
-            <a:off x="0" y="0"/>
-            <a:ext cx="12191695" cy="64008"/>
-          </a:xfrm>
-          <a:prstGeom prst="rect">
-            <a:avLst/>
-          </a:prstGeom>
-          <a:solidFill>
-            <a:srgbClr val="0A7A96"/>
-          </a:solidFill>
-          <a:ln>
-            <a:noFill/>
-          </a:ln>
-        </p:spPr>
-        <p:style>
-          <a:lnRef idx="1">
-            <a:schemeClr val="accent1"/>
-          </a:lnRef>
-          <a:fillRef idx="3">
-            <a:schemeClr val="accent1"/>
-          </a:fillRef>
-          <a:effectRef idx="2">
-            <a:schemeClr val="accent1"/>
-          </a:effectRef>
-          <a:fontRef idx="minor">
-            <a:schemeClr val="lt1"/>
-          </a:fontRef>
-        </p:style>
-        <p:txBody>
-          <a:bodyPr rtlCol="0" anchor="ctr"/>
-          <a:lstStyle/>
-          <a:p>
-            <a:pPr algn="ctr"/>
-          </a:p>
-        </p:txBody>
-      </p:sp>
-      <p:sp>
-        <p:nvSpPr>
-          <p:cNvPr id="4" name="TextBox 3"/>
-          <p:cNvSpPr txBox="1"/>
-          <p:nvPr/>
-        </p:nvSpPr>
-        <p:spPr>
-          <a:xfrm>
-            <a:off x="502920" y="228600"/>
-            <a:ext cx="10972800" cy="411480"/>
-          </a:xfrm>
-          <a:prstGeom prst="rect">
-            <a:avLst/>
-          </a:prstGeom>
-          <a:noFill/>
-        </p:spPr>
-        <p:txBody>
-          <a:bodyPr wrap="square" anchor="t"/>
-          <a:lstStyle/>
-          <a:p>
-            <a:pPr algn="l"/>
-            <a:r>
-              <a:rPr sz="2600" b="1" i="0">
-                <a:solidFill>
-                  <a:srgbClr val="142034"/>
-                </a:solidFill>
-                <a:latin typeface="Calibri"/>
-              </a:rPr>
-              <a:t>In one breath</a:t>
-            </a:r>
-          </a:p>
-        </p:txBody>
-      </p:sp>
-      <p:sp>
-        <p:nvSpPr>
-          <p:cNvPr id="5" name="Rounded Rectangle 4"/>
-          <p:cNvSpPr/>
-          <p:nvPr/>
-        </p:nvSpPr>
-        <p:spPr>
-          <a:xfrm>
-            <a:off x="502920" y="914400"/>
-            <a:ext cx="11155680" cy="1188720"/>
-          </a:xfrm>
-          <a:prstGeom prst="roundRect">
-            <a:avLst>
-              <a:gd name="adj" fmla="val 8000"/>
-            </a:avLst>
-          </a:prstGeom>
-          <a:solidFill>
-            <a:srgbClr val="F3F6F8"/>
-          </a:solidFill>
-          <a:ln w="12700">
-            <a:solidFill>
-              <a:srgbClr val="D2DAE2"/>
-            </a:solidFill>
-          </a:ln>
-        </p:spPr>
-        <p:style>
-          <a:lnRef idx="1">
-            <a:schemeClr val="accent1"/>
-          </a:lnRef>
-          <a:fillRef idx="3">
-            <a:schemeClr val="accent1"/>
-          </a:fillRef>
-          <a:effectRef idx="2">
-            <a:schemeClr val="accent1"/>
-          </a:effectRef>
-          <a:fontRef idx="minor">
-            <a:schemeClr val="lt1"/>
-          </a:fontRef>
-        </p:style>
-        <p:txBody>
-          <a:bodyPr rtlCol="0" anchor="ctr"/>
-          <a:lstStyle/>
-          <a:p>
-            <a:pPr algn="ctr"/>
-          </a:p>
-        </p:txBody>
-      </p:sp>
-      <p:sp>
-        <p:nvSpPr>
-          <p:cNvPr id="6" name="Rounded Rectangle 5"/>
-          <p:cNvSpPr/>
-          <p:nvPr/>
-        </p:nvSpPr>
-        <p:spPr>
-          <a:xfrm>
-            <a:off x="731520" y="1280160"/>
-            <a:ext cx="1097280" cy="438912"/>
-          </a:xfrm>
-          <a:prstGeom prst="roundRect">
-            <a:avLst>
-              <a:gd name="adj" fmla="val 20000"/>
-            </a:avLst>
-          </a:prstGeom>
-          <a:solidFill>
-            <a:srgbClr val="0A7A96"/>
-          </a:solidFill>
-          <a:ln>
-            <a:noFill/>
-          </a:ln>
-        </p:spPr>
-        <p:style>
-          <a:lnRef idx="1">
-            <a:schemeClr val="accent1"/>
-          </a:lnRef>
-          <a:fillRef idx="3">
-            <a:schemeClr val="accent1"/>
-          </a:fillRef>
-          <a:effectRef idx="2">
-            <a:schemeClr val="accent1"/>
-          </a:effectRef>
-          <a:fontRef idx="minor">
-            <a:schemeClr val="lt1"/>
-          </a:fontRef>
-        </p:style>
-        <p:txBody>
-          <a:bodyPr rtlCol="0" anchor="ctr"/>
-          <a:lstStyle/>
-          <a:p>
-            <a:pPr algn="ctr"/>
-          </a:p>
-        </p:txBody>
-      </p:sp>
-      <p:sp>
-        <p:nvSpPr>
-          <p:cNvPr id="7" name="TextBox 6"/>
-          <p:cNvSpPr txBox="1"/>
-          <p:nvPr/>
-        </p:nvSpPr>
-        <p:spPr>
-          <a:xfrm>
-            <a:off x="731520" y="1316736"/>
-            <a:ext cx="1097280" cy="384048"/>
-          </a:xfrm>
-          <a:prstGeom prst="rect">
-            <a:avLst/>
-          </a:prstGeom>
-          <a:noFill/>
-        </p:spPr>
-        <p:txBody>
-          <a:bodyPr wrap="square" anchor="t"/>
-          <a:lstStyle/>
-          <a:p>
-            <a:pPr algn="ctr"/>
-            <a:r>
-              <a:rPr sz="1600" b="1" i="0">
-                <a:solidFill>
-                  <a:srgbClr val="FFFFFF"/>
-                </a:solidFill>
-                <a:latin typeface="Calibri"/>
-              </a:rPr>
-              <a:t>RQ1</a:t>
-            </a:r>
-          </a:p>
-        </p:txBody>
-      </p:sp>
-      <p:sp>
-        <p:nvSpPr>
-          <p:cNvPr id="8" name="TextBox 7"/>
-          <p:cNvSpPr txBox="1"/>
-          <p:nvPr/>
-        </p:nvSpPr>
-        <p:spPr>
-          <a:xfrm>
-            <a:off x="2057400" y="1207008"/>
-            <a:ext cx="9281160" cy="640080"/>
-          </a:xfrm>
-          <a:prstGeom prst="rect">
-            <a:avLst/>
-          </a:prstGeom>
-          <a:noFill/>
-        </p:spPr>
-        <p:txBody>
-          <a:bodyPr wrap="square" anchor="t"/>
-          <a:lstStyle/>
-          <a:p>
-            <a:pPr algn="l"/>
-            <a:r>
-              <a:rPr sz="1600" b="0" i="0">
-                <a:solidFill>
-                  <a:srgbClr val="142034"/>
-                </a:solidFill>
-                <a:latin typeface="Calibri"/>
-              </a:rPr>
-              <a:t>Yes. Vanilla recovers both partitions on most windows. Feature DBSCAN does not.</a:t>
-            </a:r>
-          </a:p>
-        </p:txBody>
-      </p:sp>
-      <p:sp>
-        <p:nvSpPr>
-          <p:cNvPr id="9" name="Rounded Rectangle 8"/>
-          <p:cNvSpPr/>
-          <p:nvPr/>
-        </p:nvSpPr>
-        <p:spPr>
-          <a:xfrm>
-            <a:off x="502920" y="2240280"/>
-            <a:ext cx="11155680" cy="1188720"/>
-          </a:xfrm>
-          <a:prstGeom prst="roundRect">
-            <a:avLst>
-              <a:gd name="adj" fmla="val 8000"/>
-            </a:avLst>
-          </a:prstGeom>
-          <a:solidFill>
-            <a:srgbClr val="F3F6F8"/>
-          </a:solidFill>
-          <a:ln w="12700">
-            <a:solidFill>
-              <a:srgbClr val="D2DAE2"/>
-            </a:solidFill>
-          </a:ln>
-        </p:spPr>
-        <p:style>
-          <a:lnRef idx="1">
-            <a:schemeClr val="accent1"/>
-          </a:lnRef>
-          <a:fillRef idx="3">
-            <a:schemeClr val="accent1"/>
-          </a:fillRef>
-          <a:effectRef idx="2">
-            <a:schemeClr val="accent1"/>
-          </a:effectRef>
-          <a:fontRef idx="minor">
-            <a:schemeClr val="lt1"/>
-          </a:fontRef>
-        </p:style>
-        <p:txBody>
-          <a:bodyPr rtlCol="0" anchor="ctr"/>
-          <a:lstStyle/>
-          <a:p>
-            <a:pPr algn="ctr"/>
-          </a:p>
-        </p:txBody>
-      </p:sp>
-      <p:sp>
-        <p:nvSpPr>
-          <p:cNvPr id="10" name="Rounded Rectangle 9"/>
-          <p:cNvSpPr/>
-          <p:nvPr/>
-        </p:nvSpPr>
-        <p:spPr>
-          <a:xfrm>
-            <a:off x="731520" y="2606040"/>
-            <a:ext cx="1097280" cy="438912"/>
-          </a:xfrm>
-          <a:prstGeom prst="roundRect">
-            <a:avLst>
-              <a:gd name="adj" fmla="val 20000"/>
-            </a:avLst>
-          </a:prstGeom>
-          <a:solidFill>
-            <a:srgbClr val="0A7A96"/>
-          </a:solidFill>
-          <a:ln>
-            <a:noFill/>
-          </a:ln>
-        </p:spPr>
-        <p:style>
-          <a:lnRef idx="1">
-            <a:schemeClr val="accent1"/>
-          </a:lnRef>
-          <a:fillRef idx="3">
-            <a:schemeClr val="accent1"/>
-          </a:fillRef>
-          <a:effectRef idx="2">
-            <a:schemeClr val="accent1"/>
-          </a:effectRef>
-          <a:fontRef idx="minor">
-            <a:schemeClr val="lt1"/>
-          </a:fontRef>
-        </p:style>
-        <p:txBody>
-          <a:bodyPr rtlCol="0" anchor="ctr"/>
-          <a:lstStyle/>
-          <a:p>
-            <a:pPr algn="ctr"/>
-          </a:p>
-        </p:txBody>
-      </p:sp>
-      <p:sp>
-        <p:nvSpPr>
-          <p:cNvPr id="11" name="TextBox 10"/>
-          <p:cNvSpPr txBox="1"/>
-          <p:nvPr/>
-        </p:nvSpPr>
-        <p:spPr>
-          <a:xfrm>
-            <a:off x="731520" y="2642616"/>
-            <a:ext cx="1097280" cy="384048"/>
-          </a:xfrm>
-          <a:prstGeom prst="rect">
-            <a:avLst/>
-          </a:prstGeom>
-          <a:noFill/>
-        </p:spPr>
-        <p:txBody>
-          <a:bodyPr wrap="square" anchor="t"/>
-          <a:lstStyle/>
-          <a:p>
-            <a:pPr algn="ctr"/>
-            <a:r>
-              <a:rPr sz="1600" b="1" i="0">
-                <a:solidFill>
-                  <a:srgbClr val="FFFFFF"/>
-                </a:solidFill>
-                <a:latin typeface="Calibri"/>
-              </a:rPr>
-              <a:t>RQ2</a:t>
-            </a:r>
-          </a:p>
-        </p:txBody>
-      </p:sp>
-      <p:sp>
-        <p:nvSpPr>
-          <p:cNvPr id="12" name="TextBox 11"/>
-          <p:cNvSpPr txBox="1"/>
-          <p:nvPr/>
-        </p:nvSpPr>
-        <p:spPr>
-          <a:xfrm>
-            <a:off x="2057400" y="2532888"/>
-            <a:ext cx="9281160" cy="640080"/>
-          </a:xfrm>
-          <a:prstGeom prst="rect">
-            <a:avLst/>
-          </a:prstGeom>
-          <a:noFill/>
-        </p:spPr>
-        <p:txBody>
-          <a:bodyPr wrap="square" anchor="t"/>
-          <a:lstStyle/>
-          <a:p>
-            <a:pPr algn="l"/>
-            <a:r>
-              <a:rPr sz="1600" b="0" i="0">
-                <a:solidFill>
-                  <a:srgbClr val="142034"/>
-                </a:solidFill>
-                <a:latin typeface="Calibri"/>
-              </a:rPr>
-              <a:t>No, if you only need deinterleaving. Joint taxes emitters on Vanilla. RoPE-TOA does not pay that tax.</a:t>
-            </a:r>
-          </a:p>
-        </p:txBody>
-      </p:sp>
-      <p:sp>
-        <p:nvSpPr>
-          <p:cNvPr id="13" name="Rounded Rectangle 12"/>
-          <p:cNvSpPr/>
-          <p:nvPr/>
-        </p:nvSpPr>
-        <p:spPr>
-          <a:xfrm>
-            <a:off x="502920" y="3566160"/>
-            <a:ext cx="11155680" cy="1188720"/>
-          </a:xfrm>
-          <a:prstGeom prst="roundRect">
-            <a:avLst>
-              <a:gd name="adj" fmla="val 8000"/>
-            </a:avLst>
-          </a:prstGeom>
-          <a:solidFill>
-            <a:srgbClr val="F3F6F8"/>
-          </a:solidFill>
-          <a:ln w="12700">
-            <a:solidFill>
-              <a:srgbClr val="D2DAE2"/>
-            </a:solidFill>
-          </a:ln>
-        </p:spPr>
-        <p:style>
-          <a:lnRef idx="1">
-            <a:schemeClr val="accent1"/>
-          </a:lnRef>
-          <a:fillRef idx="3">
-            <a:schemeClr val="accent1"/>
-          </a:fillRef>
-          <a:effectRef idx="2">
-            <a:schemeClr val="accent1"/>
-          </a:effectRef>
-          <a:fontRef idx="minor">
-            <a:schemeClr val="lt1"/>
-          </a:fontRef>
-        </p:style>
-        <p:txBody>
-          <a:bodyPr rtlCol="0" anchor="ctr"/>
-          <a:lstStyle/>
-          <a:p>
-            <a:pPr algn="ctr"/>
-          </a:p>
-        </p:txBody>
-      </p:sp>
-      <p:sp>
-        <p:nvSpPr>
-          <p:cNvPr id="14" name="Rounded Rectangle 13"/>
-          <p:cNvSpPr/>
-          <p:nvPr/>
-        </p:nvSpPr>
-        <p:spPr>
-          <a:xfrm>
-            <a:off x="731520" y="3931920"/>
-            <a:ext cx="1097280" cy="438912"/>
-          </a:xfrm>
-          <a:prstGeom prst="roundRect">
-            <a:avLst>
-              <a:gd name="adj" fmla="val 20000"/>
-            </a:avLst>
-          </a:prstGeom>
-          <a:solidFill>
-            <a:srgbClr val="0A7A96"/>
-          </a:solidFill>
-          <a:ln>
-            <a:noFill/>
-          </a:ln>
-        </p:spPr>
-        <p:style>
-          <a:lnRef idx="1">
-            <a:schemeClr val="accent1"/>
-          </a:lnRef>
-          <a:fillRef idx="3">
-            <a:schemeClr val="accent1"/>
-          </a:fillRef>
-          <a:effectRef idx="2">
-            <a:schemeClr val="accent1"/>
-          </a:effectRef>
-          <a:fontRef idx="minor">
-            <a:schemeClr val="lt1"/>
-          </a:fontRef>
-        </p:style>
-        <p:txBody>
-          <a:bodyPr rtlCol="0" anchor="ctr"/>
-          <a:lstStyle/>
-          <a:p>
-            <a:pPr algn="ctr"/>
-          </a:p>
-        </p:txBody>
-      </p:sp>
-      <p:sp>
-        <p:nvSpPr>
-          <p:cNvPr id="15" name="TextBox 14"/>
-          <p:cNvSpPr txBox="1"/>
-          <p:nvPr/>
-        </p:nvSpPr>
-        <p:spPr>
-          <a:xfrm>
-            <a:off x="731520" y="3968496"/>
-            <a:ext cx="1097280" cy="384048"/>
-          </a:xfrm>
-          <a:prstGeom prst="rect">
-            <a:avLst/>
-          </a:prstGeom>
-          <a:noFill/>
-        </p:spPr>
-        <p:txBody>
-          <a:bodyPr wrap="square" anchor="t"/>
-          <a:lstStyle/>
-          <a:p>
-            <a:pPr algn="ctr"/>
-            <a:r>
-              <a:rPr sz="1600" b="1" i="0">
-                <a:solidFill>
-                  <a:srgbClr val="FFFFFF"/>
-                </a:solidFill>
-                <a:latin typeface="Calibri"/>
-              </a:rPr>
-              <a:t>RQ3</a:t>
-            </a:r>
-          </a:p>
-        </p:txBody>
-      </p:sp>
-      <p:sp>
-        <p:nvSpPr>
-          <p:cNvPr id="16" name="TextBox 15"/>
-          <p:cNvSpPr txBox="1"/>
-          <p:nvPr/>
-        </p:nvSpPr>
-        <p:spPr>
-          <a:xfrm>
-            <a:off x="2057400" y="3858768"/>
-            <a:ext cx="9281160" cy="640080"/>
-          </a:xfrm>
-          <a:prstGeom prst="rect">
-            <a:avLst/>
-          </a:prstGeom>
-          <a:noFill/>
-        </p:spPr>
-        <p:txBody>
-          <a:bodyPr wrap="square" anchor="t"/>
-          <a:lstStyle/>
-          <a:p>
-            <a:pPr algn="l"/>
-            <a:r>
-              <a:rPr sz="1600" b="0" i="0">
-                <a:solidFill>
-                  <a:srgbClr val="142034"/>
-                </a:solidFill>
-                <a:latin typeface="Calibri"/>
-              </a:rPr>
-              <a:t>Yes for time. RoPE-TOA or the pairwise bias close the emitter tail. Stacking them does not. RoPE is the one you want.</a:t>
-            </a:r>
-          </a:p>
-        </p:txBody>
-      </p:sp>
-      <p:sp>
-        <p:nvSpPr>
-          <p:cNvPr id="17" name="TextBox 16"/>
-          <p:cNvSpPr txBox="1"/>
-          <p:nvPr/>
-        </p:nvSpPr>
-        <p:spPr>
-          <a:xfrm>
-            <a:off x="548640" y="5029200"/>
-            <a:ext cx="11064240" cy="1051560"/>
-          </a:xfrm>
-          <a:prstGeom prst="rect">
-            <a:avLst/>
-          </a:prstGeom>
-          <a:noFill/>
-        </p:spPr>
-        <p:txBody>
-          <a:bodyPr wrap="square" anchor="t"/>
-          <a:lstStyle/>
-          <a:p>
-            <a:pPr algn="l"/>
-            <a:r>
-              <a:rPr sz="1400" b="0" i="0">
-                <a:solidFill>
-                  <a:srgbClr val="5A687A"/>
-                </a:solidFill>
-                <a:latin typeface="Calibri"/>
-              </a:rPr>
-              <a:t>The data is unbalanced because physics is: lock-on versus a 2–5 s scan, low PRI versus high PRI. Attention is expensive because associating non-adjacent pulses is an all-pairs question. Putting time into that product closed the last errors.</a:t>
-            </a:r>
-          </a:p>
-        </p:txBody>
-      </p:sp>
-      <p:sp>
-        <p:nvSpPr>
-          <p:cNvPr id="18" name="Rectangle 17"/>
-          <p:cNvSpPr/>
-          <p:nvPr/>
-        </p:nvSpPr>
-        <p:spPr>
-          <a:xfrm>
-            <a:off x="0" y="6510528"/>
-            <a:ext cx="12191695" cy="347472"/>
-          </a:xfrm>
-          <a:prstGeom prst="rect">
-            <a:avLst/>
-          </a:prstGeom>
-          <a:solidFill>
-            <a:srgbClr val="F5F7F9"/>
-          </a:solidFill>
-          <a:ln w="12700">
-            <a:solidFill>
-              <a:srgbClr val="D2DAE2"/>
-            </a:solidFill>
-          </a:ln>
-        </p:spPr>
-        <p:style>
-          <a:lnRef idx="1">
-            <a:schemeClr val="accent1"/>
-          </a:lnRef>
-          <a:fillRef idx="3">
-            <a:schemeClr val="accent1"/>
-          </a:fillRef>
-          <a:effectRef idx="2">
-            <a:schemeClr val="accent1"/>
-          </a:effectRef>
-          <a:fontRef idx="minor">
-            <a:schemeClr val="lt1"/>
-          </a:fontRef>
-        </p:style>
-        <p:txBody>
-          <a:bodyPr rtlCol="0" anchor="ctr"/>
-          <a:lstStyle/>
-          <a:p>
-            <a:pPr algn="ctr"/>
-          </a:p>
-        </p:txBody>
-      </p:sp>
-      <p:sp>
-        <p:nvSpPr>
-          <p:cNvPr id="19" name="TextBox 18"/>
-          <p:cNvSpPr txBox="1"/>
-          <p:nvPr/>
-        </p:nvSpPr>
-        <p:spPr>
-          <a:xfrm>
-            <a:off x="411480" y="6528816"/>
-            <a:ext cx="9326880" cy="292608"/>
-          </a:xfrm>
-          <a:prstGeom prst="rect">
-            <a:avLst/>
-          </a:prstGeom>
-          <a:noFill/>
-        </p:spPr>
-        <p:txBody>
-          <a:bodyPr wrap="square" anchor="ctr"/>
-          <a:lstStyle/>
-          <a:p>
-            <a:pPr algn="l"/>
-            <a:r>
-              <a:rPr sz="1100" b="0" i="0">
-                <a:solidFill>
-                  <a:srgbClr val="5A687A"/>
-                </a:solidFill>
-                <a:latin typeface="Calibri"/>
-              </a:rPr>
-              <a:t>Internal briefing  ·  Saab  ·  KTH master's thesis  ·  Markus Johnson Swegmark</a:t>
-            </a:r>
-          </a:p>
-        </p:txBody>
-      </p:sp>
-      <p:sp>
-        <p:nvSpPr>
-          <p:cNvPr id="20" name="TextBox 19"/>
-          <p:cNvSpPr txBox="1"/>
-          <p:nvPr/>
-        </p:nvSpPr>
-        <p:spPr>
-          <a:xfrm>
-            <a:off x="10911535" y="6528816"/>
-            <a:ext cx="960120" cy="292608"/>
-          </a:xfrm>
-          <a:prstGeom prst="rect">
-            <a:avLst/>
-          </a:prstGeom>
-          <a:noFill/>
-        </p:spPr>
-        <p:txBody>
-          <a:bodyPr wrap="square" anchor="ctr"/>
-          <a:lstStyle/>
-          <a:p>
-            <a:pPr algn="r"/>
-            <a:r>
-              <a:rPr sz="1100" b="0" i="0">
-                <a:solidFill>
-                  <a:srgbClr val="5A687A"/>
-                </a:solidFill>
-                <a:latin typeface="Calibri"/>
-              </a:rPr>
-              <a:t>15 / 15</a:t>
+              <a:t>11 / 11</a:t>
             </a:r>
           </a:p>
         </p:txBody>
@@ -9044,7 +6205,7 @@
         <p:spPr>
           <a:xfrm>
             <a:off x="429768" y="640080"/>
-            <a:ext cx="7989362" cy="2478024"/>
+            <a:ext cx="8105618" cy="2478024"/>
           </a:xfrm>
           <a:prstGeom prst="roundRect">
             <a:avLst>
@@ -9099,7 +6260,7 @@
         <p:spPr>
           <a:xfrm>
             <a:off x="502920" y="713232"/>
-            <a:ext cx="7843058" cy="2331720"/>
+            <a:ext cx="7959314" cy="2331720"/>
           </a:xfrm>
           <a:prstGeom prst="rect">
             <a:avLst/>
@@ -9828,7 +6989,7 @@
                 </a:solidFill>
                 <a:latin typeface="Calibri"/>
               </a:rPr>
-              <a:t>2 / 15</a:t>
+              <a:t>2 / 11</a:t>
             </a:r>
           </a:p>
         </p:txBody>
@@ -9945,8 +7106,8 @@
         </p:nvSpPr>
         <p:spPr>
           <a:xfrm>
-            <a:off x="502920" y="228600"/>
-            <a:ext cx="10972800" cy="411480"/>
+            <a:off x="502920" y="201168"/>
+            <a:ext cx="10972800" cy="365760"/>
           </a:xfrm>
           <a:prstGeom prst="rect">
             <a:avLst/>
@@ -9959,13 +7120,13 @@
           <a:p>
             <a:pPr algn="l"/>
             <a:r>
-              <a:rPr sz="2600" b="1" i="0">
+              <a:rPr sz="2400" b="1" i="0">
                 <a:solidFill>
                   <a:srgbClr val="142034"/>
                 </a:solidFill>
                 <a:latin typeface="Calibri"/>
               </a:rPr>
-              <a:t>Three questions</a:t>
+              <a:t>Dense lock-on versus sparse scan</a:t>
             </a:r>
           </a:p>
         </p:txBody>
@@ -9978,8 +7139,8 @@
         </p:nvSpPr>
         <p:spPr>
           <a:xfrm>
-            <a:off x="502920" y="960120"/>
-            <a:ext cx="11155680" cy="1371600"/>
+            <a:off x="502920" y="640080"/>
+            <a:ext cx="2788920" cy="777240"/>
           </a:xfrm>
           <a:prstGeom prst="roundRect">
             <a:avLst>
@@ -10019,59 +7180,14 @@
       </p:sp>
       <p:sp>
         <p:nvSpPr>
-          <p:cNvPr id="6" name="Rounded Rectangle 5"/>
-          <p:cNvSpPr/>
-          <p:nvPr/>
-        </p:nvSpPr>
-        <p:spPr>
-          <a:xfrm>
-            <a:off x="731520" y="1417320"/>
-            <a:ext cx="1097280" cy="438912"/>
-          </a:xfrm>
-          <a:prstGeom prst="roundRect">
-            <a:avLst>
-              <a:gd name="adj" fmla="val 20000"/>
-            </a:avLst>
-          </a:prstGeom>
-          <a:solidFill>
-            <a:srgbClr val="0A7A96"/>
-          </a:solidFill>
-          <a:ln>
-            <a:noFill/>
-          </a:ln>
-        </p:spPr>
-        <p:style>
-          <a:lnRef idx="1">
-            <a:schemeClr val="accent1"/>
-          </a:lnRef>
-          <a:fillRef idx="3">
-            <a:schemeClr val="accent1"/>
-          </a:fillRef>
-          <a:effectRef idx="2">
-            <a:schemeClr val="accent1"/>
-          </a:effectRef>
-          <a:fontRef idx="minor">
-            <a:schemeClr val="lt1"/>
-          </a:fontRef>
-        </p:style>
-        <p:txBody>
-          <a:bodyPr rtlCol="0" anchor="ctr"/>
-          <a:lstStyle/>
-          <a:p>
-            <a:pPr algn="ctr"/>
-          </a:p>
-        </p:txBody>
-      </p:sp>
-      <p:sp>
-        <p:nvSpPr>
-          <p:cNvPr id="7" name="TextBox 6"/>
+          <p:cNvPr id="6" name="TextBox 5"/>
           <p:cNvSpPr txBox="1"/>
           <p:nvPr/>
         </p:nvSpPr>
         <p:spPr>
           <a:xfrm>
-            <a:off x="731520" y="1453896"/>
-            <a:ext cx="1097280" cy="384048"/>
+            <a:off x="594360" y="676656"/>
+            <a:ext cx="2606040" cy="365760"/>
           </a:xfrm>
           <a:prstGeom prst="rect">
             <a:avLst/>
@@ -10086,25 +7202,25 @@
             <a:r>
               <a:rPr sz="1600" b="1" i="0">
                 <a:solidFill>
-                  <a:srgbClr val="FFFFFF"/>
+                  <a:srgbClr val="0A7A96"/>
                 </a:solidFill>
                 <a:latin typeface="Calibri"/>
               </a:rPr>
-              <a:t>RQ1</a:t>
-            </a:r>
-          </a:p>
-        </p:txBody>
-      </p:sp>
-      <p:sp>
-        <p:nvSpPr>
-          <p:cNvPr id="8" name="TextBox 7"/>
+              <a:t>L = 2000</a:t>
+            </a:r>
+          </a:p>
+        </p:txBody>
+      </p:sp>
+      <p:sp>
+        <p:nvSpPr>
+          <p:cNvPr id="7" name="TextBox 6"/>
           <p:cNvSpPr txBox="1"/>
           <p:nvPr/>
         </p:nvSpPr>
         <p:spPr>
           <a:xfrm>
-            <a:off x="2057400" y="1325880"/>
-            <a:ext cx="9235440" cy="685800"/>
+            <a:off x="594360" y="1024128"/>
+            <a:ext cx="2606040" cy="292608"/>
           </a:xfrm>
           <a:prstGeom prst="rect">
             <a:avLst/>
@@ -10115,29 +7231,29 @@
           <a:bodyPr wrap="square" anchor="t"/>
           <a:lstStyle/>
           <a:p>
-            <a:pPr algn="l"/>
-            <a:r>
-              <a:rPr sz="1800" b="0" i="0">
+            <a:pPr algn="ctr"/>
+            <a:r>
+              <a:rPr sz="1100" b="0" i="0">
                 <a:solidFill>
-                  <a:srgbClr val="142034"/>
+                  <a:srgbClr val="5A687A"/>
                 </a:solidFill>
                 <a:latin typeface="Calibri"/>
               </a:rPr>
-              <a:t>Can a transformer deinterleave pulses and recover modes by clustering a window of PDWs?</a:t>
-            </a:r>
-          </a:p>
-        </p:txBody>
-      </p:sp>
-      <p:sp>
-        <p:nvSpPr>
-          <p:cNvPr id="9" name="Rounded Rectangle 8"/>
+              <a:t>pulses / window</a:t>
+            </a:r>
+          </a:p>
+        </p:txBody>
+      </p:sp>
+      <p:sp>
+        <p:nvSpPr>
+          <p:cNvPr id="8" name="Rounded Rectangle 7"/>
           <p:cNvSpPr/>
           <p:nvPr/>
         </p:nvSpPr>
         <p:spPr>
           <a:xfrm>
-            <a:off x="502920" y="2514600"/>
-            <a:ext cx="11155680" cy="1371600"/>
+            <a:off x="3429000" y="640080"/>
+            <a:ext cx="2788920" cy="777240"/>
           </a:xfrm>
           <a:prstGeom prst="roundRect">
             <a:avLst>
@@ -10177,59 +7293,14 @@
       </p:sp>
       <p:sp>
         <p:nvSpPr>
-          <p:cNvPr id="10" name="Rounded Rectangle 9"/>
-          <p:cNvSpPr/>
-          <p:nvPr/>
-        </p:nvSpPr>
-        <p:spPr>
-          <a:xfrm>
-            <a:off x="731520" y="2971800"/>
-            <a:ext cx="1097280" cy="438912"/>
-          </a:xfrm>
-          <a:prstGeom prst="roundRect">
-            <a:avLst>
-              <a:gd name="adj" fmla="val 20000"/>
-            </a:avLst>
-          </a:prstGeom>
-          <a:solidFill>
-            <a:srgbClr val="0A7A96"/>
-          </a:solidFill>
-          <a:ln>
-            <a:noFill/>
-          </a:ln>
-        </p:spPr>
-        <p:style>
-          <a:lnRef idx="1">
-            <a:schemeClr val="accent1"/>
-          </a:lnRef>
-          <a:fillRef idx="3">
-            <a:schemeClr val="accent1"/>
-          </a:fillRef>
-          <a:effectRef idx="2">
-            <a:schemeClr val="accent1"/>
-          </a:effectRef>
-          <a:fontRef idx="minor">
-            <a:schemeClr val="lt1"/>
-          </a:fontRef>
-        </p:style>
-        <p:txBody>
-          <a:bodyPr rtlCol="0" anchor="ctr"/>
-          <a:lstStyle/>
-          <a:p>
-            <a:pPr algn="ctr"/>
-          </a:p>
-        </p:txBody>
-      </p:sp>
-      <p:sp>
-        <p:nvSpPr>
-          <p:cNvPr id="11" name="TextBox 10"/>
+          <p:cNvPr id="9" name="TextBox 8"/>
           <p:cNvSpPr txBox="1"/>
           <p:nvPr/>
         </p:nvSpPr>
         <p:spPr>
           <a:xfrm>
-            <a:off x="731520" y="3008376"/>
-            <a:ext cx="1097280" cy="384048"/>
+            <a:off x="3520440" y="676656"/>
+            <a:ext cx="2606040" cy="365760"/>
           </a:xfrm>
           <a:prstGeom prst="rect">
             <a:avLst/>
@@ -10244,25 +7315,25 @@
             <a:r>
               <a:rPr sz="1600" b="1" i="0">
                 <a:solidFill>
-                  <a:srgbClr val="FFFFFF"/>
+                  <a:srgbClr val="0A7A96"/>
                 </a:solidFill>
                 <a:latin typeface="Calibri"/>
               </a:rPr>
-              <a:t>RQ2</a:t>
-            </a:r>
-          </a:p>
-        </p:txBody>
-      </p:sp>
-      <p:sp>
-        <p:nvSpPr>
-          <p:cNvPr id="12" name="TextBox 11"/>
+              <a:t>1 169</a:t>
+            </a:r>
+          </a:p>
+        </p:txBody>
+      </p:sp>
+      <p:sp>
+        <p:nvSpPr>
+          <p:cNvPr id="10" name="TextBox 9"/>
           <p:cNvSpPr txBox="1"/>
           <p:nvPr/>
         </p:nvSpPr>
         <p:spPr>
           <a:xfrm>
-            <a:off x="2057400" y="2880360"/>
-            <a:ext cx="9235440" cy="685800"/>
+            <a:off x="3520440" y="1024128"/>
+            <a:ext cx="2606040" cy="292608"/>
           </a:xfrm>
           <a:prstGeom prst="rect">
             <a:avLst/>
@@ -10273,29 +7344,29 @@
           <a:bodyPr wrap="square" anchor="t"/>
           <a:lstStyle/>
           <a:p>
-            <a:pPr algn="l"/>
-            <a:r>
-              <a:rPr sz="1800" b="0" i="0">
+            <a:pPr algn="ctr"/>
+            <a:r>
+              <a:rPr sz="1100" b="0" i="0">
                 <a:solidFill>
-                  <a:srgbClr val="142034"/>
+                  <a:srgbClr val="5A687A"/>
                 </a:solidFill>
                 <a:latin typeface="Calibri"/>
               </a:rPr>
-              <a:t>Does training both jobs together beat training deinterleaving alone?</a:t>
-            </a:r>
-          </a:p>
-        </p:txBody>
-      </p:sp>
-      <p:sp>
-        <p:nvSpPr>
-          <p:cNvPr id="13" name="Rounded Rectangle 12"/>
+              <a:t>test windows</a:t>
+            </a:r>
+          </a:p>
+        </p:txBody>
+      </p:sp>
+      <p:sp>
+        <p:nvSpPr>
+          <p:cNvPr id="11" name="Rounded Rectangle 10"/>
           <p:cNvSpPr/>
           <p:nvPr/>
         </p:nvSpPr>
         <p:spPr>
           <a:xfrm>
-            <a:off x="502920" y="4069080"/>
-            <a:ext cx="11155680" cy="1371600"/>
+            <a:off x="6355080" y="640080"/>
+            <a:ext cx="2788920" cy="777240"/>
           </a:xfrm>
           <a:prstGeom prst="roundRect">
             <a:avLst>
@@ -10335,19 +7406,267 @@
       </p:sp>
       <p:sp>
         <p:nvSpPr>
+          <p:cNvPr id="12" name="TextBox 11"/>
+          <p:cNvSpPr txBox="1"/>
+          <p:nvPr/>
+        </p:nvSpPr>
+        <p:spPr>
+          <a:xfrm>
+            <a:off x="6446520" y="676656"/>
+            <a:ext cx="2606040" cy="365760"/>
+          </a:xfrm>
+          <a:prstGeom prst="rect">
+            <a:avLst/>
+          </a:prstGeom>
+          <a:noFill/>
+        </p:spPr>
+        <p:txBody>
+          <a:bodyPr wrap="square" anchor="t"/>
+          <a:lstStyle/>
+          <a:p>
+            <a:pPr algn="ctr"/>
+            <a:r>
+              <a:rPr sz="1600" b="1" i="0">
+                <a:solidFill>
+                  <a:srgbClr val="0A7A96"/>
+                </a:solidFill>
+                <a:latin typeface="Calibri"/>
+              </a:rPr>
+              <a:t>~3 / ~6</a:t>
+            </a:r>
+          </a:p>
+        </p:txBody>
+      </p:sp>
+      <p:sp>
+        <p:nvSpPr>
+          <p:cNvPr id="13" name="TextBox 12"/>
+          <p:cNvSpPr txBox="1"/>
+          <p:nvPr/>
+        </p:nvSpPr>
+        <p:spPr>
+          <a:xfrm>
+            <a:off x="6446520" y="1024128"/>
+            <a:ext cx="2606040" cy="292608"/>
+          </a:xfrm>
+          <a:prstGeom prst="rect">
+            <a:avLst/>
+          </a:prstGeom>
+          <a:noFill/>
+        </p:spPr>
+        <p:txBody>
+          <a:bodyPr wrap="square" anchor="t"/>
+          <a:lstStyle/>
+          <a:p>
+            <a:pPr algn="ctr"/>
+            <a:r>
+              <a:rPr sz="1100" b="0" i="0">
+                <a:solidFill>
+                  <a:srgbClr val="5A687A"/>
+                </a:solidFill>
+                <a:latin typeface="Calibri"/>
+              </a:rPr>
+              <a:t>emitters / modes</a:t>
+            </a:r>
+          </a:p>
+        </p:txBody>
+      </p:sp>
+      <p:sp>
+        <p:nvSpPr>
           <p:cNvPr id="14" name="Rounded Rectangle 13"/>
           <p:cNvSpPr/>
           <p:nvPr/>
         </p:nvSpPr>
         <p:spPr>
           <a:xfrm>
-            <a:off x="731520" y="4526280"/>
-            <a:ext cx="1097280" cy="438912"/>
+            <a:off x="9281160" y="640080"/>
+            <a:ext cx="2788920" cy="777240"/>
           </a:xfrm>
           <a:prstGeom prst="roundRect">
             <a:avLst>
-              <a:gd name="adj" fmla="val 20000"/>
+              <a:gd name="adj" fmla="val 8000"/>
             </a:avLst>
+          </a:prstGeom>
+          <a:solidFill>
+            <a:srgbClr val="F3F6F8"/>
+          </a:solidFill>
+          <a:ln w="12700">
+            <a:solidFill>
+              <a:srgbClr val="D2DAE2"/>
+            </a:solidFill>
+          </a:ln>
+        </p:spPr>
+        <p:style>
+          <a:lnRef idx="1">
+            <a:schemeClr val="accent1"/>
+          </a:lnRef>
+          <a:fillRef idx="3">
+            <a:schemeClr val="accent1"/>
+          </a:fillRef>
+          <a:effectRef idx="2">
+            <a:schemeClr val="accent1"/>
+          </a:effectRef>
+          <a:fontRef idx="minor">
+            <a:schemeClr val="lt1"/>
+          </a:fontRef>
+        </p:style>
+        <p:txBody>
+          <a:bodyPr rtlCol="0" anchor="ctr"/>
+          <a:lstStyle/>
+          <a:p>
+            <a:pPr algn="ctr"/>
+          </a:p>
+        </p:txBody>
+      </p:sp>
+      <p:sp>
+        <p:nvSpPr>
+          <p:cNvPr id="15" name="TextBox 14"/>
+          <p:cNvSpPr txBox="1"/>
+          <p:nvPr/>
+        </p:nvSpPr>
+        <p:spPr>
+          <a:xfrm>
+            <a:off x="9372600" y="676656"/>
+            <a:ext cx="2606040" cy="365760"/>
+          </a:xfrm>
+          <a:prstGeom prst="rect">
+            <a:avLst/>
+          </a:prstGeom>
+          <a:noFill/>
+        </p:spPr>
+        <p:txBody>
+          <a:bodyPr wrap="square" anchor="t"/>
+          <a:lstStyle/>
+          <a:p>
+            <a:pPr algn="ctr"/>
+            <a:r>
+              <a:rPr sz="1600" b="1" i="0">
+                <a:solidFill>
+                  <a:srgbClr val="0A7A96"/>
+                </a:solidFill>
+                <a:latin typeface="Calibri"/>
+              </a:rPr>
+              <a:t>19</a:t>
+            </a:r>
+          </a:p>
+        </p:txBody>
+      </p:sp>
+      <p:sp>
+        <p:nvSpPr>
+          <p:cNvPr id="16" name="TextBox 15"/>
+          <p:cNvSpPr txBox="1"/>
+          <p:nvPr/>
+        </p:nvSpPr>
+        <p:spPr>
+          <a:xfrm>
+            <a:off x="9372600" y="1024128"/>
+            <a:ext cx="2606040" cy="292608"/>
+          </a:xfrm>
+          <a:prstGeom prst="rect">
+            <a:avLst/>
+          </a:prstGeom>
+          <a:noFill/>
+        </p:spPr>
+        <p:txBody>
+          <a:bodyPr wrap="square" anchor="t"/>
+          <a:lstStyle/>
+          <a:p>
+            <a:pPr algn="ctr"/>
+            <a:r>
+              <a:rPr sz="1100" b="0" i="0">
+                <a:solidFill>
+                  <a:srgbClr val="5A687A"/>
+                </a:solidFill>
+                <a:latin typeface="Calibri"/>
+              </a:rPr>
+              <a:t>mode types</a:t>
+            </a:r>
+          </a:p>
+        </p:txBody>
+      </p:sp>
+      <p:sp>
+        <p:nvSpPr>
+          <p:cNvPr id="17" name="Rounded Rectangle 16"/>
+          <p:cNvSpPr/>
+          <p:nvPr/>
+        </p:nvSpPr>
+        <p:spPr>
+          <a:xfrm>
+            <a:off x="338328" y="1481328"/>
+            <a:ext cx="7004304" cy="4696072"/>
+          </a:xfrm>
+          <a:prstGeom prst="roundRect">
+            <a:avLst>
+              <a:gd name="adj" fmla="val 4000"/>
+            </a:avLst>
+          </a:prstGeom>
+          <a:solidFill>
+            <a:srgbClr val="F3F6F8"/>
+          </a:solidFill>
+          <a:ln w="12700">
+            <a:solidFill>
+              <a:srgbClr val="D2DAE2"/>
+            </a:solidFill>
+          </a:ln>
+        </p:spPr>
+        <p:style>
+          <a:lnRef idx="1">
+            <a:schemeClr val="accent1"/>
+          </a:lnRef>
+          <a:fillRef idx="3">
+            <a:schemeClr val="accent1"/>
+          </a:fillRef>
+          <a:effectRef idx="2">
+            <a:schemeClr val="accent1"/>
+          </a:effectRef>
+          <a:fontRef idx="minor">
+            <a:schemeClr val="lt1"/>
+          </a:fontRef>
+        </p:style>
+        <p:txBody>
+          <a:bodyPr rtlCol="0" anchor="ctr"/>
+          <a:lstStyle/>
+          <a:p>
+            <a:pPr algn="ctr"/>
+          </a:p>
+        </p:txBody>
+      </p:sp>
+      <p:pic>
+        <p:nvPicPr>
+          <p:cNvPr id="18" name="Picture 17" descr="feat_w100_em.png"/>
+          <p:cNvPicPr>
+            <a:picLocks noChangeAspect="1"/>
+          </p:cNvPicPr>
+          <p:nvPr/>
+        </p:nvPicPr>
+        <p:blipFill>
+          <a:blip r:embed="rId2"/>
+          <a:stretch>
+            <a:fillRect/>
+          </a:stretch>
+        </p:blipFill>
+        <p:spPr>
+          <a:xfrm>
+            <a:off x="411480" y="1554480"/>
+            <a:ext cx="6858000" cy="4549768"/>
+          </a:xfrm>
+          <a:prstGeom prst="rect">
+            <a:avLst/>
+          </a:prstGeom>
+        </p:spPr>
+      </p:pic>
+      <p:sp>
+        <p:nvSpPr>
+          <p:cNvPr id="19" name="Oval 18"/>
+          <p:cNvSpPr/>
+          <p:nvPr/>
+        </p:nvSpPr>
+        <p:spPr>
+          <a:xfrm>
+            <a:off x="7498079" y="1783080"/>
+            <a:ext cx="109728" cy="109728"/>
+          </a:xfrm>
+          <a:prstGeom prst="ellipse">
+            <a:avLst/>
           </a:prstGeom>
           <a:solidFill>
             <a:srgbClr val="0A7A96"/>
@@ -10380,14 +7699,14 @@
       </p:sp>
       <p:sp>
         <p:nvSpPr>
-          <p:cNvPr id="15" name="TextBox 14"/>
+          <p:cNvPr id="20" name="TextBox 19"/>
           <p:cNvSpPr txBox="1"/>
           <p:nvPr/>
         </p:nvSpPr>
         <p:spPr>
           <a:xfrm>
-            <a:off x="731520" y="4562856"/>
-            <a:ext cx="1097280" cy="384048"/>
+            <a:off x="7754111" y="1691640"/>
+            <a:ext cx="4041648" cy="731519"/>
           </a:xfrm>
           <a:prstGeom prst="rect">
             <a:avLst/>
@@ -10398,55 +7717,326 @@
           <a:bodyPr wrap="square" anchor="t"/>
           <a:lstStyle/>
           <a:p>
-            <a:pPr algn="ctr"/>
-            <a:r>
-              <a:rPr sz="1600" b="1" i="0">
-                <a:solidFill>
-                  <a:srgbClr val="FFFFFF"/>
-                </a:solidFill>
-                <a:latin typeface="Calibri"/>
-              </a:rPr>
-              <a:t>RQ3</a:t>
-            </a:r>
-          </a:p>
-        </p:txBody>
-      </p:sp>
-      <p:sp>
-        <p:nvSpPr>
-          <p:cNvPr id="16" name="TextBox 15"/>
-          <p:cNvSpPr txBox="1"/>
-          <p:nvPr/>
-        </p:nvSpPr>
-        <p:spPr>
-          <a:xfrm>
-            <a:off x="2057400" y="4434840"/>
-            <a:ext cx="9235440" cy="685800"/>
-          </a:xfrm>
-          <a:prstGeom prst="rect">
-            <a:avLst/>
-          </a:prstGeom>
-          <a:noFill/>
-        </p:spPr>
-        <p:txBody>
-          <a:bodyPr wrap="square" anchor="t"/>
-          <a:lstStyle/>
-          <a:p>
             <a:pPr algn="l"/>
             <a:r>
-              <a:rPr sz="1800" b="0" i="0">
+              <a:rPr sz="1400" b="0" i="0">
                 <a:solidFill>
                   <a:srgbClr val="142034"/>
                 </a:solidFill>
                 <a:latin typeface="Calibri"/>
               </a:rPr>
-              <a:t>Does a pairwise physical bias, or rotary encoding of pulse coordinates, actually help?</a:t>
-            </a:r>
-          </a:p>
-        </p:txBody>
-      </p:sp>
-      <p:sp>
-        <p:nvSpPr>
-          <p:cNvPr id="17" name="Rectangle 16"/>
+              <a:t>Orange: lock-on, low PRI, fills the window.</a:t>
+            </a:r>
+          </a:p>
+        </p:txBody>
+      </p:sp>
+      <p:sp>
+        <p:nvSpPr>
+          <p:cNvPr id="21" name="Oval 20"/>
+          <p:cNvSpPr/>
+          <p:nvPr/>
+        </p:nvSpPr>
+        <p:spPr>
+          <a:xfrm>
+            <a:off x="7498079" y="2441448"/>
+            <a:ext cx="109728" cy="109728"/>
+          </a:xfrm>
+          <a:prstGeom prst="ellipse">
+            <a:avLst/>
+          </a:prstGeom>
+          <a:solidFill>
+            <a:srgbClr val="0A7A96"/>
+          </a:solidFill>
+          <a:ln>
+            <a:noFill/>
+          </a:ln>
+        </p:spPr>
+        <p:style>
+          <a:lnRef idx="1">
+            <a:schemeClr val="accent1"/>
+          </a:lnRef>
+          <a:fillRef idx="3">
+            <a:schemeClr val="accent1"/>
+          </a:fillRef>
+          <a:effectRef idx="2">
+            <a:schemeClr val="accent1"/>
+          </a:effectRef>
+          <a:fontRef idx="minor">
+            <a:schemeClr val="lt1"/>
+          </a:fontRef>
+        </p:style>
+        <p:txBody>
+          <a:bodyPr rtlCol="0" anchor="ctr"/>
+          <a:lstStyle/>
+          <a:p>
+            <a:pPr algn="ctr"/>
+          </a:p>
+        </p:txBody>
+      </p:sp>
+      <p:sp>
+        <p:nvSpPr>
+          <p:cNvPr id="22" name="TextBox 21"/>
+          <p:cNvSpPr txBox="1"/>
+          <p:nvPr/>
+        </p:nvSpPr>
+        <p:spPr>
+          <a:xfrm>
+            <a:off x="7754111" y="2350008"/>
+            <a:ext cx="4041648" cy="731519"/>
+          </a:xfrm>
+          <a:prstGeom prst="rect">
+            <a:avLst/>
+          </a:prstGeom>
+          <a:noFill/>
+        </p:spPr>
+        <p:txBody>
+          <a:bodyPr wrap="square" anchor="t"/>
+          <a:lstStyle/>
+          <a:p>
+            <a:pPr algn="l"/>
+            <a:r>
+              <a:rPr sz="1400" b="0" i="0">
+                <a:solidFill>
+                  <a:srgbClr val="142034"/>
+                </a:solidFill>
+                <a:latin typeface="Calibri"/>
+              </a:rPr>
+              <a:t>Purple: scanning. Only seen when the beam sweeps the receiver.</a:t>
+            </a:r>
+          </a:p>
+        </p:txBody>
+      </p:sp>
+      <p:sp>
+        <p:nvSpPr>
+          <p:cNvPr id="23" name="Oval 22"/>
+          <p:cNvSpPr/>
+          <p:nvPr/>
+        </p:nvSpPr>
+        <p:spPr>
+          <a:xfrm>
+            <a:off x="7498079" y="3099816"/>
+            <a:ext cx="109728" cy="109728"/>
+          </a:xfrm>
+          <a:prstGeom prst="ellipse">
+            <a:avLst/>
+          </a:prstGeom>
+          <a:solidFill>
+            <a:srgbClr val="0A7A96"/>
+          </a:solidFill>
+          <a:ln>
+            <a:noFill/>
+          </a:ln>
+        </p:spPr>
+        <p:style>
+          <a:lnRef idx="1">
+            <a:schemeClr val="accent1"/>
+          </a:lnRef>
+          <a:fillRef idx="3">
+            <a:schemeClr val="accent1"/>
+          </a:fillRef>
+          <a:effectRef idx="2">
+            <a:schemeClr val="accent1"/>
+          </a:effectRef>
+          <a:fontRef idx="minor">
+            <a:schemeClr val="lt1"/>
+          </a:fontRef>
+        </p:style>
+        <p:txBody>
+          <a:bodyPr rtlCol="0" anchor="ctr"/>
+          <a:lstStyle/>
+          <a:p>
+            <a:pPr algn="ctr"/>
+          </a:p>
+        </p:txBody>
+      </p:sp>
+      <p:sp>
+        <p:nvSpPr>
+          <p:cNvPr id="24" name="TextBox 23"/>
+          <p:cNvSpPr txBox="1"/>
+          <p:nvPr/>
+        </p:nvSpPr>
+        <p:spPr>
+          <a:xfrm>
+            <a:off x="7754111" y="3008376"/>
+            <a:ext cx="4041648" cy="731519"/>
+          </a:xfrm>
+          <a:prstGeom prst="rect">
+            <a:avLst/>
+          </a:prstGeom>
+          <a:noFill/>
+        </p:spPr>
+        <p:txBody>
+          <a:bodyPr wrap="square" anchor="t"/>
+          <a:lstStyle/>
+          <a:p>
+            <a:pPr algn="l"/>
+            <a:r>
+              <a:rPr sz="1400" b="0" i="0">
+                <a:solidFill>
+                  <a:srgbClr val="142034"/>
+                </a:solidFill>
+                <a:latin typeface="Calibri"/>
+              </a:rPr>
+              <a:t>Amplitude is the giveaway: lobes, not a line. Scan period 2–5 s.</a:t>
+            </a:r>
+          </a:p>
+        </p:txBody>
+      </p:sp>
+      <p:sp>
+        <p:nvSpPr>
+          <p:cNvPr id="25" name="Oval 24"/>
+          <p:cNvSpPr/>
+          <p:nvPr/>
+        </p:nvSpPr>
+        <p:spPr>
+          <a:xfrm>
+            <a:off x="7498079" y="3758184"/>
+            <a:ext cx="109728" cy="109728"/>
+          </a:xfrm>
+          <a:prstGeom prst="ellipse">
+            <a:avLst/>
+          </a:prstGeom>
+          <a:solidFill>
+            <a:srgbClr val="0A7A96"/>
+          </a:solidFill>
+          <a:ln>
+            <a:noFill/>
+          </a:ln>
+        </p:spPr>
+        <p:style>
+          <a:lnRef idx="1">
+            <a:schemeClr val="accent1"/>
+          </a:lnRef>
+          <a:fillRef idx="3">
+            <a:schemeClr val="accent1"/>
+          </a:fillRef>
+          <a:effectRef idx="2">
+            <a:schemeClr val="accent1"/>
+          </a:effectRef>
+          <a:fontRef idx="minor">
+            <a:schemeClr val="lt1"/>
+          </a:fontRef>
+        </p:style>
+        <p:txBody>
+          <a:bodyPr rtlCol="0" anchor="ctr"/>
+          <a:lstStyle/>
+          <a:p>
+            <a:pPr algn="ctr"/>
+          </a:p>
+        </p:txBody>
+      </p:sp>
+      <p:sp>
+        <p:nvSpPr>
+          <p:cNvPr id="26" name="TextBox 25"/>
+          <p:cNvSpPr txBox="1"/>
+          <p:nvPr/>
+        </p:nvSpPr>
+        <p:spPr>
+          <a:xfrm>
+            <a:off x="7754111" y="3666744"/>
+            <a:ext cx="4041648" cy="731519"/>
+          </a:xfrm>
+          <a:prstGeom prst="rect">
+            <a:avLst/>
+          </a:prstGeom>
+          <a:noFill/>
+        </p:spPr>
+        <p:txBody>
+          <a:bodyPr wrap="square" anchor="t"/>
+          <a:lstStyle/>
+          <a:p>
+            <a:pPr algn="l"/>
+            <a:r>
+              <a:rPr sz="1400" b="0" i="0">
+                <a:solidFill>
+                  <a:srgbClr val="142034"/>
+                </a:solidFill>
+                <a:latin typeface="Calibri"/>
+              </a:rPr>
+              <a:t>A density clusterer on RF/PW ignores the sparse class.</a:t>
+            </a:r>
+          </a:p>
+        </p:txBody>
+      </p:sp>
+      <p:sp>
+        <p:nvSpPr>
+          <p:cNvPr id="27" name="Oval 26"/>
+          <p:cNvSpPr/>
+          <p:nvPr/>
+        </p:nvSpPr>
+        <p:spPr>
+          <a:xfrm>
+            <a:off x="7498079" y="4416552"/>
+            <a:ext cx="109728" cy="109728"/>
+          </a:xfrm>
+          <a:prstGeom prst="ellipse">
+            <a:avLst/>
+          </a:prstGeom>
+          <a:solidFill>
+            <a:srgbClr val="0A7A96"/>
+          </a:solidFill>
+          <a:ln>
+            <a:noFill/>
+          </a:ln>
+        </p:spPr>
+        <p:style>
+          <a:lnRef idx="1">
+            <a:schemeClr val="accent1"/>
+          </a:lnRef>
+          <a:fillRef idx="3">
+            <a:schemeClr val="accent1"/>
+          </a:fillRef>
+          <a:effectRef idx="2">
+            <a:schemeClr val="accent1"/>
+          </a:effectRef>
+          <a:fontRef idx="minor">
+            <a:schemeClr val="lt1"/>
+          </a:fontRef>
+        </p:style>
+        <p:txBody>
+          <a:bodyPr rtlCol="0" anchor="ctr"/>
+          <a:lstStyle/>
+          <a:p>
+            <a:pPr algn="ctr"/>
+          </a:p>
+        </p:txBody>
+      </p:sp>
+      <p:sp>
+        <p:nvSpPr>
+          <p:cNvPr id="28" name="TextBox 27"/>
+          <p:cNvSpPr txBox="1"/>
+          <p:nvPr/>
+        </p:nvSpPr>
+        <p:spPr>
+          <a:xfrm>
+            <a:off x="7754111" y="4325112"/>
+            <a:ext cx="4041648" cy="731519"/>
+          </a:xfrm>
+          <a:prstGeom prst="rect">
+            <a:avLst/>
+          </a:prstGeom>
+          <a:noFill/>
+        </p:spPr>
+        <p:txBody>
+          <a:bodyPr wrap="square" anchor="t"/>
+          <a:lstStyle/>
+          <a:p>
+            <a:pPr algn="l"/>
+            <a:r>
+              <a:rPr sz="1400" b="0" i="0">
+                <a:solidFill>
+                  <a:srgbClr val="142034"/>
+                </a:solidFill>
+                <a:latin typeface="Calibri"/>
+              </a:rPr>
+              <a:t>3 pulses vs 1997 in the same window is common.</a:t>
+            </a:r>
+          </a:p>
+        </p:txBody>
+      </p:sp>
+      <p:sp>
+        <p:nvSpPr>
+          <p:cNvPr id="29" name="Rectangle 28"/>
           <p:cNvSpPr/>
           <p:nvPr/>
         </p:nvSpPr>
@@ -10491,7 +8081,7 @@
       </p:sp>
       <p:sp>
         <p:nvSpPr>
-          <p:cNvPr id="18" name="TextBox 17"/>
+          <p:cNvPr id="30" name="TextBox 29"/>
           <p:cNvSpPr txBox="1"/>
           <p:nvPr/>
         </p:nvSpPr>
@@ -10524,7 +8114,7 @@
       </p:sp>
       <p:sp>
         <p:nvSpPr>
-          <p:cNvPr id="19" name="TextBox 18"/>
+          <p:cNvPr id="31" name="TextBox 30"/>
           <p:cNvSpPr txBox="1"/>
           <p:nvPr/>
         </p:nvSpPr>
@@ -10550,7 +8140,7 @@
                 </a:solidFill>
                 <a:latin typeface="Calibri"/>
               </a:rPr>
-              <a:t>3 / 15</a:t>
+              <a:t>3 / 11</a:t>
             </a:r>
           </a:p>
         </p:txBody>
@@ -10667,7 +8257,7 @@
         </p:nvSpPr>
         <p:spPr>
           <a:xfrm>
-            <a:off x="502920" y="201168"/>
+            <a:off x="502920" y="182880"/>
             <a:ext cx="10972800" cy="365760"/>
           </a:xfrm>
           <a:prstGeom prst="rect">
@@ -10687,7 +8277,7 @@
                 </a:solidFill>
                 <a:latin typeface="Calibri"/>
               </a:rPr>
-              <a:t>Dense lock-on versus sparse scan</a:t>
+              <a:t>Floods, and RF/PW that are not unique IDs</a:t>
             </a:r>
           </a:p>
         </p:txBody>
@@ -10700,12 +8290,12 @@
         </p:nvSpPr>
         <p:spPr>
           <a:xfrm>
-            <a:off x="502920" y="640080"/>
-            <a:ext cx="2788920" cy="777240"/>
+            <a:off x="292608" y="566928"/>
+            <a:ext cx="5724144" cy="3846782"/>
           </a:xfrm>
           <a:prstGeom prst="roundRect">
             <a:avLst>
-              <a:gd name="adj" fmla="val 8000"/>
+              <a:gd name="adj" fmla="val 4000"/>
             </a:avLst>
           </a:prstGeom>
           <a:solidFill>
@@ -10739,86 +8329,44 @@
           </a:p>
         </p:txBody>
       </p:sp>
-      <p:sp>
-        <p:nvSpPr>
-          <p:cNvPr id="6" name="TextBox 5"/>
-          <p:cNvSpPr txBox="1"/>
-          <p:nvPr/>
-        </p:nvSpPr>
-        <p:spPr>
-          <a:xfrm>
-            <a:off x="594360" y="676656"/>
-            <a:ext cx="2606040" cy="365760"/>
-          </a:xfrm>
-          <a:prstGeom prst="rect">
-            <a:avLst/>
-          </a:prstGeom>
-          <a:noFill/>
-        </p:spPr>
-        <p:txBody>
-          <a:bodyPr wrap="square" anchor="t"/>
-          <a:lstStyle/>
-          <a:p>
-            <a:pPr algn="ctr"/>
-            <a:r>
-              <a:rPr sz="1600" b="1" i="0">
-                <a:solidFill>
-                  <a:srgbClr val="0A7A96"/>
-                </a:solidFill>
-                <a:latin typeface="Calibri"/>
-              </a:rPr>
-              <a:t>L = 2000</a:t>
-            </a:r>
-          </a:p>
-        </p:txBody>
-      </p:sp>
-      <p:sp>
-        <p:nvSpPr>
-          <p:cNvPr id="7" name="TextBox 6"/>
-          <p:cNvSpPr txBox="1"/>
-          <p:nvPr/>
-        </p:nvSpPr>
-        <p:spPr>
-          <a:xfrm>
-            <a:off x="594360" y="1024128"/>
-            <a:ext cx="2606040" cy="292608"/>
-          </a:xfrm>
-          <a:prstGeom prst="rect">
-            <a:avLst/>
-          </a:prstGeom>
-          <a:noFill/>
-        </p:spPr>
-        <p:txBody>
-          <a:bodyPr wrap="square" anchor="t"/>
-          <a:lstStyle/>
-          <a:p>
-            <a:pPr algn="ctr"/>
-            <a:r>
-              <a:rPr sz="1100" b="0" i="0">
-                <a:solidFill>
-                  <a:srgbClr val="5A687A"/>
-                </a:solidFill>
-                <a:latin typeface="Calibri"/>
-              </a:rPr>
-              <a:t>pulses / window</a:t>
-            </a:r>
-          </a:p>
-        </p:txBody>
-      </p:sp>
-      <p:sp>
-        <p:nvSpPr>
-          <p:cNvPr id="8" name="Rounded Rectangle 7"/>
+      <p:pic>
+        <p:nvPicPr>
+          <p:cNvPr id="6" name="Picture 5" descr="feat_imbalance.png"/>
+          <p:cNvPicPr>
+            <a:picLocks noChangeAspect="1"/>
+          </p:cNvPicPr>
+          <p:nvPr/>
+        </p:nvPicPr>
+        <p:blipFill>
+          <a:blip r:embed="rId2"/>
+          <a:stretch>
+            <a:fillRect/>
+          </a:stretch>
+        </p:blipFill>
+        <p:spPr>
+          <a:xfrm>
+            <a:off x="365760" y="640080"/>
+            <a:ext cx="5577840" cy="3700478"/>
+          </a:xfrm>
+          <a:prstGeom prst="rect">
+            <a:avLst/>
+          </a:prstGeom>
+        </p:spPr>
+      </p:pic>
+      <p:sp>
+        <p:nvSpPr>
+          <p:cNvPr id="7" name="Rounded Rectangle 6"/>
           <p:cNvSpPr/>
           <p:nvPr/>
         </p:nvSpPr>
         <p:spPr>
           <a:xfrm>
-            <a:off x="3429000" y="640080"/>
-            <a:ext cx="2788920" cy="777240"/>
+            <a:off x="6099048" y="566928"/>
+            <a:ext cx="5724144" cy="3846782"/>
           </a:xfrm>
           <a:prstGeom prst="roundRect">
             <a:avLst>
-              <a:gd name="adj" fmla="val 8000"/>
+              <a:gd name="adj" fmla="val 4000"/>
             </a:avLst>
           </a:prstGeom>
           <a:solidFill>
@@ -10852,363 +8400,24 @@
           </a:p>
         </p:txBody>
       </p:sp>
-      <p:sp>
-        <p:nvSpPr>
-          <p:cNvPr id="9" name="TextBox 8"/>
-          <p:cNvSpPr txBox="1"/>
-          <p:nvPr/>
-        </p:nvSpPr>
-        <p:spPr>
-          <a:xfrm>
-            <a:off x="3520440" y="676656"/>
-            <a:ext cx="2606040" cy="365760"/>
-          </a:xfrm>
-          <a:prstGeom prst="rect">
-            <a:avLst/>
-          </a:prstGeom>
-          <a:noFill/>
-        </p:spPr>
-        <p:txBody>
-          <a:bodyPr wrap="square" anchor="t"/>
-          <a:lstStyle/>
-          <a:p>
-            <a:pPr algn="ctr"/>
-            <a:r>
-              <a:rPr sz="1600" b="1" i="0">
-                <a:solidFill>
-                  <a:srgbClr val="0A7A96"/>
-                </a:solidFill>
-                <a:latin typeface="Calibri"/>
-              </a:rPr>
-              <a:t>1 169</a:t>
-            </a:r>
-          </a:p>
-        </p:txBody>
-      </p:sp>
-      <p:sp>
-        <p:nvSpPr>
-          <p:cNvPr id="10" name="TextBox 9"/>
-          <p:cNvSpPr txBox="1"/>
-          <p:nvPr/>
-        </p:nvSpPr>
-        <p:spPr>
-          <a:xfrm>
-            <a:off x="3520440" y="1024128"/>
-            <a:ext cx="2606040" cy="292608"/>
-          </a:xfrm>
-          <a:prstGeom prst="rect">
-            <a:avLst/>
-          </a:prstGeom>
-          <a:noFill/>
-        </p:spPr>
-        <p:txBody>
-          <a:bodyPr wrap="square" anchor="t"/>
-          <a:lstStyle/>
-          <a:p>
-            <a:pPr algn="ctr"/>
-            <a:r>
-              <a:rPr sz="1100" b="0" i="0">
-                <a:solidFill>
-                  <a:srgbClr val="5A687A"/>
-                </a:solidFill>
-                <a:latin typeface="Calibri"/>
-              </a:rPr>
-              <a:t>test windows</a:t>
-            </a:r>
-          </a:p>
-        </p:txBody>
-      </p:sp>
-      <p:sp>
-        <p:nvSpPr>
-          <p:cNvPr id="11" name="Rounded Rectangle 10"/>
-          <p:cNvSpPr/>
-          <p:nvPr/>
-        </p:nvSpPr>
-        <p:spPr>
-          <a:xfrm>
-            <a:off x="6355080" y="640080"/>
-            <a:ext cx="2788920" cy="777240"/>
-          </a:xfrm>
-          <a:prstGeom prst="roundRect">
-            <a:avLst>
-              <a:gd name="adj" fmla="val 8000"/>
-            </a:avLst>
-          </a:prstGeom>
-          <a:solidFill>
-            <a:srgbClr val="F3F6F8"/>
-          </a:solidFill>
-          <a:ln w="12700">
-            <a:solidFill>
-              <a:srgbClr val="D2DAE2"/>
-            </a:solidFill>
-          </a:ln>
-        </p:spPr>
-        <p:style>
-          <a:lnRef idx="1">
-            <a:schemeClr val="accent1"/>
-          </a:lnRef>
-          <a:fillRef idx="3">
-            <a:schemeClr val="accent1"/>
-          </a:fillRef>
-          <a:effectRef idx="2">
-            <a:schemeClr val="accent1"/>
-          </a:effectRef>
-          <a:fontRef idx="minor">
-            <a:schemeClr val="lt1"/>
-          </a:fontRef>
-        </p:style>
-        <p:txBody>
-          <a:bodyPr rtlCol="0" anchor="ctr"/>
-          <a:lstStyle/>
-          <a:p>
-            <a:pPr algn="ctr"/>
-          </a:p>
-        </p:txBody>
-      </p:sp>
-      <p:sp>
-        <p:nvSpPr>
-          <p:cNvPr id="12" name="TextBox 11"/>
-          <p:cNvSpPr txBox="1"/>
-          <p:nvPr/>
-        </p:nvSpPr>
-        <p:spPr>
-          <a:xfrm>
-            <a:off x="6446520" y="676656"/>
-            <a:ext cx="2606040" cy="365760"/>
-          </a:xfrm>
-          <a:prstGeom prst="rect">
-            <a:avLst/>
-          </a:prstGeom>
-          <a:noFill/>
-        </p:spPr>
-        <p:txBody>
-          <a:bodyPr wrap="square" anchor="t"/>
-          <a:lstStyle/>
-          <a:p>
-            <a:pPr algn="ctr"/>
-            <a:r>
-              <a:rPr sz="1600" b="1" i="0">
-                <a:solidFill>
-                  <a:srgbClr val="0A7A96"/>
-                </a:solidFill>
-                <a:latin typeface="Calibri"/>
-              </a:rPr>
-              <a:t>~3 / ~6</a:t>
-            </a:r>
-          </a:p>
-        </p:txBody>
-      </p:sp>
-      <p:sp>
-        <p:nvSpPr>
-          <p:cNvPr id="13" name="TextBox 12"/>
-          <p:cNvSpPr txBox="1"/>
-          <p:nvPr/>
-        </p:nvSpPr>
-        <p:spPr>
-          <a:xfrm>
-            <a:off x="6446520" y="1024128"/>
-            <a:ext cx="2606040" cy="292608"/>
-          </a:xfrm>
-          <a:prstGeom prst="rect">
-            <a:avLst/>
-          </a:prstGeom>
-          <a:noFill/>
-        </p:spPr>
-        <p:txBody>
-          <a:bodyPr wrap="square" anchor="t"/>
-          <a:lstStyle/>
-          <a:p>
-            <a:pPr algn="ctr"/>
-            <a:r>
-              <a:rPr sz="1100" b="0" i="0">
-                <a:solidFill>
-                  <a:srgbClr val="5A687A"/>
-                </a:solidFill>
-                <a:latin typeface="Calibri"/>
-              </a:rPr>
-              <a:t>emitters / modes</a:t>
-            </a:r>
-          </a:p>
-        </p:txBody>
-      </p:sp>
-      <p:sp>
-        <p:nvSpPr>
-          <p:cNvPr id="14" name="Rounded Rectangle 13"/>
-          <p:cNvSpPr/>
-          <p:nvPr/>
-        </p:nvSpPr>
-        <p:spPr>
-          <a:xfrm>
-            <a:off x="9281160" y="640080"/>
-            <a:ext cx="2788920" cy="777240"/>
-          </a:xfrm>
-          <a:prstGeom prst="roundRect">
-            <a:avLst>
-              <a:gd name="adj" fmla="val 8000"/>
-            </a:avLst>
-          </a:prstGeom>
-          <a:solidFill>
-            <a:srgbClr val="F3F6F8"/>
-          </a:solidFill>
-          <a:ln w="12700">
-            <a:solidFill>
-              <a:srgbClr val="D2DAE2"/>
-            </a:solidFill>
-          </a:ln>
-        </p:spPr>
-        <p:style>
-          <a:lnRef idx="1">
-            <a:schemeClr val="accent1"/>
-          </a:lnRef>
-          <a:fillRef idx="3">
-            <a:schemeClr val="accent1"/>
-          </a:fillRef>
-          <a:effectRef idx="2">
-            <a:schemeClr val="accent1"/>
-          </a:effectRef>
-          <a:fontRef idx="minor">
-            <a:schemeClr val="lt1"/>
-          </a:fontRef>
-        </p:style>
-        <p:txBody>
-          <a:bodyPr rtlCol="0" anchor="ctr"/>
-          <a:lstStyle/>
-          <a:p>
-            <a:pPr algn="ctr"/>
-          </a:p>
-        </p:txBody>
-      </p:sp>
-      <p:sp>
-        <p:nvSpPr>
-          <p:cNvPr id="15" name="TextBox 14"/>
-          <p:cNvSpPr txBox="1"/>
-          <p:nvPr/>
-        </p:nvSpPr>
-        <p:spPr>
-          <a:xfrm>
-            <a:off x="9372600" y="676656"/>
-            <a:ext cx="2606040" cy="365760"/>
-          </a:xfrm>
-          <a:prstGeom prst="rect">
-            <a:avLst/>
-          </a:prstGeom>
-          <a:noFill/>
-        </p:spPr>
-        <p:txBody>
-          <a:bodyPr wrap="square" anchor="t"/>
-          <a:lstStyle/>
-          <a:p>
-            <a:pPr algn="ctr"/>
-            <a:r>
-              <a:rPr sz="1600" b="1" i="0">
-                <a:solidFill>
-                  <a:srgbClr val="0A7A96"/>
-                </a:solidFill>
-                <a:latin typeface="Calibri"/>
-              </a:rPr>
-              <a:t>19</a:t>
-            </a:r>
-          </a:p>
-        </p:txBody>
-      </p:sp>
-      <p:sp>
-        <p:nvSpPr>
-          <p:cNvPr id="16" name="TextBox 15"/>
-          <p:cNvSpPr txBox="1"/>
-          <p:nvPr/>
-        </p:nvSpPr>
-        <p:spPr>
-          <a:xfrm>
-            <a:off x="9372600" y="1024128"/>
-            <a:ext cx="2606040" cy="292608"/>
-          </a:xfrm>
-          <a:prstGeom prst="rect">
-            <a:avLst/>
-          </a:prstGeom>
-          <a:noFill/>
-        </p:spPr>
-        <p:txBody>
-          <a:bodyPr wrap="square" anchor="t"/>
-          <a:lstStyle/>
-          <a:p>
-            <a:pPr algn="ctr"/>
-            <a:r>
-              <a:rPr sz="1100" b="0" i="0">
-                <a:solidFill>
-                  <a:srgbClr val="5A687A"/>
-                </a:solidFill>
-                <a:latin typeface="Calibri"/>
-              </a:rPr>
-              <a:t>mode types</a:t>
-            </a:r>
-          </a:p>
-        </p:txBody>
-      </p:sp>
-      <p:sp>
-        <p:nvSpPr>
-          <p:cNvPr id="17" name="Rounded Rectangle 16"/>
-          <p:cNvSpPr/>
-          <p:nvPr/>
-        </p:nvSpPr>
-        <p:spPr>
-          <a:xfrm>
-            <a:off x="338328" y="1481328"/>
-            <a:ext cx="7004304" cy="4696072"/>
-          </a:xfrm>
-          <a:prstGeom prst="roundRect">
-            <a:avLst>
-              <a:gd name="adj" fmla="val 4000"/>
-            </a:avLst>
-          </a:prstGeom>
-          <a:solidFill>
-            <a:srgbClr val="F3F6F8"/>
-          </a:solidFill>
-          <a:ln w="12700">
-            <a:solidFill>
-              <a:srgbClr val="D2DAE2"/>
-            </a:solidFill>
-          </a:ln>
-        </p:spPr>
-        <p:style>
-          <a:lnRef idx="1">
-            <a:schemeClr val="accent1"/>
-          </a:lnRef>
-          <a:fillRef idx="3">
-            <a:schemeClr val="accent1"/>
-          </a:fillRef>
-          <a:effectRef idx="2">
-            <a:schemeClr val="accent1"/>
-          </a:effectRef>
-          <a:fontRef idx="minor">
-            <a:schemeClr val="lt1"/>
-          </a:fontRef>
-        </p:style>
-        <p:txBody>
-          <a:bodyPr rtlCol="0" anchor="ctr"/>
-          <a:lstStyle/>
-          <a:p>
-            <a:pPr algn="ctr"/>
-          </a:p>
-        </p:txBody>
-      </p:sp>
       <p:pic>
         <p:nvPicPr>
-          <p:cNvPr id="18" name="Picture 17" descr="feat_w100_em.png"/>
+          <p:cNvPr id="8" name="Picture 7" descr="feat_maxemitters.png"/>
           <p:cNvPicPr>
             <a:picLocks noChangeAspect="1"/>
           </p:cNvPicPr>
           <p:nvPr/>
         </p:nvPicPr>
         <p:blipFill>
-          <a:blip r:embed="rId2"/>
+          <a:blip r:embed="rId3"/>
           <a:stretch>
             <a:fillRect/>
           </a:stretch>
         </p:blipFill>
         <p:spPr>
           <a:xfrm>
-            <a:off x="411480" y="1554480"/>
-            <a:ext cx="6858000" cy="4549768"/>
+            <a:off x="6172200" y="640080"/>
+            <a:ext cx="5577840" cy="3700478"/>
           </a:xfrm>
           <a:prstGeom prst="rect">
             <a:avLst/>
@@ -11217,57 +8426,14 @@
       </p:pic>
       <p:sp>
         <p:nvSpPr>
-          <p:cNvPr id="19" name="Oval 18"/>
-          <p:cNvSpPr/>
-          <p:nvPr/>
-        </p:nvSpPr>
-        <p:spPr>
-          <a:xfrm>
-            <a:off x="7498079" y="1783080"/>
-            <a:ext cx="109728" cy="109728"/>
-          </a:xfrm>
-          <a:prstGeom prst="ellipse">
-            <a:avLst/>
-          </a:prstGeom>
-          <a:solidFill>
-            <a:srgbClr val="0A7A96"/>
-          </a:solidFill>
-          <a:ln>
-            <a:noFill/>
-          </a:ln>
-        </p:spPr>
-        <p:style>
-          <a:lnRef idx="1">
-            <a:schemeClr val="accent1"/>
-          </a:lnRef>
-          <a:fillRef idx="3">
-            <a:schemeClr val="accent1"/>
-          </a:fillRef>
-          <a:effectRef idx="2">
-            <a:schemeClr val="accent1"/>
-          </a:effectRef>
-          <a:fontRef idx="minor">
-            <a:schemeClr val="lt1"/>
-          </a:fontRef>
-        </p:style>
-        <p:txBody>
-          <a:bodyPr rtlCol="0" anchor="ctr"/>
-          <a:lstStyle/>
-          <a:p>
-            <a:pPr algn="ctr"/>
-          </a:p>
-        </p:txBody>
-      </p:sp>
-      <p:sp>
-        <p:nvSpPr>
-          <p:cNvPr id="20" name="TextBox 19"/>
+          <p:cNvPr id="9" name="TextBox 8"/>
           <p:cNvSpPr txBox="1"/>
           <p:nvPr/>
         </p:nvSpPr>
         <p:spPr>
           <a:xfrm>
-            <a:off x="7754111" y="1691640"/>
-            <a:ext cx="4041648" cy="731519"/>
+            <a:off x="457200" y="5029200"/>
+            <a:ext cx="5577840" cy="1097280"/>
           </a:xfrm>
           <a:prstGeom prst="rect">
             <a:avLst/>
@@ -11280,70 +8446,27 @@
           <a:p>
             <a:pPr algn="l"/>
             <a:r>
-              <a:rPr sz="1400" b="0" i="0">
+              <a:rPr sz="1300" b="0" i="0">
                 <a:solidFill>
                   <a:srgbClr val="142034"/>
                 </a:solidFill>
                 <a:latin typeface="Calibri"/>
               </a:rPr>
-              <a:t>Orange: lock-on, low PRI, fills the window.</a:t>
-            </a:r>
-          </a:p>
-        </p:txBody>
-      </p:sp>
-      <p:sp>
-        <p:nvSpPr>
-          <p:cNvPr id="21" name="Oval 20"/>
-          <p:cNvSpPr/>
-          <p:nvPr/>
-        </p:nvSpPr>
-        <p:spPr>
-          <a:xfrm>
-            <a:off x="7498079" y="2441448"/>
-            <a:ext cx="109728" cy="109728"/>
-          </a:xfrm>
-          <a:prstGeom prst="ellipse">
-            <a:avLst/>
-          </a:prstGeom>
-          <a:solidFill>
-            <a:srgbClr val="0A7A96"/>
-          </a:solidFill>
-          <a:ln>
-            <a:noFill/>
-          </a:ln>
-        </p:spPr>
-        <p:style>
-          <a:lnRef idx="1">
-            <a:schemeClr val="accent1"/>
-          </a:lnRef>
-          <a:fillRef idx="3">
-            <a:schemeClr val="accent1"/>
-          </a:fillRef>
-          <a:effectRef idx="2">
-            <a:schemeClr val="accent1"/>
-          </a:effectRef>
-          <a:fontRef idx="minor">
-            <a:schemeClr val="lt1"/>
-          </a:fontRef>
-        </p:style>
-        <p:txBody>
-          <a:bodyPr rtlCol="0" anchor="ctr"/>
-          <a:lstStyle/>
-          <a:p>
-            <a:pPr algn="ctr"/>
-          </a:p>
-        </p:txBody>
-      </p:sp>
-      <p:sp>
-        <p:nvSpPr>
-          <p:cNvPr id="22" name="TextBox 21"/>
+              <a:t>Left: 3 pulses vs 1997. One lock-on, one long PRI or mid-scan. A 3-pulse train is a poor later mode input.</a:t>
+            </a:r>
+          </a:p>
+        </p:txBody>
+      </p:sp>
+      <p:sp>
+        <p:nvSpPr>
+          <p:cNvPr id="10" name="TextBox 9"/>
           <p:cNvSpPr txBox="1"/>
           <p:nvPr/>
         </p:nvSpPr>
         <p:spPr>
           <a:xfrm>
-            <a:off x="7754111" y="2350008"/>
-            <a:ext cx="4041648" cy="731519"/>
+            <a:off x="6263640" y="5029200"/>
+            <a:ext cx="5486400" cy="1097280"/>
           </a:xfrm>
           <a:prstGeom prst="rect">
             <a:avLst/>
@@ -11356,248 +8479,20 @@
           <a:p>
             <a:pPr algn="l"/>
             <a:r>
-              <a:rPr sz="1400" b="0" i="0">
+              <a:rPr sz="1300" b="0" i="0">
                 <a:solidFill>
                   <a:srgbClr val="142034"/>
                 </a:solidFill>
                 <a:latin typeface="Calibri"/>
               </a:rPr>
-              <a:t>Purple: scanning. Only seen when the beam sweeps the receiver.</a:t>
-            </a:r>
-          </a:p>
-        </p:txBody>
-      </p:sp>
-      <p:sp>
-        <p:nvSpPr>
-          <p:cNvPr id="23" name="Oval 22"/>
-          <p:cNvSpPr/>
-          <p:nvPr/>
-        </p:nvSpPr>
-        <p:spPr>
-          <a:xfrm>
-            <a:off x="7498079" y="3099816"/>
-            <a:ext cx="109728" cy="109728"/>
-          </a:xfrm>
-          <a:prstGeom prst="ellipse">
-            <a:avLst/>
-          </a:prstGeom>
-          <a:solidFill>
-            <a:srgbClr val="0A7A96"/>
-          </a:solidFill>
-          <a:ln>
-            <a:noFill/>
-          </a:ln>
-        </p:spPr>
-        <p:style>
-          <a:lnRef idx="1">
-            <a:schemeClr val="accent1"/>
-          </a:lnRef>
-          <a:fillRef idx="3">
-            <a:schemeClr val="accent1"/>
-          </a:fillRef>
-          <a:effectRef idx="2">
-            <a:schemeClr val="accent1"/>
-          </a:effectRef>
-          <a:fontRef idx="minor">
-            <a:schemeClr val="lt1"/>
-          </a:fontRef>
-        </p:style>
-        <p:txBody>
-          <a:bodyPr rtlCol="0" anchor="ctr"/>
-          <a:lstStyle/>
-          <a:p>
-            <a:pPr algn="ctr"/>
-          </a:p>
-        </p:txBody>
-      </p:sp>
-      <p:sp>
-        <p:nvSpPr>
-          <p:cNvPr id="24" name="TextBox 23"/>
-          <p:cNvSpPr txBox="1"/>
-          <p:nvPr/>
-        </p:nvSpPr>
-        <p:spPr>
-          <a:xfrm>
-            <a:off x="7754111" y="3008376"/>
-            <a:ext cx="4041648" cy="731519"/>
-          </a:xfrm>
-          <a:prstGeom prst="rect">
-            <a:avLst/>
-          </a:prstGeom>
-          <a:noFill/>
-        </p:spPr>
-        <p:txBody>
-          <a:bodyPr wrap="square" anchor="t"/>
-          <a:lstStyle/>
-          <a:p>
-            <a:pPr algn="l"/>
-            <a:r>
-              <a:rPr sz="1400" b="0" i="0">
-                <a:solidFill>
-                  <a:srgbClr val="142034"/>
-                </a:solidFill>
-                <a:latin typeface="Calibri"/>
-              </a:rPr>
-              <a:t>Amplitude is the giveaway — lobes, not a line.</a:t>
-            </a:r>
-          </a:p>
-        </p:txBody>
-      </p:sp>
-      <p:sp>
-        <p:nvSpPr>
-          <p:cNvPr id="25" name="Oval 24"/>
-          <p:cNvSpPr/>
-          <p:nvPr/>
-        </p:nvSpPr>
-        <p:spPr>
-          <a:xfrm>
-            <a:off x="7498079" y="3758184"/>
-            <a:ext cx="109728" cy="109728"/>
-          </a:xfrm>
-          <a:prstGeom prst="ellipse">
-            <a:avLst/>
-          </a:prstGeom>
-          <a:solidFill>
-            <a:srgbClr val="0A7A96"/>
-          </a:solidFill>
-          <a:ln>
-            <a:noFill/>
-          </a:ln>
-        </p:spPr>
-        <p:style>
-          <a:lnRef idx="1">
-            <a:schemeClr val="accent1"/>
-          </a:lnRef>
-          <a:fillRef idx="3">
-            <a:schemeClr val="accent1"/>
-          </a:fillRef>
-          <a:effectRef idx="2">
-            <a:schemeClr val="accent1"/>
-          </a:effectRef>
-          <a:fontRef idx="minor">
-            <a:schemeClr val="lt1"/>
-          </a:fontRef>
-        </p:style>
-        <p:txBody>
-          <a:bodyPr rtlCol="0" anchor="ctr"/>
-          <a:lstStyle/>
-          <a:p>
-            <a:pPr algn="ctr"/>
-          </a:p>
-        </p:txBody>
-      </p:sp>
-      <p:sp>
-        <p:nvSpPr>
-          <p:cNvPr id="26" name="TextBox 25"/>
-          <p:cNvSpPr txBox="1"/>
-          <p:nvPr/>
-        </p:nvSpPr>
-        <p:spPr>
-          <a:xfrm>
-            <a:off x="7754111" y="3666744"/>
-            <a:ext cx="4041648" cy="731519"/>
-          </a:xfrm>
-          <a:prstGeom prst="rect">
-            <a:avLst/>
-          </a:prstGeom>
-          <a:noFill/>
-        </p:spPr>
-        <p:txBody>
-          <a:bodyPr wrap="square" anchor="t"/>
-          <a:lstStyle/>
-          <a:p>
-            <a:pPr algn="l"/>
-            <a:r>
-              <a:rPr sz="1400" b="0" i="0">
-                <a:solidFill>
-                  <a:srgbClr val="142034"/>
-                </a:solidFill>
-                <a:latin typeface="Calibri"/>
-              </a:rPr>
-              <a:t>Scan period 2–5 s, so one window may contain a single lobe.</a:t>
-            </a:r>
-          </a:p>
-        </p:txBody>
-      </p:sp>
-      <p:sp>
-        <p:nvSpPr>
-          <p:cNvPr id="27" name="Oval 26"/>
-          <p:cNvSpPr/>
-          <p:nvPr/>
-        </p:nvSpPr>
-        <p:spPr>
-          <a:xfrm>
-            <a:off x="7498079" y="4416552"/>
-            <a:ext cx="109728" cy="109728"/>
-          </a:xfrm>
-          <a:prstGeom prst="ellipse">
-            <a:avLst/>
-          </a:prstGeom>
-          <a:solidFill>
-            <a:srgbClr val="0A7A96"/>
-          </a:solidFill>
-          <a:ln>
-            <a:noFill/>
-          </a:ln>
-        </p:spPr>
-        <p:style>
-          <a:lnRef idx="1">
-            <a:schemeClr val="accent1"/>
-          </a:lnRef>
-          <a:fillRef idx="3">
-            <a:schemeClr val="accent1"/>
-          </a:fillRef>
-          <a:effectRef idx="2">
-            <a:schemeClr val="accent1"/>
-          </a:effectRef>
-          <a:fontRef idx="minor">
-            <a:schemeClr val="lt1"/>
-          </a:fontRef>
-        </p:style>
-        <p:txBody>
-          <a:bodyPr rtlCol="0" anchor="ctr"/>
-          <a:lstStyle/>
-          <a:p>
-            <a:pPr algn="ctr"/>
-          </a:p>
-        </p:txBody>
-      </p:sp>
-      <p:sp>
-        <p:nvSpPr>
-          <p:cNvPr id="28" name="TextBox 27"/>
-          <p:cNvSpPr txBox="1"/>
-          <p:nvPr/>
-        </p:nvSpPr>
-        <p:spPr>
-          <a:xfrm>
-            <a:off x="7754111" y="4325112"/>
-            <a:ext cx="4041648" cy="731519"/>
-          </a:xfrm>
-          <a:prstGeom prst="rect">
-            <a:avLst/>
-          </a:prstGeom>
-          <a:noFill/>
-        </p:spPr>
-        <p:txBody>
-          <a:bodyPr wrap="square" anchor="t"/>
-          <a:lstStyle/>
-          <a:p>
-            <a:pPr algn="l"/>
-            <a:r>
-              <a:rPr sz="1400" b="0" i="0">
-                <a:solidFill>
-                  <a:srgbClr val="142034"/>
-                </a:solidFill>
-                <a:latin typeface="Calibri"/>
-              </a:rPr>
-              <a:t>A density clusterer on RF/PW ignores the sparse class.</a:t>
-            </a:r>
-          </a:p>
-        </p:txBody>
-      </p:sp>
-      <p:sp>
-        <p:nvSpPr>
-          <p:cNvPr id="29" name="Rectangle 28"/>
+              <a:t>Right: several platforms share RF and PW bands. Timing is the remaining cue. All-pairs attention is the bet.</a:t>
+            </a:r>
+          </a:p>
+        </p:txBody>
+      </p:sp>
+      <p:sp>
+        <p:nvSpPr>
+          <p:cNvPr id="11" name="Rectangle 10"/>
           <p:cNvSpPr/>
           <p:nvPr/>
         </p:nvSpPr>
@@ -11642,7 +8537,7 @@
       </p:sp>
       <p:sp>
         <p:nvSpPr>
-          <p:cNvPr id="30" name="TextBox 29"/>
+          <p:cNvPr id="12" name="TextBox 11"/>
           <p:cNvSpPr txBox="1"/>
           <p:nvPr/>
         </p:nvSpPr>
@@ -11675,7 +8570,7 @@
       </p:sp>
       <p:sp>
         <p:nvSpPr>
-          <p:cNvPr id="31" name="TextBox 30"/>
+          <p:cNvPr id="13" name="TextBox 12"/>
           <p:cNvSpPr txBox="1"/>
           <p:nvPr/>
         </p:nvSpPr>
@@ -11701,7 +8596,7 @@
                 </a:solidFill>
                 <a:latin typeface="Calibri"/>
               </a:rPr>
-              <a:t>4 / 15</a:t>
+              <a:t>4 / 11</a:t>
             </a:r>
           </a:p>
         </p:txBody>
@@ -11818,7 +8713,7 @@
         </p:nvSpPr>
         <p:spPr>
           <a:xfrm>
-            <a:off x="502920" y="182880"/>
+            <a:off x="502920" y="201168"/>
             <a:ext cx="10972800" cy="365760"/>
           </a:xfrm>
           <a:prstGeom prst="rect">
@@ -11838,7 +8733,7 @@
                 </a:solidFill>
                 <a:latin typeface="Calibri"/>
               </a:rPr>
-              <a:t>Slow scans and lock-on floods</a:t>
+              <a:t>Shared trunk, two heads, two positive sets</a:t>
             </a:r>
           </a:p>
         </p:txBody>
@@ -11851,8 +8746,8 @@
         </p:nvSpPr>
         <p:spPr>
           <a:xfrm>
-            <a:off x="292608" y="566928"/>
-            <a:ext cx="5815584" cy="3907445"/>
+            <a:off x="292608" y="612648"/>
+            <a:ext cx="7187184" cy="3834384"/>
           </a:xfrm>
           <a:prstGeom prst="roundRect">
             <a:avLst>
@@ -11892,7 +8787,7 @@
       </p:sp>
       <p:pic>
         <p:nvPicPr>
-          <p:cNvPr id="6" name="Picture 5" descr="feat_scan.png"/>
+          <p:cNvPr id="6" name="Picture 5" descr="y_architecture.png"/>
           <p:cNvPicPr>
             <a:picLocks noChangeAspect="1"/>
           </p:cNvPicPr>
@@ -11906,8 +8801,8 @@
         </p:blipFill>
         <p:spPr>
           <a:xfrm>
-            <a:off x="365760" y="640080"/>
-            <a:ext cx="5669280" cy="3761141"/>
+            <a:off x="365760" y="685800"/>
+            <a:ext cx="7040880" cy="3688080"/>
           </a:xfrm>
           <a:prstGeom prst="rect">
             <a:avLst/>
@@ -11916,27 +8811,23 @@
       </p:pic>
       <p:sp>
         <p:nvSpPr>
-          <p:cNvPr id="7" name="Rounded Rectangle 6"/>
+          <p:cNvPr id="7" name="Oval 6"/>
           <p:cNvSpPr/>
           <p:nvPr/>
         </p:nvSpPr>
         <p:spPr>
           <a:xfrm>
-            <a:off x="6190488" y="566928"/>
-            <a:ext cx="5678424" cy="3816450"/>
-          </a:xfrm>
-          <a:prstGeom prst="roundRect">
-            <a:avLst>
-              <a:gd name="adj" fmla="val 4000"/>
-            </a:avLst>
+            <a:off x="7589520" y="868680"/>
+            <a:ext cx="109728" cy="109728"/>
+          </a:xfrm>
+          <a:prstGeom prst="ellipse">
+            <a:avLst/>
           </a:prstGeom>
           <a:solidFill>
-            <a:srgbClr val="F3F6F8"/>
+            <a:srgbClr val="0A7A96"/>
           </a:solidFill>
-          <a:ln w="12700">
-            <a:solidFill>
-              <a:srgbClr val="D2DAE2"/>
-            </a:solidFill>
+          <a:ln>
+            <a:noFill/>
           </a:ln>
         </p:spPr>
         <p:style>
@@ -11961,40 +8852,16 @@
           </a:p>
         </p:txBody>
       </p:sp>
-      <p:pic>
-        <p:nvPicPr>
-          <p:cNvPr id="8" name="Picture 7" descr="feat_imbalance.png"/>
-          <p:cNvPicPr>
-            <a:picLocks noChangeAspect="1"/>
-          </p:cNvPicPr>
-          <p:nvPr/>
-        </p:nvPicPr>
-        <p:blipFill>
-          <a:blip r:embed="rId3"/>
-          <a:stretch>
-            <a:fillRect/>
-          </a:stretch>
-        </p:blipFill>
-        <p:spPr>
-          <a:xfrm>
-            <a:off x="6263640" y="640080"/>
-            <a:ext cx="5532120" cy="3670146"/>
-          </a:xfrm>
-          <a:prstGeom prst="rect">
-            <a:avLst/>
-          </a:prstGeom>
-        </p:spPr>
-      </p:pic>
-      <p:sp>
-        <p:nvSpPr>
-          <p:cNvPr id="9" name="TextBox 8"/>
+      <p:sp>
+        <p:nvSpPr>
+          <p:cNvPr id="8" name="TextBox 7"/>
           <p:cNvSpPr txBox="1"/>
           <p:nvPr/>
         </p:nvSpPr>
         <p:spPr>
           <a:xfrm>
-            <a:off x="457200" y="5074920"/>
-            <a:ext cx="5577840" cy="1051560"/>
+            <a:off x="7845552" y="777240"/>
+            <a:ext cx="3950208" cy="786384"/>
           </a:xfrm>
           <a:prstGeom prst="rect">
             <a:avLst/>
@@ -12013,8 +8880,51 @@
                 </a:solidFill>
                 <a:latin typeface="Calibri"/>
               </a:rPr>
-              <a:t>Left: one scanning mode. Incidence drifts; amplitude follows the beam. Density methods oversplit a smear.</a:t>
-            </a:r>
+              <a:t>~16 M parameters. Width 256, 8 heads. L = 2000 in, L embeddings out.</a:t>
+            </a:r>
+          </a:p>
+        </p:txBody>
+      </p:sp>
+      <p:sp>
+        <p:nvSpPr>
+          <p:cNvPr id="9" name="Oval 8"/>
+          <p:cNvSpPr/>
+          <p:nvPr/>
+        </p:nvSpPr>
+        <p:spPr>
+          <a:xfrm>
+            <a:off x="7589520" y="1581912"/>
+            <a:ext cx="109728" cy="109728"/>
+          </a:xfrm>
+          <a:prstGeom prst="ellipse">
+            <a:avLst/>
+          </a:prstGeom>
+          <a:solidFill>
+            <a:srgbClr val="0A7A96"/>
+          </a:solidFill>
+          <a:ln>
+            <a:noFill/>
+          </a:ln>
+        </p:spPr>
+        <p:style>
+          <a:lnRef idx="1">
+            <a:schemeClr val="accent1"/>
+          </a:lnRef>
+          <a:fillRef idx="3">
+            <a:schemeClr val="accent1"/>
+          </a:fillRef>
+          <a:effectRef idx="2">
+            <a:schemeClr val="accent1"/>
+          </a:effectRef>
+          <a:fontRef idx="minor">
+            <a:schemeClr val="lt1"/>
+          </a:fontRef>
+        </p:style>
+        <p:txBody>
+          <a:bodyPr rtlCol="0" anchor="ctr"/>
+          <a:lstStyle/>
+          <a:p>
+            <a:pPr algn="ctr"/>
           </a:p>
         </p:txBody>
       </p:sp>
@@ -12026,8 +8936,8 @@
         </p:nvSpPr>
         <p:spPr>
           <a:xfrm>
-            <a:off x="6309360" y="5074920"/>
-            <a:ext cx="5486400" cy="1051560"/>
+            <a:off x="7845552" y="1490472"/>
+            <a:ext cx="3950208" cy="786384"/>
           </a:xfrm>
           <a:prstGeom prst="rect">
             <a:avLst/>
@@ -12046,14 +8956,242 @@
                 </a:solidFill>
                 <a:latin typeface="Calibri"/>
               </a:rPr>
-              <a:t>Right: 3 pulses vs 1997 in the same window. One lock-on, one long PRI or mid-scan. A 3-pulse train is a poor later mode input.</a:t>
-            </a:r>
-          </a:p>
-        </p:txBody>
-      </p:sp>
-      <p:sp>
-        <p:nvSpPr>
-          <p:cNvPr id="11" name="Rectangle 10"/>
+              <a:t>Self-attention is O(L²). That mix is deinterleaving.</a:t>
+            </a:r>
+          </a:p>
+        </p:txBody>
+      </p:sp>
+      <p:sp>
+        <p:nvSpPr>
+          <p:cNvPr id="11" name="Oval 10"/>
+          <p:cNvSpPr/>
+          <p:nvPr/>
+        </p:nvSpPr>
+        <p:spPr>
+          <a:xfrm>
+            <a:off x="7589520" y="2295144"/>
+            <a:ext cx="109728" cy="109728"/>
+          </a:xfrm>
+          <a:prstGeom prst="ellipse">
+            <a:avLst/>
+          </a:prstGeom>
+          <a:solidFill>
+            <a:srgbClr val="0A7A96"/>
+          </a:solidFill>
+          <a:ln>
+            <a:noFill/>
+          </a:ln>
+        </p:spPr>
+        <p:style>
+          <a:lnRef idx="1">
+            <a:schemeClr val="accent1"/>
+          </a:lnRef>
+          <a:fillRef idx="3">
+            <a:schemeClr val="accent1"/>
+          </a:fillRef>
+          <a:effectRef idx="2">
+            <a:schemeClr val="accent1"/>
+          </a:effectRef>
+          <a:fontRef idx="minor">
+            <a:schemeClr val="lt1"/>
+          </a:fontRef>
+        </p:style>
+        <p:txBody>
+          <a:bodyPr rtlCol="0" anchor="ctr"/>
+          <a:lstStyle/>
+          <a:p>
+            <a:pPr algn="ctr"/>
+          </a:p>
+        </p:txBody>
+      </p:sp>
+      <p:sp>
+        <p:nvSpPr>
+          <p:cNvPr id="12" name="TextBox 11"/>
+          <p:cNvSpPr txBox="1"/>
+          <p:nvPr/>
+        </p:nvSpPr>
+        <p:spPr>
+          <a:xfrm>
+            <a:off x="7845552" y="2203704"/>
+            <a:ext cx="3950208" cy="786384"/>
+          </a:xfrm>
+          <a:prstGeom prst="rect">
+            <a:avLst/>
+          </a:prstGeom>
+          <a:noFill/>
+        </p:spPr>
+        <p:txBody>
+          <a:bodyPr wrap="square" anchor="t"/>
+          <a:lstStyle/>
+          <a:p>
+            <a:pPr algn="l"/>
+            <a:r>
+              <a:rPr sz="1300" b="0" i="0">
+                <a:solidFill>
+                  <a:srgbClr val="142034"/>
+                </a:solidFill>
+                <a:latin typeface="Calibri"/>
+              </a:rPr>
+              <a:t>LSTM / Mamba are O(L), but pairwise “same train?” is a comparison, not a state. Not compared.</a:t>
+            </a:r>
+          </a:p>
+        </p:txBody>
+      </p:sp>
+      <p:sp>
+        <p:nvSpPr>
+          <p:cNvPr id="13" name="Oval 12"/>
+          <p:cNvSpPr/>
+          <p:nvPr/>
+        </p:nvSpPr>
+        <p:spPr>
+          <a:xfrm>
+            <a:off x="7589520" y="3008376"/>
+            <a:ext cx="109728" cy="109728"/>
+          </a:xfrm>
+          <a:prstGeom prst="ellipse">
+            <a:avLst/>
+          </a:prstGeom>
+          <a:solidFill>
+            <a:srgbClr val="0A7A96"/>
+          </a:solidFill>
+          <a:ln>
+            <a:noFill/>
+          </a:ln>
+        </p:spPr>
+        <p:style>
+          <a:lnRef idx="1">
+            <a:schemeClr val="accent1"/>
+          </a:lnRef>
+          <a:fillRef idx="3">
+            <a:schemeClr val="accent1"/>
+          </a:fillRef>
+          <a:effectRef idx="2">
+            <a:schemeClr val="accent1"/>
+          </a:effectRef>
+          <a:fontRef idx="minor">
+            <a:schemeClr val="lt1"/>
+          </a:fontRef>
+        </p:style>
+        <p:txBody>
+          <a:bodyPr rtlCol="0" anchor="ctr"/>
+          <a:lstStyle/>
+          <a:p>
+            <a:pPr algn="ctr"/>
+          </a:p>
+        </p:txBody>
+      </p:sp>
+      <p:sp>
+        <p:nvSpPr>
+          <p:cNvPr id="14" name="TextBox 13"/>
+          <p:cNvSpPr txBox="1"/>
+          <p:nvPr/>
+        </p:nvSpPr>
+        <p:spPr>
+          <a:xfrm>
+            <a:off x="7845552" y="2916936"/>
+            <a:ext cx="3950208" cy="786384"/>
+          </a:xfrm>
+          <a:prstGeom prst="rect">
+            <a:avLst/>
+          </a:prstGeom>
+          <a:noFill/>
+        </p:spPr>
+        <p:txBody>
+          <a:bodyPr wrap="square" anchor="t"/>
+          <a:lstStyle/>
+          <a:p>
+            <a:pPr algn="l"/>
+            <a:r>
+              <a:rPr sz="1300" b="0" i="0">
+                <a:solidFill>
+                  <a:srgbClr val="142034"/>
+                </a:solidFill>
+                <a:latin typeface="Calibri"/>
+              </a:rPr>
+              <a:t>Emitter loss: same recording-local ID. Mode loss: same global catalogue label.</a:t>
+            </a:r>
+          </a:p>
+        </p:txBody>
+      </p:sp>
+      <p:sp>
+        <p:nvSpPr>
+          <p:cNvPr id="15" name="Oval 14"/>
+          <p:cNvSpPr/>
+          <p:nvPr/>
+        </p:nvSpPr>
+        <p:spPr>
+          <a:xfrm>
+            <a:off x="7589520" y="3721608"/>
+            <a:ext cx="109728" cy="109728"/>
+          </a:xfrm>
+          <a:prstGeom prst="ellipse">
+            <a:avLst/>
+          </a:prstGeom>
+          <a:solidFill>
+            <a:srgbClr val="0A7A96"/>
+          </a:solidFill>
+          <a:ln>
+            <a:noFill/>
+          </a:ln>
+        </p:spPr>
+        <p:style>
+          <a:lnRef idx="1">
+            <a:schemeClr val="accent1"/>
+          </a:lnRef>
+          <a:fillRef idx="3">
+            <a:schemeClr val="accent1"/>
+          </a:fillRef>
+          <a:effectRef idx="2">
+            <a:schemeClr val="accent1"/>
+          </a:effectRef>
+          <a:fontRef idx="minor">
+            <a:schemeClr val="lt1"/>
+          </a:fontRef>
+        </p:style>
+        <p:txBody>
+          <a:bodyPr rtlCol="0" anchor="ctr"/>
+          <a:lstStyle/>
+          <a:p>
+            <a:pPr algn="ctr"/>
+          </a:p>
+        </p:txBody>
+      </p:sp>
+      <p:sp>
+        <p:nvSpPr>
+          <p:cNvPr id="16" name="TextBox 15"/>
+          <p:cNvSpPr txBox="1"/>
+          <p:nvPr/>
+        </p:nvSpPr>
+        <p:spPr>
+          <a:xfrm>
+            <a:off x="7845552" y="3630168"/>
+            <a:ext cx="3950208" cy="786384"/>
+          </a:xfrm>
+          <a:prstGeom prst="rect">
+            <a:avLst/>
+          </a:prstGeom>
+          <a:noFill/>
+        </p:spPr>
+        <p:txBody>
+          <a:bodyPr wrap="square" anchor="t"/>
+          <a:lstStyle/>
+          <a:p>
+            <a:pPr algn="l"/>
+            <a:r>
+              <a:rPr sz="1300" b="0" i="0">
+                <a:solidFill>
+                  <a:srgbClr val="142034"/>
+                </a:solidFill>
+                <a:latin typeface="Calibri"/>
+              </a:rPr>
+              <a:t>Joint training is the unweighted sum. DBSCAN at inference, not in the loss.</a:t>
+            </a:r>
+          </a:p>
+        </p:txBody>
+      </p:sp>
+      <p:sp>
+        <p:nvSpPr>
+          <p:cNvPr id="17" name="Rectangle 16"/>
           <p:cNvSpPr/>
           <p:nvPr/>
         </p:nvSpPr>
@@ -12098,7 +9236,7 @@
       </p:sp>
       <p:sp>
         <p:nvSpPr>
-          <p:cNvPr id="12" name="TextBox 11"/>
+          <p:cNvPr id="18" name="TextBox 17"/>
           <p:cNvSpPr txBox="1"/>
           <p:nvPr/>
         </p:nvSpPr>
@@ -12131,7 +9269,7 @@
       </p:sp>
       <p:sp>
         <p:nvSpPr>
-          <p:cNvPr id="13" name="TextBox 12"/>
+          <p:cNvPr id="19" name="TextBox 18"/>
           <p:cNvSpPr txBox="1"/>
           <p:nvPr/>
         </p:nvSpPr>
@@ -12157,7 +9295,7 @@
                 </a:solidFill>
                 <a:latin typeface="Calibri"/>
               </a:rPr>
-              <a:t>5 / 15</a:t>
+              <a:t>5 / 11</a:t>
             </a:r>
           </a:p>
         </p:txBody>
@@ -12294,7 +9432,7 @@
                 </a:solidFill>
                 <a:latin typeface="Calibri"/>
               </a:rPr>
-              <a:t>Crowded mixtures: RF and PW are not unique IDs</a:t>
+              <a:t>Two ways to put physics into attention</a:t>
             </a:r>
           </a:p>
         </p:txBody>
@@ -12307,12 +9445,12 @@
         </p:nvSpPr>
         <p:spPr>
           <a:xfrm>
-            <a:off x="338328" y="612648"/>
-            <a:ext cx="7004304" cy="4696072"/>
+            <a:off x="502920" y="822960"/>
+            <a:ext cx="5486400" cy="5212080"/>
           </a:xfrm>
           <a:prstGeom prst="roundRect">
             <a:avLst>
-              <a:gd name="adj" fmla="val 4000"/>
+              <a:gd name="adj" fmla="val 8000"/>
             </a:avLst>
           </a:prstGeom>
           <a:solidFill>
@@ -12346,30 +9484,39 @@
           </a:p>
         </p:txBody>
       </p:sp>
-      <p:pic>
-        <p:nvPicPr>
-          <p:cNvPr id="6" name="Picture 5" descr="feat_maxemitters.png"/>
-          <p:cNvPicPr>
-            <a:picLocks noChangeAspect="1"/>
-          </p:cNvPicPr>
-          <p:nvPr/>
-        </p:nvPicPr>
-        <p:blipFill>
-          <a:blip r:embed="rId2"/>
-          <a:stretch>
-            <a:fillRect/>
-          </a:stretch>
-        </p:blipFill>
-        <p:spPr>
-          <a:xfrm>
-            <a:off x="411480" y="685800"/>
-            <a:ext cx="6858000" cy="4549768"/>
-          </a:xfrm>
-          <a:prstGeom prst="rect">
-            <a:avLst/>
-          </a:prstGeom>
-        </p:spPr>
-      </p:pic>
+      <p:sp>
+        <p:nvSpPr>
+          <p:cNvPr id="6" name="TextBox 5"/>
+          <p:cNvSpPr txBox="1"/>
+          <p:nvPr/>
+        </p:nvSpPr>
+        <p:spPr>
+          <a:xfrm>
+            <a:off x="731520" y="1005840"/>
+            <a:ext cx="5029200" cy="365760"/>
+          </a:xfrm>
+          <a:prstGeom prst="rect">
+            <a:avLst/>
+          </a:prstGeom>
+          <a:noFill/>
+        </p:spPr>
+        <p:txBody>
+          <a:bodyPr wrap="square" anchor="t"/>
+          <a:lstStyle/>
+          <a:p>
+            <a:pPr algn="l"/>
+            <a:r>
+              <a:rPr sz="2000" b="1" i="0">
+                <a:solidFill>
+                  <a:srgbClr val="0A7A96"/>
+                </a:solidFill>
+                <a:latin typeface="Calibri"/>
+              </a:rPr>
+              <a:t>RoPE-TOA</a:t>
+            </a:r>
+          </a:p>
+        </p:txBody>
+      </p:sp>
       <p:sp>
         <p:nvSpPr>
           <p:cNvPr id="7" name="Oval 6"/>
@@ -12378,7 +9525,7 @@
         </p:nvSpPr>
         <p:spPr>
           <a:xfrm>
-            <a:off x="7498079" y="1005840"/>
+            <a:off x="731520" y="1600200"/>
             <a:ext cx="109728" cy="109728"/>
           </a:xfrm>
           <a:prstGeom prst="ellipse">
@@ -12421,8 +9568,8 @@
         </p:nvSpPr>
         <p:spPr>
           <a:xfrm>
-            <a:off x="7754111" y="914400"/>
-            <a:ext cx="4041648" cy="786384"/>
+            <a:off x="987552" y="1508760"/>
+            <a:ext cx="4773168" cy="731519"/>
           </a:xfrm>
           <a:prstGeom prst="rect">
             <a:avLst/>
@@ -12435,13 +9582,13 @@
           <a:p>
             <a:pPr algn="l"/>
             <a:r>
-              <a:rPr sz="1400" b="0" i="0">
+              <a:rPr sz="1500" b="0" i="0">
                 <a:solidFill>
                   <a:srgbClr val="142034"/>
                 </a:solidFill>
                 <a:latin typeface="Calibri"/>
               </a:rPr>
-              <a:t>Several platforms share frequency and pulse-width bands.</a:t>
+              <a:t>Rotate Q and K by window-local ToA.</a:t>
             </a:r>
           </a:p>
         </p:txBody>
@@ -12454,7 +9601,7 @@
         </p:nvSpPr>
         <p:spPr>
           <a:xfrm>
-            <a:off x="7498079" y="1719072"/>
+            <a:off x="731520" y="2258568"/>
             <a:ext cx="109728" cy="109728"/>
           </a:xfrm>
           <a:prstGeom prst="ellipse">
@@ -12497,8 +9644,8 @@
         </p:nvSpPr>
         <p:spPr>
           <a:xfrm>
-            <a:off x="7754111" y="1627632"/>
-            <a:ext cx="4041648" cy="786384"/>
+            <a:off x="987552" y="2167128"/>
+            <a:ext cx="4773168" cy="731519"/>
           </a:xfrm>
           <a:prstGeom prst="rect">
             <a:avLst/>
@@ -12511,13 +9658,13 @@
           <a:p>
             <a:pPr algn="l"/>
             <a:r>
-              <a:rPr sz="1400" b="0" i="0">
+              <a:rPr sz="1500" b="0" i="0">
                 <a:solidFill>
                   <a:srgbClr val="142034"/>
                 </a:solidFill>
                 <a:latin typeface="Calibri"/>
               </a:rPr>
-              <a:t>Lock-on (flat) sits next to scan (curves).</a:t>
+              <a:t>The score is a dot product, so the enclosed angle matters.</a:t>
             </a:r>
           </a:p>
         </p:txBody>
@@ -12530,7 +9677,7 @@
         </p:nvSpPr>
         <p:spPr>
           <a:xfrm>
-            <a:off x="7498079" y="2432304"/>
+            <a:off x="731520" y="2916936"/>
             <a:ext cx="109728" cy="109728"/>
           </a:xfrm>
           <a:prstGeom prst="ellipse">
@@ -12573,8 +9720,8 @@
         </p:nvSpPr>
         <p:spPr>
           <a:xfrm>
-            <a:off x="7754111" y="2340864"/>
-            <a:ext cx="4041648" cy="786384"/>
+            <a:off x="987552" y="2825496"/>
+            <a:ext cx="4773168" cy="731519"/>
           </a:xfrm>
           <a:prstGeom prst="rect">
             <a:avLst/>
@@ -12587,13 +9734,13 @@
           <a:p>
             <a:pPr algn="l"/>
             <a:r>
-              <a:rPr sz="1400" b="0" i="0">
+              <a:rPr sz="1500" b="0" i="0">
                 <a:solidFill>
                   <a:srgbClr val="142034"/>
                 </a:solidFill>
                 <a:latin typeface="Calibri"/>
               </a:rPr>
-              <a:t>Timing structure is the remaining cue.</a:t>
+              <a:t>Only the relative rotation R(Δt) enters the product.</a:t>
             </a:r>
           </a:p>
         </p:txBody>
@@ -12606,7 +9753,7 @@
         </p:nvSpPr>
         <p:spPr>
           <a:xfrm>
-            <a:off x="7498079" y="3145536"/>
+            <a:off x="731520" y="3575304"/>
             <a:ext cx="109728" cy="109728"/>
           </a:xfrm>
           <a:prstGeom prst="ellipse">
@@ -12649,8 +9796,8 @@
         </p:nvSpPr>
         <p:spPr>
           <a:xfrm>
-            <a:off x="7754111" y="3054096"/>
-            <a:ext cx="4041648" cy="786384"/>
+            <a:off x="987552" y="3483864"/>
+            <a:ext cx="4773168" cy="731519"/>
           </a:xfrm>
           <a:prstGeom prst="rect">
             <a:avLst/>
@@ -12663,26 +9810,106 @@
           <a:p>
             <a:pPr algn="l"/>
             <a:r>
-              <a:rPr sz="1400" b="0" i="0">
+              <a:rPr sz="1500" b="0" i="0">
                 <a:solidFill>
                   <a:srgbClr val="142034"/>
                 </a:solidFill>
                 <a:latin typeface="Calibri"/>
               </a:rPr>
-              <a:t>This is the Vanilla emitter tail: about one window in ten.</a:t>
-            </a:r>
-          </a:p>
-        </p:txBody>
-      </p:sp>
-      <p:sp>
-        <p:nvSpPr>
-          <p:cNvPr id="15" name="Oval 14"/>
+              <a:t>No extra weights. Encoder ~2.5 ms.</a:t>
+            </a:r>
+          </a:p>
+        </p:txBody>
+      </p:sp>
+      <p:sp>
+        <p:nvSpPr>
+          <p:cNvPr id="15" name="Rounded Rectangle 14"/>
           <p:cNvSpPr/>
           <p:nvPr/>
         </p:nvSpPr>
         <p:spPr>
           <a:xfrm>
-            <a:off x="7498079" y="3858768"/>
+            <a:off x="6217920" y="822960"/>
+            <a:ext cx="5486400" cy="5212080"/>
+          </a:xfrm>
+          <a:prstGeom prst="roundRect">
+            <a:avLst>
+              <a:gd name="adj" fmla="val 8000"/>
+            </a:avLst>
+          </a:prstGeom>
+          <a:solidFill>
+            <a:srgbClr val="F3F6F8"/>
+          </a:solidFill>
+          <a:ln w="12700">
+            <a:solidFill>
+              <a:srgbClr val="D2DAE2"/>
+            </a:solidFill>
+          </a:ln>
+        </p:spPr>
+        <p:style>
+          <a:lnRef idx="1">
+            <a:schemeClr val="accent1"/>
+          </a:lnRef>
+          <a:fillRef idx="3">
+            <a:schemeClr val="accent1"/>
+          </a:fillRef>
+          <a:effectRef idx="2">
+            <a:schemeClr val="accent1"/>
+          </a:effectRef>
+          <a:fontRef idx="minor">
+            <a:schemeClr val="lt1"/>
+          </a:fontRef>
+        </p:style>
+        <p:txBody>
+          <a:bodyPr rtlCol="0" anchor="ctr"/>
+          <a:lstStyle/>
+          <a:p>
+            <a:pPr algn="ctr"/>
+          </a:p>
+        </p:txBody>
+      </p:sp>
+      <p:sp>
+        <p:nvSpPr>
+          <p:cNvPr id="16" name="TextBox 15"/>
+          <p:cNvSpPr txBox="1"/>
+          <p:nvPr/>
+        </p:nvSpPr>
+        <p:spPr>
+          <a:xfrm>
+            <a:off x="6446520" y="1005840"/>
+            <a:ext cx="5029200" cy="365760"/>
+          </a:xfrm>
+          <a:prstGeom prst="rect">
+            <a:avLst/>
+          </a:prstGeom>
+          <a:noFill/>
+        </p:spPr>
+        <p:txBody>
+          <a:bodyPr wrap="square" anchor="t"/>
+          <a:lstStyle/>
+          <a:p>
+            <a:pPr algn="l"/>
+            <a:r>
+              <a:rPr sz="2000" b="1" i="0">
+                <a:solidFill>
+                  <a:srgbClr val="C45A20"/>
+                </a:solidFill>
+                <a:latin typeface="Calibri"/>
+              </a:rPr>
+              <a:t>Physical bias</a:t>
+            </a:r>
+          </a:p>
+        </p:txBody>
+      </p:sp>
+      <p:sp>
+        <p:nvSpPr>
+          <p:cNvPr id="17" name="Oval 16"/>
+          <p:cNvSpPr/>
+          <p:nvPr/>
+        </p:nvSpPr>
+        <p:spPr>
+          <a:xfrm>
+            <a:off x="6446520" y="1600200"/>
             <a:ext cx="109728" cy="109728"/>
           </a:xfrm>
           <a:prstGeom prst="ellipse">
@@ -12719,14 +9946,14 @@
       </p:sp>
       <p:sp>
         <p:nvSpPr>
-          <p:cNvPr id="16" name="TextBox 15"/>
+          <p:cNvPr id="18" name="TextBox 17"/>
           <p:cNvSpPr txBox="1"/>
           <p:nvPr/>
         </p:nvSpPr>
         <p:spPr>
           <a:xfrm>
-            <a:off x="7754111" y="3767328"/>
-            <a:ext cx="4041648" cy="786384"/>
+            <a:off x="6702552" y="1508760"/>
+            <a:ext cx="4773168" cy="731519"/>
           </a:xfrm>
           <a:prstGeom prst="rect">
             <a:avLst/>
@@ -12739,20 +9966,248 @@
           <a:p>
             <a:pPr algn="l"/>
             <a:r>
-              <a:rPr sz="1400" b="0" i="0">
+              <a:rPr sz="1500" b="0" i="0">
                 <a:solidFill>
                   <a:srgbClr val="142034"/>
                 </a:solidFill>
                 <a:latin typeface="Calibri"/>
               </a:rPr>
-              <a:t>All-pairs attention is the bet: sparse trains have to find each other across a flood.</a:t>
-            </a:r>
-          </a:p>
-        </p:txBody>
-      </p:sp>
-      <p:sp>
-        <p:nvSpPr>
-          <p:cNvPr id="17" name="Rectangle 16"/>
+              <a:t>Build B_ij = |p_i − p_j| from ToA and incidence.</a:t>
+            </a:r>
+          </a:p>
+        </p:txBody>
+      </p:sp>
+      <p:sp>
+        <p:nvSpPr>
+          <p:cNvPr id="19" name="Oval 18"/>
+          <p:cNvSpPr/>
+          <p:nvPr/>
+        </p:nvSpPr>
+        <p:spPr>
+          <a:xfrm>
+            <a:off x="6446520" y="2258568"/>
+            <a:ext cx="109728" cy="109728"/>
+          </a:xfrm>
+          <a:prstGeom prst="ellipse">
+            <a:avLst/>
+          </a:prstGeom>
+          <a:solidFill>
+            <a:srgbClr val="0A7A96"/>
+          </a:solidFill>
+          <a:ln>
+            <a:noFill/>
+          </a:ln>
+        </p:spPr>
+        <p:style>
+          <a:lnRef idx="1">
+            <a:schemeClr val="accent1"/>
+          </a:lnRef>
+          <a:fillRef idx="3">
+            <a:schemeClr val="accent1"/>
+          </a:fillRef>
+          <a:effectRef idx="2">
+            <a:schemeClr val="accent1"/>
+          </a:effectRef>
+          <a:fontRef idx="minor">
+            <a:schemeClr val="lt1"/>
+          </a:fontRef>
+        </p:style>
+        <p:txBody>
+          <a:bodyPr rtlCol="0" anchor="ctr"/>
+          <a:lstStyle/>
+          <a:p>
+            <a:pPr algn="ctr"/>
+          </a:p>
+        </p:txBody>
+      </p:sp>
+      <p:sp>
+        <p:nvSpPr>
+          <p:cNvPr id="20" name="TextBox 19"/>
+          <p:cNvSpPr txBox="1"/>
+          <p:nvPr/>
+        </p:nvSpPr>
+        <p:spPr>
+          <a:xfrm>
+            <a:off x="6702552" y="2167128"/>
+            <a:ext cx="4773168" cy="731519"/>
+          </a:xfrm>
+          <a:prstGeom prst="rect">
+            <a:avLst/>
+          </a:prstGeom>
+          <a:noFill/>
+        </p:spPr>
+        <p:txBody>
+          <a:bodyPr wrap="square" anchor="t"/>
+          <a:lstStyle/>
+          <a:p>
+            <a:pPr algn="l"/>
+            <a:r>
+              <a:rPr sz="1500" b="0" i="0">
+                <a:solidFill>
+                  <a:srgbClr val="142034"/>
+                </a:solidFill>
+                <a:latin typeface="Calibri"/>
+              </a:rPr>
+              <a:t>Scale by learned λ, subtract from the attention matrix A.</a:t>
+            </a:r>
+          </a:p>
+        </p:txBody>
+      </p:sp>
+      <p:sp>
+        <p:nvSpPr>
+          <p:cNvPr id="21" name="Oval 20"/>
+          <p:cNvSpPr/>
+          <p:nvPr/>
+        </p:nvSpPr>
+        <p:spPr>
+          <a:xfrm>
+            <a:off x="6446520" y="2916936"/>
+            <a:ext cx="109728" cy="109728"/>
+          </a:xfrm>
+          <a:prstGeom prst="ellipse">
+            <a:avLst/>
+          </a:prstGeom>
+          <a:solidFill>
+            <a:srgbClr val="0A7A96"/>
+          </a:solidFill>
+          <a:ln>
+            <a:noFill/>
+          </a:ln>
+        </p:spPr>
+        <p:style>
+          <a:lnRef idx="1">
+            <a:schemeClr val="accent1"/>
+          </a:lnRef>
+          <a:fillRef idx="3">
+            <a:schemeClr val="accent1"/>
+          </a:fillRef>
+          <a:effectRef idx="2">
+            <a:schemeClr val="accent1"/>
+          </a:effectRef>
+          <a:fontRef idx="minor">
+            <a:schemeClr val="lt1"/>
+          </a:fontRef>
+        </p:style>
+        <p:txBody>
+          <a:bodyPr rtlCol="0" anchor="ctr"/>
+          <a:lstStyle/>
+          <a:p>
+            <a:pPr algn="ctr"/>
+          </a:p>
+        </p:txBody>
+      </p:sp>
+      <p:sp>
+        <p:nvSpPr>
+          <p:cNvPr id="22" name="TextBox 21"/>
+          <p:cNvSpPr txBox="1"/>
+          <p:nvPr/>
+        </p:nvSpPr>
+        <p:spPr>
+          <a:xfrm>
+            <a:off x="6702552" y="2825496"/>
+            <a:ext cx="4773168" cy="731519"/>
+          </a:xfrm>
+          <a:prstGeom prst="rect">
+            <a:avLst/>
+          </a:prstGeom>
+          <a:noFill/>
+        </p:spPr>
+        <p:txBody>
+          <a:bodyPr wrap="square" anchor="t"/>
+          <a:lstStyle/>
+          <a:p>
+            <a:pPr algn="l"/>
+            <a:r>
+              <a:rPr sz="1500" b="0" i="0">
+                <a:solidFill>
+                  <a:srgbClr val="142034"/>
+                </a:solidFill>
+                <a:latin typeface="Calibri"/>
+              </a:rPr>
+              <a:t>Same emitter scores as RoPE-TOA.</a:t>
+            </a:r>
+          </a:p>
+        </p:txBody>
+      </p:sp>
+      <p:sp>
+        <p:nvSpPr>
+          <p:cNvPr id="23" name="Oval 22"/>
+          <p:cNvSpPr/>
+          <p:nvPr/>
+        </p:nvSpPr>
+        <p:spPr>
+          <a:xfrm>
+            <a:off x="6446520" y="3575304"/>
+            <a:ext cx="109728" cy="109728"/>
+          </a:xfrm>
+          <a:prstGeom prst="ellipse">
+            <a:avLst/>
+          </a:prstGeom>
+          <a:solidFill>
+            <a:srgbClr val="0A7A96"/>
+          </a:solidFill>
+          <a:ln>
+            <a:noFill/>
+          </a:ln>
+        </p:spPr>
+        <p:style>
+          <a:lnRef idx="1">
+            <a:schemeClr val="accent1"/>
+          </a:lnRef>
+          <a:fillRef idx="3">
+            <a:schemeClr val="accent1"/>
+          </a:fillRef>
+          <a:effectRef idx="2">
+            <a:schemeClr val="accent1"/>
+          </a:effectRef>
+          <a:fontRef idx="minor">
+            <a:schemeClr val="lt1"/>
+          </a:fontRef>
+        </p:style>
+        <p:txBody>
+          <a:bodyPr rtlCol="0" anchor="ctr"/>
+          <a:lstStyle/>
+          <a:p>
+            <a:pPr algn="ctr"/>
+          </a:p>
+        </p:txBody>
+      </p:sp>
+      <p:sp>
+        <p:nvSpPr>
+          <p:cNvPr id="24" name="TextBox 23"/>
+          <p:cNvSpPr txBox="1"/>
+          <p:nvPr/>
+        </p:nvSpPr>
+        <p:spPr>
+          <a:xfrm>
+            <a:off x="6702552" y="3483864"/>
+            <a:ext cx="4773168" cy="731519"/>
+          </a:xfrm>
+          <a:prstGeom prst="rect">
+            <a:avLst/>
+          </a:prstGeom>
+          <a:noFill/>
+        </p:spPr>
+        <p:txBody>
+          <a:bodyPr wrap="square" anchor="t"/>
+          <a:lstStyle/>
+          <a:p>
+            <a:pPr algn="l"/>
+            <a:r>
+              <a:rPr sz="1500" b="0" i="0">
+                <a:solidFill>
+                  <a:srgbClr val="142034"/>
+                </a:solidFill>
+                <a:latin typeface="Calibri"/>
+              </a:rPr>
+              <a:t>Encoder ~32 ms. Extra L×L maps in every head.</a:t>
+            </a:r>
+          </a:p>
+        </p:txBody>
+      </p:sp>
+      <p:sp>
+        <p:nvSpPr>
+          <p:cNvPr id="25" name="Rectangle 24"/>
           <p:cNvSpPr/>
           <p:nvPr/>
         </p:nvSpPr>
@@ -12797,7 +10252,7 @@
       </p:sp>
       <p:sp>
         <p:nvSpPr>
-          <p:cNvPr id="18" name="TextBox 17"/>
+          <p:cNvPr id="26" name="TextBox 25"/>
           <p:cNvSpPr txBox="1"/>
           <p:nvPr/>
         </p:nvSpPr>
@@ -12830,7 +10285,7 @@
       </p:sp>
       <p:sp>
         <p:nvSpPr>
-          <p:cNvPr id="19" name="TextBox 18"/>
+          <p:cNvPr id="27" name="TextBox 26"/>
           <p:cNvSpPr txBox="1"/>
           <p:nvPr/>
         </p:nvSpPr>
@@ -12856,7 +10311,7 @@
                 </a:solidFill>
                 <a:latin typeface="Calibri"/>
               </a:rPr>
-              <a:t>6 / 15</a:t>
+              <a:t>6 / 11</a:t>
             </a:r>
           </a:p>
         </p:txBody>
@@ -12973,8 +10428,8 @@
         </p:nvSpPr>
         <p:spPr>
           <a:xfrm>
-            <a:off x="502920" y="201168"/>
-            <a:ext cx="10972800" cy="365760"/>
+            <a:off x="502920" y="164592"/>
+            <a:ext cx="10972800" cy="320040"/>
           </a:xfrm>
           <a:prstGeom prst="rect">
             <a:avLst/>
@@ -12987,82 +10442,44 @@
           <a:p>
             <a:pPr algn="l"/>
             <a:r>
-              <a:rPr sz="2400" b="1" i="0">
+              <a:rPr sz="2200" b="1" i="0">
                 <a:solidFill>
                   <a:srgbClr val="142034"/>
                 </a:solidFill>
                 <a:latin typeface="Calibri"/>
               </a:rPr>
-              <a:t>L pulses in, L embeddings out</a:t>
-            </a:r>
-          </a:p>
-        </p:txBody>
-      </p:sp>
-      <p:sp>
-        <p:nvSpPr>
-          <p:cNvPr id="5" name="Rounded Rectangle 4"/>
-          <p:cNvSpPr/>
-          <p:nvPr/>
-        </p:nvSpPr>
-        <p:spPr>
-          <a:xfrm>
-            <a:off x="292608" y="612648"/>
-            <a:ext cx="6272784" cy="3040889"/>
-          </a:xfrm>
-          <a:prstGeom prst="roundRect">
-            <a:avLst>
-              <a:gd name="adj" fmla="val 4000"/>
-            </a:avLst>
-          </a:prstGeom>
-          <a:solidFill>
-            <a:srgbClr val="F3F6F8"/>
-          </a:solidFill>
-          <a:ln w="12700">
-            <a:solidFill>
-              <a:srgbClr val="D2DAE2"/>
-            </a:solidFill>
-          </a:ln>
-        </p:spPr>
-        <p:style>
-          <a:lnRef idx="1">
-            <a:schemeClr val="accent1"/>
-          </a:lnRef>
-          <a:fillRef idx="3">
-            <a:schemeClr val="accent1"/>
-          </a:fillRef>
-          <a:effectRef idx="2">
-            <a:schemeClr val="accent1"/>
-          </a:effectRef>
-          <a:fontRef idx="minor">
-            <a:schemeClr val="lt1"/>
-          </a:fontRef>
-        </p:style>
-        <p:txBody>
-          <a:bodyPr rtlCol="0" anchor="ctr"/>
-          <a:lstStyle/>
-          <a:p>
-            <a:pPr algn="ctr"/>
+              <a:t>RoPE-TOA  ·  the score is the rotated dot product</a:t>
+            </a:r>
           </a:p>
         </p:txBody>
       </p:sp>
       <p:pic>
         <p:nvPicPr>
-          <p:cNvPr id="6" name="Picture 5" descr="complexity.png"/>
+          <p:cNvPr id="5" name="RoPEToA.mp4">
+            <a:hlinkClick r:id="" action="ppaction://media"/>
+          </p:cNvPr>
           <p:cNvPicPr>
             <a:picLocks noChangeAspect="1"/>
           </p:cNvPicPr>
-          <p:nvPr/>
+          <p:nvPr>
+            <a:videoFile r:link="rId3"/>
+            <p:extLst>
+              <p:ext uri="{DAA4B4D4-6D71-4841-9C94-3DE7FCFB9230}">
+                <p14:media xmlns:p14="http://schemas.microsoft.com/office/powerpoint/2010/main" r:embed="rId2"/>
+              </p:ext>
+            </p:extLst>
+          </p:nvPr>
         </p:nvPicPr>
         <p:blipFill>
-          <a:blip r:embed="rId2"/>
+          <a:blip r:embed="rId4"/>
           <a:stretch>
             <a:fillRect/>
           </a:stretch>
         </p:blipFill>
         <p:spPr>
           <a:xfrm>
-            <a:off x="365760" y="685800"/>
-            <a:ext cx="6126480" cy="2894585"/>
+            <a:off x="411480" y="530352"/>
+            <a:ext cx="7955279" cy="4480560"/>
           </a:xfrm>
           <a:prstGeom prst="rect">
             <a:avLst/>
@@ -13071,13 +10488,13 @@
       </p:pic>
       <p:sp>
         <p:nvSpPr>
-          <p:cNvPr id="7" name="Oval 6"/>
+          <p:cNvPr id="6" name="Oval 5"/>
           <p:cNvSpPr/>
           <p:nvPr/>
         </p:nvSpPr>
         <p:spPr>
           <a:xfrm>
-            <a:off x="6766560" y="914400"/>
+            <a:off x="8549640" y="777240"/>
             <a:ext cx="109728" cy="109728"/>
           </a:xfrm>
           <a:prstGeom prst="ellipse">
@@ -13114,14 +10531,14 @@
       </p:sp>
       <p:sp>
         <p:nvSpPr>
-          <p:cNvPr id="8" name="TextBox 7"/>
+          <p:cNvPr id="7" name="TextBox 6"/>
           <p:cNvSpPr txBox="1"/>
           <p:nvPr/>
         </p:nvSpPr>
         <p:spPr>
           <a:xfrm>
-            <a:off x="7022592" y="822960"/>
-            <a:ext cx="4773168" cy="694944"/>
+            <a:off x="8805672" y="685800"/>
+            <a:ext cx="3035808" cy="694944"/>
           </a:xfrm>
           <a:prstGeom prst="rect">
             <a:avLst/>
@@ -13134,26 +10551,26 @@
           <a:p>
             <a:pPr algn="l"/>
             <a:r>
-              <a:rPr sz="1400" b="0" i="0">
+              <a:rPr sz="1300" b="0" i="0">
                 <a:solidFill>
                   <a:srgbClr val="142034"/>
                 </a:solidFill>
                 <a:latin typeface="Calibri"/>
               </a:rPr>
-              <a:t>Self-attention: every pulse scores every other pulse. That mix is deinterleaving.</a:t>
-            </a:r>
-          </a:p>
-        </p:txBody>
-      </p:sp>
-      <p:sp>
-        <p:nvSpPr>
-          <p:cNvPr id="9" name="Oval 8"/>
+              <a:t>q · k = cos φ.</a:t>
+            </a:r>
+          </a:p>
+        </p:txBody>
+      </p:sp>
+      <p:sp>
+        <p:nvSpPr>
+          <p:cNvPr id="8" name="Oval 7"/>
           <p:cNvSpPr/>
           <p:nvPr/>
         </p:nvSpPr>
         <p:spPr>
           <a:xfrm>
-            <a:off x="6766560" y="1536192"/>
+            <a:off x="8549640" y="1399032"/>
             <a:ext cx="109728" cy="109728"/>
           </a:xfrm>
           <a:prstGeom prst="ellipse">
@@ -13190,14 +10607,14 @@
       </p:sp>
       <p:sp>
         <p:nvSpPr>
-          <p:cNvPr id="10" name="TextBox 9"/>
+          <p:cNvPr id="9" name="TextBox 8"/>
           <p:cNvSpPr txBox="1"/>
           <p:nvPr/>
         </p:nvSpPr>
         <p:spPr>
           <a:xfrm>
-            <a:off x="7022592" y="1444752"/>
-            <a:ext cx="4773168" cy="694944"/>
+            <a:off x="8805672" y="1307592"/>
+            <a:ext cx="3035808" cy="694944"/>
           </a:xfrm>
           <a:prstGeom prst="rect">
             <a:avLst/>
@@ -13210,26 +10627,26 @@
           <a:p>
             <a:pPr algn="l"/>
             <a:r>
-              <a:rPr sz="1400" b="0" i="0">
+              <a:rPr sz="1300" b="0" i="0">
                 <a:solidFill>
                   <a:srgbClr val="142034"/>
                 </a:solidFill>
                 <a:latin typeface="Calibri"/>
               </a:rPr>
-              <a:t>Cost is O(L²), so we window at L = 2000 rather than the whole recording.</a:t>
-            </a:r>
-          </a:p>
-        </p:txBody>
-      </p:sp>
-      <p:sp>
-        <p:nvSpPr>
-          <p:cNvPr id="11" name="Oval 10"/>
+              <a:t>Rotate each by its own ToA.</a:t>
+            </a:r>
+          </a:p>
+        </p:txBody>
+      </p:sp>
+      <p:sp>
+        <p:nvSpPr>
+          <p:cNvPr id="10" name="Oval 9"/>
           <p:cNvSpPr/>
           <p:nvPr/>
         </p:nvSpPr>
         <p:spPr>
           <a:xfrm>
-            <a:off x="6766560" y="2157984"/>
+            <a:off x="8549640" y="2020824"/>
             <a:ext cx="109728" cy="109728"/>
           </a:xfrm>
           <a:prstGeom prst="ellipse">
@@ -13266,14 +10683,14 @@
       </p:sp>
       <p:sp>
         <p:nvSpPr>
-          <p:cNvPr id="12" name="TextBox 11"/>
+          <p:cNvPr id="11" name="TextBox 10"/>
           <p:cNvSpPr txBox="1"/>
           <p:nvPr/>
         </p:nvSpPr>
         <p:spPr>
           <a:xfrm>
-            <a:off x="7022592" y="2066544"/>
-            <a:ext cx="4773168" cy="694944"/>
+            <a:off x="8805672" y="1929384"/>
+            <a:ext cx="3035808" cy="694944"/>
           </a:xfrm>
           <a:prstGeom prst="rect">
             <a:avLst/>
@@ -13286,26 +10703,26 @@
           <a:p>
             <a:pPr algn="l"/>
             <a:r>
-              <a:rPr sz="1400" b="0" i="0">
+              <a:rPr sz="1300" b="0" i="0">
                 <a:solidFill>
                   <a:srgbClr val="142034"/>
                 </a:solidFill>
                 <a:latin typeface="Calibri"/>
               </a:rPr>
-              <a:t>LSTM is O(L), but a hidden state has to carry a 3-pulse train across a lock-on flood.</a:t>
-            </a:r>
-          </a:p>
-        </p:txBody>
-      </p:sp>
-      <p:sp>
-        <p:nvSpPr>
-          <p:cNvPr id="13" name="Oval 12"/>
+              <a:t>New angle: φ + Δt · ω.</a:t>
+            </a:r>
+          </a:p>
+        </p:txBody>
+      </p:sp>
+      <p:sp>
+        <p:nvSpPr>
+          <p:cNvPr id="12" name="Oval 11"/>
           <p:cNvSpPr/>
           <p:nvPr/>
         </p:nvSpPr>
         <p:spPr>
           <a:xfrm>
-            <a:off x="6766560" y="2779776"/>
+            <a:off x="8549640" y="2642616"/>
             <a:ext cx="109728" cy="109728"/>
           </a:xfrm>
           <a:prstGeom prst="ellipse">
@@ -13342,14 +10759,14 @@
       </p:sp>
       <p:sp>
         <p:nvSpPr>
-          <p:cNvPr id="14" name="TextBox 13"/>
+          <p:cNvPr id="13" name="TextBox 12"/>
           <p:cNvSpPr txBox="1"/>
           <p:nvPr/>
         </p:nvSpPr>
         <p:spPr>
           <a:xfrm>
-            <a:off x="7022592" y="2688336"/>
-            <a:ext cx="4773168" cy="694944"/>
+            <a:off x="8805672" y="2551176"/>
+            <a:ext cx="3035808" cy="694944"/>
           </a:xfrm>
           <a:prstGeom prst="rect">
             <a:avLst/>
@@ -13362,26 +10779,26 @@
           <a:p>
             <a:pPr algn="l"/>
             <a:r>
-              <a:rPr sz="1400" b="0" i="0">
+              <a:rPr sz="1300" b="0" i="0">
                 <a:solidFill>
                   <a:srgbClr val="142034"/>
                 </a:solidFill>
                 <a:latin typeface="Calibri"/>
               </a:rPr>
-              <a:t>Mamba / SSMs compress the past into a state. Pairwise “same PRI train?” is a comparison, not a state update.</a:t>
-            </a:r>
-          </a:p>
-        </p:txBody>
-      </p:sp>
-      <p:sp>
-        <p:nvSpPr>
-          <p:cNvPr id="15" name="Oval 14"/>
+              <a:t>Close in time → small extra twist, high score.</a:t>
+            </a:r>
+          </a:p>
+        </p:txBody>
+      </p:sp>
+      <p:sp>
+        <p:nvSpPr>
+          <p:cNvPr id="14" name="Oval 13"/>
           <p:cNvSpPr/>
           <p:nvPr/>
         </p:nvSpPr>
         <p:spPr>
           <a:xfrm>
-            <a:off x="6766560" y="3401568"/>
+            <a:off x="8549640" y="3264408"/>
             <a:ext cx="109728" cy="109728"/>
           </a:xfrm>
           <a:prstGeom prst="ellipse">
@@ -13418,14 +10835,14 @@
       </p:sp>
       <p:sp>
         <p:nvSpPr>
-          <p:cNvPr id="16" name="TextBox 15"/>
+          <p:cNvPr id="15" name="TextBox 14"/>
           <p:cNvSpPr txBox="1"/>
           <p:nvPr/>
         </p:nvSpPr>
         <p:spPr>
           <a:xfrm>
-            <a:off x="7022592" y="3310128"/>
-            <a:ext cx="4773168" cy="694944"/>
+            <a:off x="8805672" y="3172968"/>
+            <a:ext cx="3035808" cy="694944"/>
           </a:xfrm>
           <a:prstGeom prst="rect">
             <a:avLst/>
@@ -13438,26 +10855,26 @@
           <a:p>
             <a:pPr algn="l"/>
             <a:r>
-              <a:rPr sz="1400" b="0" i="0">
+              <a:rPr sz="1300" b="0" i="0">
                 <a:solidFill>
                   <a:srgbClr val="142034"/>
                 </a:solidFill>
                 <a:latin typeface="Calibri"/>
               </a:rPr>
-              <a:t>We did not bake off Mamba. The bet is that paying L² is worth it when the physics is pairwise.</a:t>
-            </a:r>
-          </a:p>
-        </p:txBody>
-      </p:sp>
-      <p:sp>
-        <p:nvSpPr>
-          <p:cNvPr id="17" name="Oval 16"/>
+              <a:t>Far in time → larger twist, lower score.</a:t>
+            </a:r>
+          </a:p>
+        </p:txBody>
+      </p:sp>
+      <p:sp>
+        <p:nvSpPr>
+          <p:cNvPr id="16" name="Oval 15"/>
           <p:cNvSpPr/>
           <p:nvPr/>
         </p:nvSpPr>
         <p:spPr>
           <a:xfrm>
-            <a:off x="6766560" y="4023360"/>
+            <a:off x="8549640" y="3886200"/>
             <a:ext cx="109728" cy="109728"/>
           </a:xfrm>
           <a:prstGeom prst="ellipse">
@@ -13494,14 +10911,14 @@
       </p:sp>
       <p:sp>
         <p:nvSpPr>
-          <p:cNvPr id="18" name="TextBox 17"/>
+          <p:cNvPr id="17" name="TextBox 16"/>
           <p:cNvSpPr txBox="1"/>
           <p:nvPr/>
         </p:nvSpPr>
         <p:spPr>
           <a:xfrm>
-            <a:off x="7022592" y="3931920"/>
-            <a:ext cx="4773168" cy="694944"/>
+            <a:off x="8805672" y="3794760"/>
+            <a:ext cx="3035808" cy="694944"/>
           </a:xfrm>
           <a:prstGeom prst="rect">
             <a:avLst/>
@@ -13514,20 +10931,20 @@
           <a:p>
             <a:pPr algn="l"/>
             <a:r>
-              <a:rPr sz="1400" b="0" i="0">
+              <a:rPr sz="1300" b="0" i="0">
                 <a:solidFill>
                   <a:srgbClr val="142034"/>
                 </a:solidFill>
                 <a:latin typeface="Calibri"/>
               </a:rPr>
-              <a:t>Then DBSCAN on the embeddings. Cluster IDs are local to the window.</a:t>
-            </a:r>
-          </a:p>
-        </p:txBody>
-      </p:sp>
-      <p:sp>
-        <p:nvSpPr>
-          <p:cNvPr id="19" name="Rectangle 18"/>
+              <a:t>Plays once, then holds the last frame.</a:t>
+            </a:r>
+          </a:p>
+        </p:txBody>
+      </p:sp>
+      <p:sp>
+        <p:nvSpPr>
+          <p:cNvPr id="18" name="Rectangle 17"/>
           <p:cNvSpPr/>
           <p:nvPr/>
         </p:nvSpPr>
@@ -13572,7 +10989,7 @@
       </p:sp>
       <p:sp>
         <p:nvSpPr>
-          <p:cNvPr id="20" name="TextBox 19"/>
+          <p:cNvPr id="19" name="TextBox 18"/>
           <p:cNvSpPr txBox="1"/>
           <p:nvPr/>
         </p:nvSpPr>
@@ -13605,7 +11022,7 @@
       </p:sp>
       <p:sp>
         <p:nvSpPr>
-          <p:cNvPr id="21" name="TextBox 20"/>
+          <p:cNvPr id="20" name="TextBox 19"/>
           <p:cNvSpPr txBox="1"/>
           <p:nvPr/>
         </p:nvSpPr>
@@ -13631,7 +11048,7 @@
                 </a:solidFill>
                 <a:latin typeface="Calibri"/>
               </a:rPr>
-              <a:t>7 / 15</a:t>
+              <a:t>7 / 11</a:t>
             </a:r>
           </a:p>
         </p:txBody>
@@ -13641,6 +11058,28 @@
   <p:clrMapOvr>
     <a:masterClrMapping/>
   </p:clrMapOvr>
+  <p:timing>
+    <p:tnLst>
+      <p:par>
+        <p:cTn id="1" dur="indefinite" restart="never" nodeType="tmRoot">
+          <p:childTnLst>
+            <p:video>
+              <p:cMediaNode vol="80000" showWhenStopped="1">
+                <p:cTn id="2" fill="hold" display="0" restart="never">
+                  <p:stCondLst>
+                    <p:cond delay="0"/>
+                  </p:stCondLst>
+                </p:cTn>
+                <p:tgtEl>
+                  <p:spTgt spid="5"/>
+                </p:tgtEl>
+              </p:cMediaNode>
+            </p:video>
+          </p:childTnLst>
+        </p:cTn>
+      </p:par>
+    </p:tnLst>
+  </p:timing>
 </p:sld>
 </file>
 
@@ -13748,8 +11187,8 @@
         </p:nvSpPr>
         <p:spPr>
           <a:xfrm>
-            <a:off x="502920" y="201168"/>
-            <a:ext cx="10972800" cy="365760"/>
+            <a:off x="502920" y="164592"/>
+            <a:ext cx="10972800" cy="320040"/>
           </a:xfrm>
           <a:prstGeom prst="rect">
             <a:avLst/>
@@ -13762,82 +11201,44 @@
           <a:p>
             <a:pPr algn="l"/>
             <a:r>
-              <a:rPr sz="2400" b="1" i="0">
+              <a:rPr sz="2200" b="1" i="0">
                 <a:solidFill>
                   <a:srgbClr val="142034"/>
                 </a:solidFill>
                 <a:latin typeface="Calibri"/>
               </a:rPr>
-              <a:t>Shared trunk, two heads, two positive sets</a:t>
-            </a:r>
-          </a:p>
-        </p:txBody>
-      </p:sp>
-      <p:sp>
-        <p:nvSpPr>
-          <p:cNvPr id="5" name="Rounded Rectangle 4"/>
-          <p:cNvSpPr/>
-          <p:nvPr/>
-        </p:nvSpPr>
-        <p:spPr>
-          <a:xfrm>
-            <a:off x="292608" y="612648"/>
-            <a:ext cx="7187184" cy="3834384"/>
-          </a:xfrm>
-          <a:prstGeom prst="roundRect">
-            <a:avLst>
-              <a:gd name="adj" fmla="val 4000"/>
-            </a:avLst>
-          </a:prstGeom>
-          <a:solidFill>
-            <a:srgbClr val="F3F6F8"/>
-          </a:solidFill>
-          <a:ln w="12700">
-            <a:solidFill>
-              <a:srgbClr val="D2DAE2"/>
-            </a:solidFill>
-          </a:ln>
-        </p:spPr>
-        <p:style>
-          <a:lnRef idx="1">
-            <a:schemeClr val="accent1"/>
-          </a:lnRef>
-          <a:fillRef idx="3">
-            <a:schemeClr val="accent1"/>
-          </a:fillRef>
-          <a:effectRef idx="2">
-            <a:schemeClr val="accent1"/>
-          </a:effectRef>
-          <a:fontRef idx="minor">
-            <a:schemeClr val="lt1"/>
-          </a:fontRef>
-        </p:style>
-        <p:txBody>
-          <a:bodyPr rtlCol="0" anchor="ctr"/>
-          <a:lstStyle/>
-          <a:p>
-            <a:pPr algn="ctr"/>
+              <a:t>Physical bias  ·  learned λ on delta maps, subtracted from A</a:t>
+            </a:r>
           </a:p>
         </p:txBody>
       </p:sp>
       <p:pic>
         <p:nvPicPr>
-          <p:cNvPr id="6" name="Picture 5" descr="y_architecture.png"/>
+          <p:cNvPr id="5" name="PhysicalBias.mp4">
+            <a:hlinkClick r:id="" action="ppaction://media"/>
+          </p:cNvPr>
           <p:cNvPicPr>
             <a:picLocks noChangeAspect="1"/>
           </p:cNvPicPr>
-          <p:nvPr/>
+          <p:nvPr>
+            <a:videoFile r:link="rId3"/>
+            <p:extLst>
+              <p:ext uri="{DAA4B4D4-6D71-4841-9C94-3DE7FCFB9230}">
+                <p14:media xmlns:p14="http://schemas.microsoft.com/office/powerpoint/2010/main" r:embed="rId2"/>
+              </p:ext>
+            </p:extLst>
+          </p:nvPr>
         </p:nvPicPr>
         <p:blipFill>
-          <a:blip r:embed="rId2"/>
+          <a:blip r:embed="rId4"/>
           <a:stretch>
             <a:fillRect/>
           </a:stretch>
         </p:blipFill>
         <p:spPr>
           <a:xfrm>
-            <a:off x="365760" y="685800"/>
-            <a:ext cx="7040880" cy="3688080"/>
+            <a:off x="411480" y="530352"/>
+            <a:ext cx="7955279" cy="4480560"/>
           </a:xfrm>
           <a:prstGeom prst="rect">
             <a:avLst/>
@@ -13846,13 +11247,13 @@
       </p:pic>
       <p:sp>
         <p:nvSpPr>
-          <p:cNvPr id="7" name="Oval 6"/>
+          <p:cNvPr id="6" name="Oval 5"/>
           <p:cNvSpPr/>
           <p:nvPr/>
         </p:nvSpPr>
         <p:spPr>
           <a:xfrm>
-            <a:off x="7589520" y="960120"/>
+            <a:off x="8549640" y="777240"/>
             <a:ext cx="109728" cy="109728"/>
           </a:xfrm>
           <a:prstGeom prst="ellipse">
@@ -13889,14 +11290,14 @@
       </p:sp>
       <p:sp>
         <p:nvSpPr>
-          <p:cNvPr id="8" name="TextBox 7"/>
+          <p:cNvPr id="7" name="TextBox 6"/>
           <p:cNvSpPr txBox="1"/>
           <p:nvPr/>
         </p:nvSpPr>
         <p:spPr>
           <a:xfrm>
-            <a:off x="7845552" y="868680"/>
-            <a:ext cx="3950208" cy="694944"/>
+            <a:off x="8805672" y="685800"/>
+            <a:ext cx="3035808" cy="731519"/>
           </a:xfrm>
           <a:prstGeom prst="rect">
             <a:avLst/>
@@ -13909,26 +11310,26 @@
           <a:p>
             <a:pPr algn="l"/>
             <a:r>
-              <a:rPr sz="1400" b="0" i="0">
+              <a:rPr sz="1300" b="0" i="0">
                 <a:solidFill>
                   <a:srgbClr val="142034"/>
                 </a:solidFill>
                 <a:latin typeface="Calibri"/>
               </a:rPr>
-              <a:t>~16 M parameters. Width 256, 8 heads.</a:t>
-            </a:r>
-          </a:p>
-        </p:txBody>
-      </p:sp>
-      <p:sp>
-        <p:nvSpPr>
-          <p:cNvPr id="9" name="Oval 8"/>
+              <a:t>|ΔToA| and |Δ incidence| from the inputs.</a:t>
+            </a:r>
+          </a:p>
+        </p:txBody>
+      </p:sp>
+      <p:sp>
+        <p:nvSpPr>
+          <p:cNvPr id="8" name="Oval 7"/>
           <p:cNvSpPr/>
           <p:nvPr/>
         </p:nvSpPr>
         <p:spPr>
           <a:xfrm>
-            <a:off x="7589520" y="1581912"/>
+            <a:off x="8549640" y="1435608"/>
             <a:ext cx="109728" cy="109728"/>
           </a:xfrm>
           <a:prstGeom prst="ellipse">
@@ -13965,14 +11366,14 @@
       </p:sp>
       <p:sp>
         <p:nvSpPr>
-          <p:cNvPr id="10" name="TextBox 9"/>
+          <p:cNvPr id="9" name="TextBox 8"/>
           <p:cNvSpPr txBox="1"/>
           <p:nvPr/>
         </p:nvSpPr>
         <p:spPr>
           <a:xfrm>
-            <a:off x="7845552" y="1490472"/>
-            <a:ext cx="3950208" cy="694944"/>
+            <a:off x="8805672" y="1344168"/>
+            <a:ext cx="3035808" cy="731519"/>
           </a:xfrm>
           <a:prstGeom prst="rect">
             <a:avLst/>
@@ -13985,26 +11386,26 @@
           <a:p>
             <a:pPr algn="l"/>
             <a:r>
-              <a:rPr sz="1400" b="0" i="0">
+              <a:rPr sz="1300" b="0" i="0">
                 <a:solidFill>
                   <a:srgbClr val="142034"/>
                 </a:solidFill>
                 <a:latin typeface="Calibri"/>
               </a:rPr>
-              <a:t>Emitter loss: same recording-local ID.</a:t>
-            </a:r>
-          </a:p>
-        </p:txBody>
-      </p:sp>
-      <p:sp>
-        <p:nvSpPr>
-          <p:cNvPr id="11" name="Oval 10"/>
+              <a:t>λ_t, λ_u: learned scalars on ToA and incidence.</a:t>
+            </a:r>
+          </a:p>
+        </p:txBody>
+      </p:sp>
+      <p:sp>
+        <p:nvSpPr>
+          <p:cNvPr id="10" name="Oval 9"/>
           <p:cNvSpPr/>
           <p:nvPr/>
         </p:nvSpPr>
         <p:spPr>
           <a:xfrm>
-            <a:off x="7589520" y="2203704"/>
+            <a:off x="8549640" y="2093976"/>
             <a:ext cx="109728" cy="109728"/>
           </a:xfrm>
           <a:prstGeom prst="ellipse">
@@ -14041,14 +11442,14 @@
       </p:sp>
       <p:sp>
         <p:nvSpPr>
-          <p:cNvPr id="12" name="TextBox 11"/>
+          <p:cNvPr id="11" name="TextBox 10"/>
           <p:cNvSpPr txBox="1"/>
           <p:nvPr/>
         </p:nvSpPr>
         <p:spPr>
           <a:xfrm>
-            <a:off x="7845552" y="2112264"/>
-            <a:ext cx="3950208" cy="694944"/>
+            <a:off x="8805672" y="2002536"/>
+            <a:ext cx="3035808" cy="731519"/>
           </a:xfrm>
           <a:prstGeom prst="rect">
             <a:avLst/>
@@ -14061,26 +11462,26 @@
           <a:p>
             <a:pPr algn="l"/>
             <a:r>
-              <a:rPr sz="1400" b="0" i="0">
+              <a:rPr sz="1300" b="0" i="0">
                 <a:solidFill>
                   <a:srgbClr val="142034"/>
                 </a:solidFill>
                 <a:latin typeface="Calibri"/>
               </a:rPr>
-              <a:t>Mode loss: same global catalogue label.</a:t>
-            </a:r>
-          </a:p>
-        </p:txBody>
-      </p:sp>
-      <p:sp>
-        <p:nvSpPr>
-          <p:cNvPr id="13" name="Oval 12"/>
+              <a:t>Bias λB is subtracted from vanilla A.</a:t>
+            </a:r>
+          </a:p>
+        </p:txBody>
+      </p:sp>
+      <p:sp>
+        <p:nvSpPr>
+          <p:cNvPr id="12" name="Oval 11"/>
           <p:cNvSpPr/>
           <p:nvPr/>
         </p:nvSpPr>
         <p:spPr>
           <a:xfrm>
-            <a:off x="7589520" y="2825496"/>
+            <a:off x="8549640" y="2752344"/>
             <a:ext cx="109728" cy="109728"/>
           </a:xfrm>
           <a:prstGeom prst="ellipse">
@@ -14117,14 +11518,14 @@
       </p:sp>
       <p:sp>
         <p:nvSpPr>
-          <p:cNvPr id="14" name="TextBox 13"/>
+          <p:cNvPr id="13" name="TextBox 12"/>
           <p:cNvSpPr txBox="1"/>
           <p:nvPr/>
         </p:nvSpPr>
         <p:spPr>
           <a:xfrm>
-            <a:off x="7845552" y="2734056"/>
-            <a:ext cx="3950208" cy="694944"/>
+            <a:off x="8805672" y="2660904"/>
+            <a:ext cx="3035808" cy="731519"/>
           </a:xfrm>
           <a:prstGeom prst="rect">
             <a:avLst/>
@@ -14137,26 +11538,26 @@
           <a:p>
             <a:pPr algn="l"/>
             <a:r>
-              <a:rPr sz="1400" b="0" i="0">
+              <a:rPr sz="1300" b="0" i="0">
                 <a:solidFill>
                   <a:srgbClr val="142034"/>
                 </a:solidFill>
                 <a:latin typeface="Calibri"/>
               </a:rPr>
-              <a:t>Same contrastive kernel. Only the positive set changes.</a:t>
-            </a:r>
-          </a:p>
-        </p:txBody>
-      </p:sp>
-      <p:sp>
-        <p:nvSpPr>
-          <p:cNvPr id="15" name="Oval 14"/>
+              <a:t>Same-direction, nearby pulses stay bright.</a:t>
+            </a:r>
+          </a:p>
+        </p:txBody>
+      </p:sp>
+      <p:sp>
+        <p:nvSpPr>
+          <p:cNvPr id="14" name="Oval 13"/>
           <p:cNvSpPr/>
           <p:nvPr/>
         </p:nvSpPr>
         <p:spPr>
           <a:xfrm>
-            <a:off x="7589520" y="3447288"/>
+            <a:off x="8549640" y="3410712"/>
             <a:ext cx="109728" cy="109728"/>
           </a:xfrm>
           <a:prstGeom prst="ellipse">
@@ -14193,14 +11594,14 @@
       </p:sp>
       <p:sp>
         <p:nvSpPr>
-          <p:cNvPr id="16" name="TextBox 15"/>
+          <p:cNvPr id="15" name="TextBox 14"/>
           <p:cNvSpPr txBox="1"/>
           <p:nvPr/>
         </p:nvSpPr>
         <p:spPr>
           <a:xfrm>
-            <a:off x="7845552" y="3355848"/>
-            <a:ext cx="3950208" cy="694944"/>
+            <a:off x="8805672" y="3319272"/>
+            <a:ext cx="3035808" cy="731519"/>
           </a:xfrm>
           <a:prstGeom prst="rect">
             <a:avLst/>
@@ -14213,96 +11614,20 @@
           <a:p>
             <a:pPr algn="l"/>
             <a:r>
-              <a:rPr sz="1400" b="0" i="0">
+              <a:rPr sz="1300" b="0" i="0">
                 <a:solidFill>
                   <a:srgbClr val="142034"/>
                 </a:solidFill>
                 <a:latin typeface="Calibri"/>
               </a:rPr>
-              <a:t>Joint training is the unweighted sum.</a:t>
-            </a:r>
-          </a:p>
-        </p:txBody>
-      </p:sp>
-      <p:sp>
-        <p:nvSpPr>
-          <p:cNvPr id="17" name="Oval 16"/>
-          <p:cNvSpPr/>
-          <p:nvPr/>
-        </p:nvSpPr>
-        <p:spPr>
-          <a:xfrm>
-            <a:off x="7589520" y="4069080"/>
-            <a:ext cx="109728" cy="109728"/>
-          </a:xfrm>
-          <a:prstGeom prst="ellipse">
-            <a:avLst/>
-          </a:prstGeom>
-          <a:solidFill>
-            <a:srgbClr val="0A7A96"/>
-          </a:solidFill>
-          <a:ln>
-            <a:noFill/>
-          </a:ln>
-        </p:spPr>
-        <p:style>
-          <a:lnRef idx="1">
-            <a:schemeClr val="accent1"/>
-          </a:lnRef>
-          <a:fillRef idx="3">
-            <a:schemeClr val="accent1"/>
-          </a:fillRef>
-          <a:effectRef idx="2">
-            <a:schemeClr val="accent1"/>
-          </a:effectRef>
-          <a:fontRef idx="minor">
-            <a:schemeClr val="lt1"/>
-          </a:fontRef>
-        </p:style>
-        <p:txBody>
-          <a:bodyPr rtlCol="0" anchor="ctr"/>
-          <a:lstStyle/>
-          <a:p>
-            <a:pPr algn="ctr"/>
-          </a:p>
-        </p:txBody>
-      </p:sp>
-      <p:sp>
-        <p:nvSpPr>
-          <p:cNvPr id="18" name="TextBox 17"/>
-          <p:cNvSpPr txBox="1"/>
-          <p:nvPr/>
-        </p:nvSpPr>
-        <p:spPr>
-          <a:xfrm>
-            <a:off x="7845552" y="3977640"/>
-            <a:ext cx="3950208" cy="694944"/>
-          </a:xfrm>
-          <a:prstGeom prst="rect">
-            <a:avLst/>
-          </a:prstGeom>
-          <a:noFill/>
-        </p:spPr>
-        <p:txBody>
-          <a:bodyPr wrap="square" anchor="t"/>
-          <a:lstStyle/>
-          <a:p>
-            <a:pPr algn="l"/>
-            <a:r>
-              <a:rPr sz="1400" b="0" i="0">
-                <a:solidFill>
-                  <a:srgbClr val="142034"/>
-                </a:solidFill>
-                <a:latin typeface="Calibri"/>
-              </a:rPr>
-              <a:t>DBSCAN at inference. Not in the loss.</a:t>
-            </a:r>
-          </a:p>
-        </p:txBody>
-      </p:sp>
-      <p:sp>
-        <p:nvSpPr>
-          <p:cNvPr id="19" name="Rectangle 18"/>
+              <a:t>Maps are L×L. That is the bill.</a:t>
+            </a:r>
+          </a:p>
+        </p:txBody>
+      </p:sp>
+      <p:sp>
+        <p:nvSpPr>
+          <p:cNvPr id="16" name="Rectangle 15"/>
           <p:cNvSpPr/>
           <p:nvPr/>
         </p:nvSpPr>
@@ -14347,7 +11672,7 @@
       </p:sp>
       <p:sp>
         <p:nvSpPr>
-          <p:cNvPr id="20" name="TextBox 19"/>
+          <p:cNvPr id="17" name="TextBox 16"/>
           <p:cNvSpPr txBox="1"/>
           <p:nvPr/>
         </p:nvSpPr>
@@ -14380,7 +11705,7 @@
       </p:sp>
       <p:sp>
         <p:nvSpPr>
-          <p:cNvPr id="21" name="TextBox 20"/>
+          <p:cNvPr id="18" name="TextBox 17"/>
           <p:cNvSpPr txBox="1"/>
           <p:nvPr/>
         </p:nvSpPr>
@@ -14406,7 +11731,7 @@
                 </a:solidFill>
                 <a:latin typeface="Calibri"/>
               </a:rPr>
-              <a:t>8 / 15</a:t>
+              <a:t>8 / 11</a:t>
             </a:r>
           </a:p>
         </p:txBody>
@@ -14416,6 +11741,28 @@
   <p:clrMapOvr>
     <a:masterClrMapping/>
   </p:clrMapOvr>
+  <p:timing>
+    <p:tnLst>
+      <p:par>
+        <p:cTn id="1" dur="indefinite" restart="never" nodeType="tmRoot">
+          <p:childTnLst>
+            <p:video>
+              <p:cMediaNode vol="80000" showWhenStopped="1">
+                <p:cTn id="2" fill="hold" display="0" restart="never">
+                  <p:stCondLst>
+                    <p:cond delay="0"/>
+                  </p:stCondLst>
+                </p:cTn>
+                <p:tgtEl>
+                  <p:spTgt spid="5"/>
+                </p:tgtEl>
+              </p:cMediaNode>
+            </p:video>
+          </p:childTnLst>
+        </p:cTn>
+      </p:par>
+    </p:tnLst>
+  </p:timing>
 </p:sld>
 </file>
 
@@ -14523,7 +11870,7 @@
         </p:nvSpPr>
         <p:spPr>
           <a:xfrm>
-            <a:off x="502920" y="201168"/>
+            <a:off x="502920" y="182880"/>
             <a:ext cx="10972800" cy="365760"/>
           </a:xfrm>
           <a:prstGeom prst="rect">
@@ -14543,7 +11890,7 @@
                 </a:solidFill>
                 <a:latin typeface="Calibri"/>
               </a:rPr>
-              <a:t>Two ways to put physics into attention</a:t>
+              <a:t>Vanilla already works on most windows</a:t>
             </a:r>
           </a:p>
         </p:txBody>
@@ -14556,12 +11903,12 @@
         </p:nvSpPr>
         <p:spPr>
           <a:xfrm>
-            <a:off x="502920" y="822960"/>
-            <a:ext cx="5486400" cy="5212080"/>
+            <a:off x="292608" y="566928"/>
+            <a:ext cx="6867144" cy="3704706"/>
           </a:xfrm>
           <a:prstGeom prst="roundRect">
             <a:avLst>
-              <a:gd name="adj" fmla="val 8000"/>
+              <a:gd name="adj" fmla="val 4000"/>
             </a:avLst>
           </a:prstGeom>
           <a:solidFill>
@@ -14595,39 +11942,30 @@
           </a:p>
         </p:txBody>
       </p:sp>
-      <p:sp>
-        <p:nvSpPr>
-          <p:cNvPr id="6" name="TextBox 5"/>
-          <p:cNvSpPr txBox="1"/>
-          <p:nvPr/>
-        </p:nvSpPr>
-        <p:spPr>
-          <a:xfrm>
-            <a:off x="731520" y="1005840"/>
-            <a:ext cx="5029200" cy="365760"/>
-          </a:xfrm>
-          <a:prstGeom prst="rect">
-            <a:avLst/>
-          </a:prstGeom>
-          <a:noFill/>
-        </p:spPr>
-        <p:txBody>
-          <a:bodyPr wrap="square" anchor="t"/>
-          <a:lstStyle/>
-          <a:p>
-            <a:pPr algn="l"/>
-            <a:r>
-              <a:rPr sz="2000" b="1" i="0">
-                <a:solidFill>
-                  <a:srgbClr val="0A7A96"/>
-                </a:solidFill>
-                <a:latin typeface="Calibri"/>
-              </a:rPr>
-              <a:t>RoPE-TOA</a:t>
-            </a:r>
-          </a:p>
-        </p:txBody>
-      </p:sp>
+      <p:pic>
+        <p:nvPicPr>
+          <p:cNvPr id="6" name="Picture 5" descr="hist_em.png"/>
+          <p:cNvPicPr>
+            <a:picLocks noChangeAspect="1"/>
+          </p:cNvPicPr>
+          <p:nvPr/>
+        </p:nvPicPr>
+        <p:blipFill>
+          <a:blip r:embed="rId2"/>
+          <a:stretch>
+            <a:fillRect/>
+          </a:stretch>
+        </p:blipFill>
+        <p:spPr>
+          <a:xfrm>
+            <a:off x="365760" y="640080"/>
+            <a:ext cx="6720840" cy="3558402"/>
+          </a:xfrm>
+          <a:prstGeom prst="rect">
+            <a:avLst/>
+          </a:prstGeom>
+        </p:spPr>
+      </p:pic>
       <p:sp>
         <p:nvSpPr>
           <p:cNvPr id="7" name="Oval 6"/>
@@ -14636,7 +11974,7 @@
         </p:nvSpPr>
         <p:spPr>
           <a:xfrm>
-            <a:off x="731520" y="1600200"/>
+            <a:off x="7315200" y="868680"/>
             <a:ext cx="109728" cy="109728"/>
           </a:xfrm>
           <a:prstGeom prst="ellipse">
@@ -14679,8 +12017,8 @@
         </p:nvSpPr>
         <p:spPr>
           <a:xfrm>
-            <a:off x="987552" y="1508760"/>
-            <a:ext cx="4773168" cy="731519"/>
+            <a:off x="7571232" y="777240"/>
+            <a:ext cx="4224528" cy="822959"/>
           </a:xfrm>
           <a:prstGeom prst="rect">
             <a:avLst/>
@@ -14693,13 +12031,13 @@
           <a:p>
             <a:pPr algn="l"/>
             <a:r>
-              <a:rPr sz="1500" b="0" i="0">
+              <a:rPr sz="1400" b="0" i="0">
                 <a:solidFill>
                   <a:srgbClr val="142034"/>
                 </a:solidFill>
                 <a:latin typeface="Calibri"/>
               </a:rPr>
-              <a:t>Rotate Q and K by window-local ToA.</a:t>
+              <a:t>Feature DBSCAN emitter ARI 0.58. Completeness 0.52.</a:t>
             </a:r>
           </a:p>
         </p:txBody>
@@ -14712,7 +12050,7 @@
         </p:nvSpPr>
         <p:spPr>
           <a:xfrm>
-            <a:off x="731520" y="2258568"/>
+            <a:off x="7315200" y="1618488"/>
             <a:ext cx="109728" cy="109728"/>
           </a:xfrm>
           <a:prstGeom prst="ellipse">
@@ -14755,8 +12093,8 @@
         </p:nvSpPr>
         <p:spPr>
           <a:xfrm>
-            <a:off x="987552" y="2167128"/>
-            <a:ext cx="4773168" cy="731519"/>
+            <a:off x="7571232" y="1527048"/>
+            <a:ext cx="4224528" cy="822959"/>
           </a:xfrm>
           <a:prstGeom prst="rect">
             <a:avLst/>
@@ -14769,13 +12107,13 @@
           <a:p>
             <a:pPr algn="l"/>
             <a:r>
-              <a:rPr sz="1500" b="0" i="0">
+              <a:rPr sz="1400" b="0" i="0">
                 <a:solidFill>
                   <a:srgbClr val="142034"/>
                 </a:solidFill>
                 <a:latin typeface="Calibri"/>
               </a:rPr>
-              <a:t>The score is a dot product, so the enclosed angle matters.</a:t>
+              <a:t>Vanilla joint: 0.95 emitter, 0.99 mode.</a:t>
             </a:r>
           </a:p>
         </p:txBody>
@@ -14788,7 +12126,7 @@
         </p:nvSpPr>
         <p:spPr>
           <a:xfrm>
-            <a:off x="731520" y="2916936"/>
+            <a:off x="7315200" y="2368296"/>
             <a:ext cx="109728" cy="109728"/>
           </a:xfrm>
           <a:prstGeom prst="ellipse">
@@ -14831,8 +12169,8 @@
         </p:nvSpPr>
         <p:spPr>
           <a:xfrm>
-            <a:off x="987552" y="2825496"/>
-            <a:ext cx="4773168" cy="731519"/>
+            <a:off x="7571232" y="2276856"/>
+            <a:ext cx="4224528" cy="822959"/>
           </a:xfrm>
           <a:prstGeom prst="rect">
             <a:avLst/>
@@ -14845,13 +12183,13 @@
           <a:p>
             <a:pPr algn="l"/>
             <a:r>
-              <a:rPr sz="1500" b="0" i="0">
+              <a:rPr sz="1400" b="0" i="0">
                 <a:solidFill>
                   <a:srgbClr val="142034"/>
                 </a:solidFill>
                 <a:latin typeface="Calibri"/>
               </a:rPr>
-              <a:t>Only the relative rotation R(Δt) enters the product.</a:t>
+              <a:t>88% of windows ≥ 0.99. About 1 in 10 below 0.90.</a:t>
             </a:r>
           </a:p>
         </p:txBody>
@@ -14864,7 +12202,7 @@
         </p:nvSpPr>
         <p:spPr>
           <a:xfrm>
-            <a:off x="731520" y="3575304"/>
+            <a:off x="7315200" y="3118104"/>
             <a:ext cx="109728" cy="109728"/>
           </a:xfrm>
           <a:prstGeom prst="ellipse">
@@ -14907,8 +12245,8 @@
         </p:nvSpPr>
         <p:spPr>
           <a:xfrm>
-            <a:off x="987552" y="3483864"/>
-            <a:ext cx="4773168" cy="731519"/>
+            <a:off x="7571232" y="3026664"/>
+            <a:ext cx="4224528" cy="822959"/>
           </a:xfrm>
           <a:prstGeom prst="rect">
             <a:avLst/>
@@ -14921,106 +12259,26 @@
           <a:p>
             <a:pPr algn="l"/>
             <a:r>
-              <a:rPr sz="1500" b="0" i="0">
+              <a:rPr sz="1400" b="0" i="0">
                 <a:solidFill>
                   <a:srgbClr val="142034"/>
                 </a:solidFill>
                 <a:latin typeface="Calibri"/>
               </a:rPr>
-              <a:t>No extra weights. Encoder ~2.5 ms.</a:t>
-            </a:r>
-          </a:p>
-        </p:txBody>
-      </p:sp>
-      <p:sp>
-        <p:nvSpPr>
-          <p:cNvPr id="15" name="Rounded Rectangle 14"/>
+              <a:t>RoPE-TOA and Bias stay just below 1. None below 0.90.</a:t>
+            </a:r>
+          </a:p>
+        </p:txBody>
+      </p:sp>
+      <p:sp>
+        <p:nvSpPr>
+          <p:cNvPr id="15" name="Oval 14"/>
           <p:cNvSpPr/>
           <p:nvPr/>
         </p:nvSpPr>
         <p:spPr>
           <a:xfrm>
-            <a:off x="6217920" y="822960"/>
-            <a:ext cx="5486400" cy="5212080"/>
-          </a:xfrm>
-          <a:prstGeom prst="roundRect">
-            <a:avLst>
-              <a:gd name="adj" fmla="val 8000"/>
-            </a:avLst>
-          </a:prstGeom>
-          <a:solidFill>
-            <a:srgbClr val="F3F6F8"/>
-          </a:solidFill>
-          <a:ln w="12700">
-            <a:solidFill>
-              <a:srgbClr val="D2DAE2"/>
-            </a:solidFill>
-          </a:ln>
-        </p:spPr>
-        <p:style>
-          <a:lnRef idx="1">
-            <a:schemeClr val="accent1"/>
-          </a:lnRef>
-          <a:fillRef idx="3">
-            <a:schemeClr val="accent1"/>
-          </a:fillRef>
-          <a:effectRef idx="2">
-            <a:schemeClr val="accent1"/>
-          </a:effectRef>
-          <a:fontRef idx="minor">
-            <a:schemeClr val="lt1"/>
-          </a:fontRef>
-        </p:style>
-        <p:txBody>
-          <a:bodyPr rtlCol="0" anchor="ctr"/>
-          <a:lstStyle/>
-          <a:p>
-            <a:pPr algn="ctr"/>
-          </a:p>
-        </p:txBody>
-      </p:sp>
-      <p:sp>
-        <p:nvSpPr>
-          <p:cNvPr id="16" name="TextBox 15"/>
-          <p:cNvSpPr txBox="1"/>
-          <p:nvPr/>
-        </p:nvSpPr>
-        <p:spPr>
-          <a:xfrm>
-            <a:off x="6446520" y="1005840"/>
-            <a:ext cx="5029200" cy="365760"/>
-          </a:xfrm>
-          <a:prstGeom prst="rect">
-            <a:avLst/>
-          </a:prstGeom>
-          <a:noFill/>
-        </p:spPr>
-        <p:txBody>
-          <a:bodyPr wrap="square" anchor="t"/>
-          <a:lstStyle/>
-          <a:p>
-            <a:pPr algn="l"/>
-            <a:r>
-              <a:rPr sz="2000" b="1" i="0">
-                <a:solidFill>
-                  <a:srgbClr val="C45A20"/>
-                </a:solidFill>
-                <a:latin typeface="Calibri"/>
-              </a:rPr>
-              <a:t>Physical bias</a:t>
-            </a:r>
-          </a:p>
-        </p:txBody>
-      </p:sp>
-      <p:sp>
-        <p:nvSpPr>
-          <p:cNvPr id="17" name="Oval 16"/>
-          <p:cNvSpPr/>
-          <p:nvPr/>
-        </p:nvSpPr>
-        <p:spPr>
-          <a:xfrm>
-            <a:off x="6446520" y="1600200"/>
+            <a:off x="7315200" y="3867912"/>
             <a:ext cx="109728" cy="109728"/>
           </a:xfrm>
           <a:prstGeom prst="ellipse">
@@ -15057,14 +12315,14 @@
       </p:sp>
       <p:sp>
         <p:nvSpPr>
-          <p:cNvPr id="18" name="TextBox 17"/>
+          <p:cNvPr id="16" name="TextBox 15"/>
           <p:cNvSpPr txBox="1"/>
           <p:nvPr/>
         </p:nvSpPr>
         <p:spPr>
           <a:xfrm>
-            <a:off x="6702552" y="1508760"/>
-            <a:ext cx="4773168" cy="731519"/>
+            <a:off x="7571232" y="3776472"/>
+            <a:ext cx="4224528" cy="822959"/>
           </a:xfrm>
           <a:prstGeom prst="rect">
             <a:avLst/>
@@ -15077,248 +12335,20 @@
           <a:p>
             <a:pPr algn="l"/>
             <a:r>
-              <a:rPr sz="1500" b="0" i="0">
+              <a:rPr sz="1400" b="0" i="0">
                 <a:solidFill>
                   <a:srgbClr val="142034"/>
                 </a:solidFill>
                 <a:latin typeface="Calibri"/>
               </a:rPr>
-              <a:t>Build B_ij = |p_i − p_j| from ToA and incidence.</a:t>
-            </a:r>
-          </a:p>
-        </p:txBody>
-      </p:sp>
-      <p:sp>
-        <p:nvSpPr>
-          <p:cNvPr id="19" name="Oval 18"/>
-          <p:cNvSpPr/>
-          <p:nvPr/>
-        </p:nvSpPr>
-        <p:spPr>
-          <a:xfrm>
-            <a:off x="6446520" y="2258568"/>
-            <a:ext cx="109728" cy="109728"/>
-          </a:xfrm>
-          <a:prstGeom prst="ellipse">
-            <a:avLst/>
-          </a:prstGeom>
-          <a:solidFill>
-            <a:srgbClr val="0A7A96"/>
-          </a:solidFill>
-          <a:ln>
-            <a:noFill/>
-          </a:ln>
-        </p:spPr>
-        <p:style>
-          <a:lnRef idx="1">
-            <a:schemeClr val="accent1"/>
-          </a:lnRef>
-          <a:fillRef idx="3">
-            <a:schemeClr val="accent1"/>
-          </a:fillRef>
-          <a:effectRef idx="2">
-            <a:schemeClr val="accent1"/>
-          </a:effectRef>
-          <a:fontRef idx="minor">
-            <a:schemeClr val="lt1"/>
-          </a:fontRef>
-        </p:style>
-        <p:txBody>
-          <a:bodyPr rtlCol="0" anchor="ctr"/>
-          <a:lstStyle/>
-          <a:p>
-            <a:pPr algn="ctr"/>
-          </a:p>
-        </p:txBody>
-      </p:sp>
-      <p:sp>
-        <p:nvSpPr>
-          <p:cNvPr id="20" name="TextBox 19"/>
-          <p:cNvSpPr txBox="1"/>
-          <p:nvPr/>
-        </p:nvSpPr>
-        <p:spPr>
-          <a:xfrm>
-            <a:off x="6702552" y="2167128"/>
-            <a:ext cx="4773168" cy="731519"/>
-          </a:xfrm>
-          <a:prstGeom prst="rect">
-            <a:avLst/>
-          </a:prstGeom>
-          <a:noFill/>
-        </p:spPr>
-        <p:txBody>
-          <a:bodyPr wrap="square" anchor="t"/>
-          <a:lstStyle/>
-          <a:p>
-            <a:pPr algn="l"/>
-            <a:r>
-              <a:rPr sz="1500" b="0" i="0">
-                <a:solidFill>
-                  <a:srgbClr val="142034"/>
-                </a:solidFill>
-                <a:latin typeface="Calibri"/>
-              </a:rPr>
-              <a:t>Scale by learned λ, subtract from the attention matrix A.</a:t>
-            </a:r>
-          </a:p>
-        </p:txBody>
-      </p:sp>
-      <p:sp>
-        <p:nvSpPr>
-          <p:cNvPr id="21" name="Oval 20"/>
-          <p:cNvSpPr/>
-          <p:nvPr/>
-        </p:nvSpPr>
-        <p:spPr>
-          <a:xfrm>
-            <a:off x="6446520" y="2916936"/>
-            <a:ext cx="109728" cy="109728"/>
-          </a:xfrm>
-          <a:prstGeom prst="ellipse">
-            <a:avLst/>
-          </a:prstGeom>
-          <a:solidFill>
-            <a:srgbClr val="0A7A96"/>
-          </a:solidFill>
-          <a:ln>
-            <a:noFill/>
-          </a:ln>
-        </p:spPr>
-        <p:style>
-          <a:lnRef idx="1">
-            <a:schemeClr val="accent1"/>
-          </a:lnRef>
-          <a:fillRef idx="3">
-            <a:schemeClr val="accent1"/>
-          </a:fillRef>
-          <a:effectRef idx="2">
-            <a:schemeClr val="accent1"/>
-          </a:effectRef>
-          <a:fontRef idx="minor">
-            <a:schemeClr val="lt1"/>
-          </a:fontRef>
-        </p:style>
-        <p:txBody>
-          <a:bodyPr rtlCol="0" anchor="ctr"/>
-          <a:lstStyle/>
-          <a:p>
-            <a:pPr algn="ctr"/>
-          </a:p>
-        </p:txBody>
-      </p:sp>
-      <p:sp>
-        <p:nvSpPr>
-          <p:cNvPr id="22" name="TextBox 21"/>
-          <p:cNvSpPr txBox="1"/>
-          <p:nvPr/>
-        </p:nvSpPr>
-        <p:spPr>
-          <a:xfrm>
-            <a:off x="6702552" y="2825496"/>
-            <a:ext cx="4773168" cy="731519"/>
-          </a:xfrm>
-          <a:prstGeom prst="rect">
-            <a:avLst/>
-          </a:prstGeom>
-          <a:noFill/>
-        </p:spPr>
-        <p:txBody>
-          <a:bodyPr wrap="square" anchor="t"/>
-          <a:lstStyle/>
-          <a:p>
-            <a:pPr algn="l"/>
-            <a:r>
-              <a:rPr sz="1500" b="0" i="0">
-                <a:solidFill>
-                  <a:srgbClr val="142034"/>
-                </a:solidFill>
-                <a:latin typeface="Calibri"/>
-              </a:rPr>
-              <a:t>Same emitter scores as RoPE-TOA.</a:t>
-            </a:r>
-          </a:p>
-        </p:txBody>
-      </p:sp>
-      <p:sp>
-        <p:nvSpPr>
-          <p:cNvPr id="23" name="Oval 22"/>
-          <p:cNvSpPr/>
-          <p:nvPr/>
-        </p:nvSpPr>
-        <p:spPr>
-          <a:xfrm>
-            <a:off x="6446520" y="3575304"/>
-            <a:ext cx="109728" cy="109728"/>
-          </a:xfrm>
-          <a:prstGeom prst="ellipse">
-            <a:avLst/>
-          </a:prstGeom>
-          <a:solidFill>
-            <a:srgbClr val="0A7A96"/>
-          </a:solidFill>
-          <a:ln>
-            <a:noFill/>
-          </a:ln>
-        </p:spPr>
-        <p:style>
-          <a:lnRef idx="1">
-            <a:schemeClr val="accent1"/>
-          </a:lnRef>
-          <a:fillRef idx="3">
-            <a:schemeClr val="accent1"/>
-          </a:fillRef>
-          <a:effectRef idx="2">
-            <a:schemeClr val="accent1"/>
-          </a:effectRef>
-          <a:fontRef idx="minor">
-            <a:schemeClr val="lt1"/>
-          </a:fontRef>
-        </p:style>
-        <p:txBody>
-          <a:bodyPr rtlCol="0" anchor="ctr"/>
-          <a:lstStyle/>
-          <a:p>
-            <a:pPr algn="ctr"/>
-          </a:p>
-        </p:txBody>
-      </p:sp>
-      <p:sp>
-        <p:nvSpPr>
-          <p:cNvPr id="24" name="TextBox 23"/>
-          <p:cNvSpPr txBox="1"/>
-          <p:nvPr/>
-        </p:nvSpPr>
-        <p:spPr>
-          <a:xfrm>
-            <a:off x="6702552" y="3483864"/>
-            <a:ext cx="4773168" cy="731519"/>
-          </a:xfrm>
-          <a:prstGeom prst="rect">
-            <a:avLst/>
-          </a:prstGeom>
-          <a:noFill/>
-        </p:spPr>
-        <p:txBody>
-          <a:bodyPr wrap="square" anchor="t"/>
-          <a:lstStyle/>
-          <a:p>
-            <a:pPr algn="l"/>
-            <a:r>
-              <a:rPr sz="1500" b="0" i="0">
-                <a:solidFill>
-                  <a:srgbClr val="142034"/>
-                </a:solidFill>
-                <a:latin typeface="Calibri"/>
-              </a:rPr>
-              <a:t>Encoder ~32 ms. Extra L×L maps in every head.</a:t>
-            </a:r>
-          </a:p>
-        </p:txBody>
-      </p:sp>
-      <p:sp>
-        <p:nvSpPr>
-          <p:cNvPr id="25" name="Rectangle 24"/>
+              <a:t>Stacking them is worse than Vanilla.</a:t>
+            </a:r>
+          </a:p>
+        </p:txBody>
+      </p:sp>
+      <p:sp>
+        <p:nvSpPr>
+          <p:cNvPr id="17" name="Rectangle 16"/>
           <p:cNvSpPr/>
           <p:nvPr/>
         </p:nvSpPr>
@@ -15363,7 +12393,7 @@
       </p:sp>
       <p:sp>
         <p:nvSpPr>
-          <p:cNvPr id="26" name="TextBox 25"/>
+          <p:cNvPr id="18" name="TextBox 17"/>
           <p:cNvSpPr txBox="1"/>
           <p:nvPr/>
         </p:nvSpPr>
@@ -15396,7 +12426,7 @@
       </p:sp>
       <p:sp>
         <p:nvSpPr>
-          <p:cNvPr id="27" name="TextBox 26"/>
+          <p:cNvPr id="19" name="TextBox 18"/>
           <p:cNvSpPr txBox="1"/>
           <p:nvPr/>
         </p:nvSpPr>
@@ -15422,7 +12452,7 @@
                 </a:solidFill>
                 <a:latin typeface="Calibri"/>
               </a:rPr>
-              <a:t>9 / 15</a:t>
+              <a:t>9 / 11</a:t>
             </a:r>
           </a:p>
         </p:txBody>
